--- a/presentations/out/Основные состояния, требующие первой помощи.pptx
+++ b/presentations/out/Основные состояния, требующие первой помощи.pptx
@@ -15,6 +15,12 @@
     <p:sldId id="263" r:id="rId14"/>
     <p:sldId id="264" r:id="rId15"/>
     <p:sldId id="265" r:id="rId16"/>
+    <p:sldId id="266" r:id="rId17"/>
+    <p:sldId id="267" r:id="rId18"/>
+    <p:sldId id="268" r:id="rId19"/>
+    <p:sldId id="269" r:id="rId20"/>
+    <p:sldId id="270" r:id="rId21"/>
+    <p:sldId id="271" r:id="rId22"/>
   </p:sldIdLst>
   <p:sldSz cx="12191695" cy="6858000" type="screen4x3"/>
   <p:notesSz cx="6858000" cy="9144000"/>
@@ -3371,6 +3377,2940 @@
         <p:spPr>
           <a:xfrm>
             <a:off x="0" y="0"/>
+            <a:ext cx="12191695" cy="6858000"/>
+          </a:xfrm>
+          <a:prstGeom prst="rect">
+            <a:avLst/>
+          </a:prstGeom>
+          <a:solidFill>
+            <a:srgbClr val="FFFFFF"/>
+          </a:solidFill>
+          <a:ln>
+            <a:noFill/>
+          </a:ln>
+        </p:spPr>
+        <p:style>
+          <a:lnRef idx="1">
+            <a:schemeClr val="accent1"/>
+          </a:lnRef>
+          <a:fillRef idx="3">
+            <a:schemeClr val="accent1"/>
+          </a:fillRef>
+          <a:effectRef idx="2">
+            <a:schemeClr val="accent1"/>
+          </a:effectRef>
+          <a:fontRef idx="minor">
+            <a:schemeClr val="lt1"/>
+          </a:fontRef>
+        </p:style>
+        <p:txBody>
+          <a:bodyPr rtlCol="0" anchor="ctr"/>
+          <a:lstStyle/>
+          <a:p>
+            <a:pPr algn="ctr"/>
+          </a:p>
+        </p:txBody>
+      </p:sp>
+      <p:sp>
+        <p:nvSpPr>
+          <p:cNvPr id="3" name="TextBox 2"/>
+          <p:cNvSpPr txBox="1"/>
+          <p:nvPr/>
+        </p:nvSpPr>
+        <p:spPr>
+          <a:xfrm>
+            <a:off x="700000" y="250000"/>
+            <a:ext cx="11200000" cy="550000"/>
+          </a:xfrm>
+          <a:prstGeom prst="rect">
+            <a:avLst/>
+          </a:prstGeom>
+          <a:noFill/>
+        </p:spPr>
+        <p:txBody>
+          <a:bodyPr wrap="square" anchor="t">
+            <a:spAutoFit/>
+          </a:bodyPr>
+          <a:lstStyle/>
+          <a:p>
+            <a:pPr algn="l"/>
+            <a:r>
+              <a:rPr sz="2200" b="1">
+                <a:solidFill>
+                  <a:srgbClr val="333333"/>
+                </a:solidFill>
+                <a:latin typeface="Open Sans"/>
+                <a:ea typeface="Open Sans"/>
+                <a:cs typeface="Open Sans"/>
+              </a:rPr>
+              <a:t>ОТРАВЛЕНИЕ</a:t>
+            </a:r>
+          </a:p>
+        </p:txBody>
+      </p:sp>
+      <p:sp>
+        <p:nvSpPr>
+          <p:cNvPr id="4" name="Rectangle 3"/>
+          <p:cNvSpPr/>
+          <p:nvPr/>
+        </p:nvSpPr>
+        <p:spPr>
+          <a:xfrm>
+            <a:off x="700000" y="850000"/>
+            <a:ext cx="9000000" cy="28000"/>
+          </a:xfrm>
+          <a:prstGeom prst="rect">
+            <a:avLst/>
+          </a:prstGeom>
+          <a:solidFill>
+            <a:srgbClr val="555555"/>
+          </a:solidFill>
+          <a:ln>
+            <a:noFill/>
+          </a:ln>
+        </p:spPr>
+        <p:style>
+          <a:lnRef idx="1">
+            <a:schemeClr val="accent1"/>
+          </a:lnRef>
+          <a:fillRef idx="3">
+            <a:schemeClr val="accent1"/>
+          </a:fillRef>
+          <a:effectRef idx="2">
+            <a:schemeClr val="accent1"/>
+          </a:effectRef>
+          <a:fontRef idx="minor">
+            <a:schemeClr val="lt1"/>
+          </a:fontRef>
+        </p:style>
+        <p:txBody>
+          <a:bodyPr rtlCol="0" anchor="ctr"/>
+          <a:lstStyle/>
+          <a:p>
+            <a:pPr algn="ctr"/>
+          </a:p>
+        </p:txBody>
+      </p:sp>
+      <p:sp>
+        <p:nvSpPr>
+          <p:cNvPr id="5" name="TextBox 4"/>
+          <p:cNvSpPr txBox="1"/>
+          <p:nvPr/>
+        </p:nvSpPr>
+        <p:spPr>
+          <a:xfrm>
+            <a:off x="700000" y="920000"/>
+            <a:ext cx="11000000" cy="350000"/>
+          </a:xfrm>
+          <a:prstGeom prst="rect">
+            <a:avLst/>
+          </a:prstGeom>
+          <a:noFill/>
+        </p:spPr>
+        <p:txBody>
+          <a:bodyPr wrap="square" anchor="t">
+            <a:spAutoFit/>
+          </a:bodyPr>
+          <a:lstStyle/>
+          <a:p>
+            <a:pPr algn="l"/>
+            <a:r>
+              <a:rPr sz="1200" b="0">
+                <a:solidFill>
+                  <a:srgbClr val="666666"/>
+                </a:solidFill>
+                <a:latin typeface="Open Sans"/>
+                <a:ea typeface="Open Sans"/>
+                <a:cs typeface="Open Sans"/>
+              </a:rPr>
+              <a:t>Оказание первой помощи при травмах, ранениях и поражениях, прочих состояниях</a:t>
+            </a:r>
+          </a:p>
+        </p:txBody>
+      </p:sp>
+      <p:sp>
+        <p:nvSpPr>
+          <p:cNvPr id="6" name="Rectangle 5"/>
+          <p:cNvSpPr/>
+          <p:nvPr/>
+        </p:nvSpPr>
+        <p:spPr>
+          <a:xfrm>
+            <a:off x="0" y="2800000"/>
+            <a:ext cx="420000" cy="420000"/>
+          </a:xfrm>
+          <a:prstGeom prst="rect">
+            <a:avLst/>
+          </a:prstGeom>
+          <a:solidFill>
+            <a:srgbClr val="555555"/>
+          </a:solidFill>
+          <a:ln>
+            <a:noFill/>
+          </a:ln>
+        </p:spPr>
+        <p:style>
+          <a:lnRef idx="1">
+            <a:schemeClr val="accent1"/>
+          </a:lnRef>
+          <a:fillRef idx="3">
+            <a:schemeClr val="accent1"/>
+          </a:fillRef>
+          <a:effectRef idx="2">
+            <a:schemeClr val="accent1"/>
+          </a:effectRef>
+          <a:fontRef idx="minor">
+            <a:schemeClr val="lt1"/>
+          </a:fontRef>
+        </p:style>
+        <p:txBody>
+          <a:bodyPr rtlCol="0" anchor="ctr"/>
+          <a:lstStyle/>
+          <a:p>
+            <a:pPr algn="ctr"/>
+          </a:p>
+        </p:txBody>
+      </p:sp>
+      <p:sp>
+        <p:nvSpPr>
+          <p:cNvPr id="7" name="TextBox 6"/>
+          <p:cNvSpPr txBox="1"/>
+          <p:nvPr/>
+        </p:nvSpPr>
+        <p:spPr>
+          <a:xfrm>
+            <a:off x="0" y="2800000"/>
+            <a:ext cx="420000" cy="420000"/>
+          </a:xfrm>
+          <a:prstGeom prst="rect">
+            <a:avLst/>
+          </a:prstGeom>
+          <a:noFill/>
+        </p:spPr>
+        <p:txBody>
+          <a:bodyPr wrap="square" anchor="ctr">
+            <a:spAutoFit/>
+          </a:bodyPr>
+          <a:lstStyle/>
+          <a:p>
+            <a:pPr algn="ctr"/>
+            <a:r>
+              <a:rPr sz="1400" b="1">
+                <a:solidFill>
+                  <a:srgbClr val="FFFFFF"/>
+                </a:solidFill>
+                <a:latin typeface="Open Sans"/>
+                <a:ea typeface="Open Sans"/>
+                <a:cs typeface="Open Sans"/>
+              </a:rPr>
+              <a:t>10</a:t>
+            </a:r>
+          </a:p>
+        </p:txBody>
+      </p:sp>
+      <p:sp>
+        <p:nvSpPr>
+          <p:cNvPr id="8" name="TextBox 7"/>
+          <p:cNvSpPr txBox="1"/>
+          <p:nvPr/>
+        </p:nvSpPr>
+        <p:spPr>
+          <a:xfrm>
+            <a:off x="700000" y="1450000"/>
+            <a:ext cx="11000000" cy="4000000"/>
+          </a:xfrm>
+          <a:prstGeom prst="rect">
+            <a:avLst/>
+          </a:prstGeom>
+          <a:noFill/>
+        </p:spPr>
+        <p:txBody>
+          <a:bodyPr wrap="square">
+            <a:spAutoFit/>
+          </a:bodyPr>
+          <a:lstStyle/>
+          <a:p>
+            <a:pPr algn="l">
+              <a:spcAft>
+                <a:spcPts val="800"/>
+              </a:spcAft>
+            </a:pPr>
+            <a:r>
+              <a:rPr sz="1400" b="0">
+                <a:solidFill>
+                  <a:srgbClr val="333333"/>
+                </a:solidFill>
+                <a:latin typeface="Open Sans"/>
+                <a:ea typeface="Open Sans"/>
+                <a:cs typeface="Open Sans"/>
+              </a:rPr>
+              <a:t>•  Прекратите поступление яда, не подвергая опасности себя.</a:t>
+            </a:r>
+          </a:p>
+          <a:p>
+            <a:pPr algn="l">
+              <a:spcAft>
+                <a:spcPts val="800"/>
+              </a:spcAft>
+            </a:pPr>
+            <a:r>
+              <a:rPr sz="1400" b="0">
+                <a:solidFill>
+                  <a:srgbClr val="333333"/>
+                </a:solidFill>
+                <a:latin typeface="Open Sans"/>
+                <a:ea typeface="Open Sans"/>
+                <a:cs typeface="Open Sans"/>
+              </a:rPr>
+              <a:t>•  Выясните вещество, путь поступления, примерное количество и время.</a:t>
+            </a:r>
+          </a:p>
+          <a:p>
+            <a:pPr algn="l">
+              <a:spcAft>
+                <a:spcPts val="800"/>
+              </a:spcAft>
+            </a:pPr>
+            <a:r>
+              <a:rPr sz="1400" b="0">
+                <a:solidFill>
+                  <a:srgbClr val="333333"/>
+                </a:solidFill>
+                <a:latin typeface="Open Sans"/>
+                <a:ea typeface="Open Sans"/>
+                <a:cs typeface="Open Sans"/>
+              </a:rPr>
+              <a:t>•  Оцените сознание и дыхание, вызовите скорую медицинскую помощь.</a:t>
+            </a:r>
+          </a:p>
+          <a:p>
+            <a:pPr algn="l">
+              <a:spcAft>
+                <a:spcPts val="800"/>
+              </a:spcAft>
+            </a:pPr>
+            <a:r>
+              <a:rPr sz="1400" b="0">
+                <a:solidFill>
+                  <a:srgbClr val="333333"/>
+                </a:solidFill>
+                <a:latin typeface="Open Sans"/>
+                <a:ea typeface="Open Sans"/>
+                <a:cs typeface="Open Sans"/>
+              </a:rPr>
+              <a:t>•  При вдыхании выведите на свежий воздух только из безопасной зоны.</a:t>
+            </a:r>
+          </a:p>
+          <a:p>
+            <a:pPr algn="l">
+              <a:spcAft>
+                <a:spcPts val="800"/>
+              </a:spcAft>
+            </a:pPr>
+            <a:r>
+              <a:rPr sz="1400" b="0">
+                <a:solidFill>
+                  <a:srgbClr val="333333"/>
+                </a:solidFill>
+                <a:latin typeface="Open Sans"/>
+                <a:ea typeface="Open Sans"/>
+                <a:cs typeface="Open Sans"/>
+              </a:rPr>
+              <a:t>•  При попадании на кожу снимите загрязненную одежду и тщательно промойте кожу.</a:t>
+            </a:r>
+          </a:p>
+          <a:p>
+            <a:pPr algn="l">
+              <a:spcAft>
+                <a:spcPts val="800"/>
+              </a:spcAft>
+            </a:pPr>
+            <a:r>
+              <a:rPr sz="1400" b="0">
+                <a:solidFill>
+                  <a:srgbClr val="333333"/>
+                </a:solidFill>
+                <a:latin typeface="Open Sans"/>
+                <a:ea typeface="Open Sans"/>
+                <a:cs typeface="Open Sans"/>
+              </a:rPr>
+              <a:t>•  Не вызывайте рвоту у человека без сознания или при химическом ожоге пищевода.</a:t>
+            </a:r>
+          </a:p>
+        </p:txBody>
+      </p:sp>
+      <p:sp>
+        <p:nvSpPr>
+          <p:cNvPr id="9" name="Rounded Rectangle 8"/>
+          <p:cNvSpPr/>
+          <p:nvPr/>
+        </p:nvSpPr>
+        <p:spPr>
+          <a:xfrm>
+            <a:off x="700000" y="5600000"/>
+            <a:ext cx="11000000" cy="1000000"/>
+          </a:xfrm>
+          <a:prstGeom prst="roundRect">
+            <a:avLst/>
+          </a:prstGeom>
+          <a:solidFill>
+            <a:srgbClr val="F5F0E1"/>
+          </a:solidFill>
+          <a:ln>
+            <a:noFill/>
+          </a:ln>
+        </p:spPr>
+        <p:style>
+          <a:lnRef idx="1">
+            <a:schemeClr val="accent1"/>
+          </a:lnRef>
+          <a:fillRef idx="3">
+            <a:schemeClr val="accent1"/>
+          </a:fillRef>
+          <a:effectRef idx="2">
+            <a:schemeClr val="accent1"/>
+          </a:effectRef>
+          <a:fontRef idx="minor">
+            <a:schemeClr val="lt1"/>
+          </a:fontRef>
+        </p:style>
+        <p:txBody>
+          <a:bodyPr rtlCol="0" anchor="ctr"/>
+          <a:lstStyle/>
+          <a:p>
+            <a:pPr algn="ctr"/>
+          </a:p>
+        </p:txBody>
+      </p:sp>
+      <p:sp>
+        <p:nvSpPr>
+          <p:cNvPr id="10" name="TextBox 9"/>
+          <p:cNvSpPr txBox="1"/>
+          <p:nvPr/>
+        </p:nvSpPr>
+        <p:spPr>
+          <a:xfrm>
+            <a:off x="950000" y="5800000"/>
+            <a:ext cx="10500000" cy="600000"/>
+          </a:xfrm>
+          <a:prstGeom prst="rect">
+            <a:avLst/>
+          </a:prstGeom>
+          <a:noFill/>
+        </p:spPr>
+        <p:txBody>
+          <a:bodyPr wrap="square" anchor="ctr">
+            <a:spAutoFit/>
+          </a:bodyPr>
+          <a:lstStyle/>
+          <a:p>
+            <a:pPr algn="l"/>
+            <a:r>
+              <a:rPr sz="1200" b="0">
+                <a:solidFill>
+                  <a:srgbClr val="333333"/>
+                </a:solidFill>
+                <a:latin typeface="Open Sans"/>
+                <a:ea typeface="Open Sans"/>
+                <a:cs typeface="Open Sans"/>
+              </a:rPr>
+              <a:t>Сохраните упаковку, этикетку или фотографию вещества для специалистов.</a:t>
+            </a:r>
+          </a:p>
+        </p:txBody>
+      </p:sp>
+    </p:spTree>
+  </p:cSld>
+  <p:clrMapOvr>
+    <a:masterClrMapping/>
+  </p:clrMapOvr>
+</p:sld>
+</file>
+
+<file path=ppt/slides/slide11.xml><?xml version="1.0" encoding="utf-8"?>
+<p:sld xmlns:a="http://schemas.openxmlformats.org/drawingml/2006/main" xmlns:p="http://schemas.openxmlformats.org/presentationml/2006/main" xmlns:r="http://schemas.openxmlformats.org/officeDocument/2006/relationships">
+  <p:cSld>
+    <p:spTree>
+      <p:nvGrpSpPr>
+        <p:cNvPr id="1" name=""/>
+        <p:cNvGrpSpPr/>
+        <p:nvPr/>
+      </p:nvGrpSpPr>
+      <p:grpSpPr/>
+      <p:sp>
+        <p:nvSpPr>
+          <p:cNvPr id="2" name="Rectangle 1"/>
+          <p:cNvSpPr/>
+          <p:nvPr/>
+        </p:nvSpPr>
+        <p:spPr>
+          <a:xfrm>
+            <a:off x="0" y="0"/>
+            <a:ext cx="12191695" cy="6858000"/>
+          </a:xfrm>
+          <a:prstGeom prst="rect">
+            <a:avLst/>
+          </a:prstGeom>
+          <a:solidFill>
+            <a:srgbClr val="FFFFFF"/>
+          </a:solidFill>
+          <a:ln>
+            <a:noFill/>
+          </a:ln>
+        </p:spPr>
+        <p:style>
+          <a:lnRef idx="1">
+            <a:schemeClr val="accent1"/>
+          </a:lnRef>
+          <a:fillRef idx="3">
+            <a:schemeClr val="accent1"/>
+          </a:fillRef>
+          <a:effectRef idx="2">
+            <a:schemeClr val="accent1"/>
+          </a:effectRef>
+          <a:fontRef idx="minor">
+            <a:schemeClr val="lt1"/>
+          </a:fontRef>
+        </p:style>
+        <p:txBody>
+          <a:bodyPr rtlCol="0" anchor="ctr"/>
+          <a:lstStyle/>
+          <a:p>
+            <a:pPr algn="ctr"/>
+          </a:p>
+        </p:txBody>
+      </p:sp>
+      <p:sp>
+        <p:nvSpPr>
+          <p:cNvPr id="3" name="TextBox 2"/>
+          <p:cNvSpPr txBox="1"/>
+          <p:nvPr/>
+        </p:nvSpPr>
+        <p:spPr>
+          <a:xfrm>
+            <a:off x="700000" y="250000"/>
+            <a:ext cx="11200000" cy="550000"/>
+          </a:xfrm>
+          <a:prstGeom prst="rect">
+            <a:avLst/>
+          </a:prstGeom>
+          <a:noFill/>
+        </p:spPr>
+        <p:txBody>
+          <a:bodyPr wrap="square" anchor="t">
+            <a:spAutoFit/>
+          </a:bodyPr>
+          <a:lstStyle/>
+          <a:p>
+            <a:pPr algn="l"/>
+            <a:r>
+              <a:rPr sz="2200" b="1">
+                <a:solidFill>
+                  <a:srgbClr val="333333"/>
+                </a:solidFill>
+                <a:latin typeface="Open Sans"/>
+                <a:ea typeface="Open Sans"/>
+                <a:cs typeface="Open Sans"/>
+              </a:rPr>
+              <a:t>УКУСЫ И УЖАЛИВАНИЯ</a:t>
+            </a:r>
+          </a:p>
+        </p:txBody>
+      </p:sp>
+      <p:sp>
+        <p:nvSpPr>
+          <p:cNvPr id="4" name="Rectangle 3"/>
+          <p:cNvSpPr/>
+          <p:nvPr/>
+        </p:nvSpPr>
+        <p:spPr>
+          <a:xfrm>
+            <a:off x="700000" y="850000"/>
+            <a:ext cx="9000000" cy="28000"/>
+          </a:xfrm>
+          <a:prstGeom prst="rect">
+            <a:avLst/>
+          </a:prstGeom>
+          <a:solidFill>
+            <a:srgbClr val="555555"/>
+          </a:solidFill>
+          <a:ln>
+            <a:noFill/>
+          </a:ln>
+        </p:spPr>
+        <p:style>
+          <a:lnRef idx="1">
+            <a:schemeClr val="accent1"/>
+          </a:lnRef>
+          <a:fillRef idx="3">
+            <a:schemeClr val="accent1"/>
+          </a:fillRef>
+          <a:effectRef idx="2">
+            <a:schemeClr val="accent1"/>
+          </a:effectRef>
+          <a:fontRef idx="minor">
+            <a:schemeClr val="lt1"/>
+          </a:fontRef>
+        </p:style>
+        <p:txBody>
+          <a:bodyPr rtlCol="0" anchor="ctr"/>
+          <a:lstStyle/>
+          <a:p>
+            <a:pPr algn="ctr"/>
+          </a:p>
+        </p:txBody>
+      </p:sp>
+      <p:sp>
+        <p:nvSpPr>
+          <p:cNvPr id="5" name="TextBox 4"/>
+          <p:cNvSpPr txBox="1"/>
+          <p:nvPr/>
+        </p:nvSpPr>
+        <p:spPr>
+          <a:xfrm>
+            <a:off x="700000" y="920000"/>
+            <a:ext cx="11000000" cy="350000"/>
+          </a:xfrm>
+          <a:prstGeom prst="rect">
+            <a:avLst/>
+          </a:prstGeom>
+          <a:noFill/>
+        </p:spPr>
+        <p:txBody>
+          <a:bodyPr wrap="square" anchor="t">
+            <a:spAutoFit/>
+          </a:bodyPr>
+          <a:lstStyle/>
+          <a:p>
+            <a:pPr algn="l"/>
+            <a:r>
+              <a:rPr sz="1200" b="0">
+                <a:solidFill>
+                  <a:srgbClr val="666666"/>
+                </a:solidFill>
+                <a:latin typeface="Open Sans"/>
+                <a:ea typeface="Open Sans"/>
+                <a:cs typeface="Open Sans"/>
+              </a:rPr>
+              <a:t>Оказание первой помощи при травмах, ранениях и поражениях, прочих состояниях</a:t>
+            </a:r>
+          </a:p>
+        </p:txBody>
+      </p:sp>
+      <p:sp>
+        <p:nvSpPr>
+          <p:cNvPr id="6" name="Rectangle 5"/>
+          <p:cNvSpPr/>
+          <p:nvPr/>
+        </p:nvSpPr>
+        <p:spPr>
+          <a:xfrm>
+            <a:off x="0" y="2800000"/>
+            <a:ext cx="420000" cy="420000"/>
+          </a:xfrm>
+          <a:prstGeom prst="rect">
+            <a:avLst/>
+          </a:prstGeom>
+          <a:solidFill>
+            <a:srgbClr val="555555"/>
+          </a:solidFill>
+          <a:ln>
+            <a:noFill/>
+          </a:ln>
+        </p:spPr>
+        <p:style>
+          <a:lnRef idx="1">
+            <a:schemeClr val="accent1"/>
+          </a:lnRef>
+          <a:fillRef idx="3">
+            <a:schemeClr val="accent1"/>
+          </a:fillRef>
+          <a:effectRef idx="2">
+            <a:schemeClr val="accent1"/>
+          </a:effectRef>
+          <a:fontRef idx="minor">
+            <a:schemeClr val="lt1"/>
+          </a:fontRef>
+        </p:style>
+        <p:txBody>
+          <a:bodyPr rtlCol="0" anchor="ctr"/>
+          <a:lstStyle/>
+          <a:p>
+            <a:pPr algn="ctr"/>
+          </a:p>
+        </p:txBody>
+      </p:sp>
+      <p:sp>
+        <p:nvSpPr>
+          <p:cNvPr id="7" name="TextBox 6"/>
+          <p:cNvSpPr txBox="1"/>
+          <p:nvPr/>
+        </p:nvSpPr>
+        <p:spPr>
+          <a:xfrm>
+            <a:off x="0" y="2800000"/>
+            <a:ext cx="420000" cy="420000"/>
+          </a:xfrm>
+          <a:prstGeom prst="rect">
+            <a:avLst/>
+          </a:prstGeom>
+          <a:noFill/>
+        </p:spPr>
+        <p:txBody>
+          <a:bodyPr wrap="square" anchor="ctr">
+            <a:spAutoFit/>
+          </a:bodyPr>
+          <a:lstStyle/>
+          <a:p>
+            <a:pPr algn="ctr"/>
+            <a:r>
+              <a:rPr sz="1400" b="1">
+                <a:solidFill>
+                  <a:srgbClr val="FFFFFF"/>
+                </a:solidFill>
+                <a:latin typeface="Open Sans"/>
+                <a:ea typeface="Open Sans"/>
+                <a:cs typeface="Open Sans"/>
+              </a:rPr>
+              <a:t>11</a:t>
+            </a:r>
+          </a:p>
+        </p:txBody>
+      </p:sp>
+      <p:sp>
+        <p:nvSpPr>
+          <p:cNvPr id="8" name="TextBox 7"/>
+          <p:cNvSpPr txBox="1"/>
+          <p:nvPr/>
+        </p:nvSpPr>
+        <p:spPr>
+          <a:xfrm>
+            <a:off x="700000" y="1450000"/>
+            <a:ext cx="11000000" cy="4000000"/>
+          </a:xfrm>
+          <a:prstGeom prst="rect">
+            <a:avLst/>
+          </a:prstGeom>
+          <a:noFill/>
+        </p:spPr>
+        <p:txBody>
+          <a:bodyPr wrap="square">
+            <a:spAutoFit/>
+          </a:bodyPr>
+          <a:lstStyle/>
+          <a:p>
+            <a:pPr algn="l">
+              <a:spcAft>
+                <a:spcPts val="800"/>
+              </a:spcAft>
+            </a:pPr>
+            <a:r>
+              <a:rPr sz="1400" b="0">
+                <a:solidFill>
+                  <a:srgbClr val="333333"/>
+                </a:solidFill>
+                <a:latin typeface="Open Sans"/>
+                <a:ea typeface="Open Sans"/>
+                <a:cs typeface="Open Sans"/>
+              </a:rPr>
+              <a:t>•  Убедитесь, что животное или насекомое больше не представляет угрозы.</a:t>
+            </a:r>
+          </a:p>
+          <a:p>
+            <a:pPr algn="l">
+              <a:spcAft>
+                <a:spcPts val="800"/>
+              </a:spcAft>
+            </a:pPr>
+            <a:r>
+              <a:rPr sz="1400" b="0">
+                <a:solidFill>
+                  <a:srgbClr val="333333"/>
+                </a:solidFill>
+                <a:latin typeface="Open Sans"/>
+                <a:ea typeface="Open Sans"/>
+                <a:cs typeface="Open Sans"/>
+              </a:rPr>
+              <a:t>•  Действуйте по общим принципам помощи при отравлении.</a:t>
+            </a:r>
+          </a:p>
+          <a:p>
+            <a:pPr algn="l">
+              <a:spcAft>
+                <a:spcPts val="800"/>
+              </a:spcAft>
+            </a:pPr>
+            <a:r>
+              <a:rPr sz="1400" b="0">
+                <a:solidFill>
+                  <a:srgbClr val="333333"/>
+                </a:solidFill>
+                <a:latin typeface="Open Sans"/>
+                <a:ea typeface="Open Sans"/>
+                <a:cs typeface="Open Sans"/>
+              </a:rPr>
+              <a:t>•  Обеспечьте покой и ограничьте движение поврежденной части.</a:t>
+            </a:r>
+          </a:p>
+          <a:p>
+            <a:pPr algn="l">
+              <a:spcAft>
+                <a:spcPts val="800"/>
+              </a:spcAft>
+            </a:pPr>
+            <a:r>
+              <a:rPr sz="1400" b="0">
+                <a:solidFill>
+                  <a:srgbClr val="333333"/>
+                </a:solidFill>
+                <a:latin typeface="Open Sans"/>
+                <a:ea typeface="Open Sans"/>
+                <a:cs typeface="Open Sans"/>
+              </a:rPr>
+              <a:t>•  Приложите холод через ткань; заранее снимите кольца и браслеты.</a:t>
+            </a:r>
+          </a:p>
+          <a:p>
+            <a:pPr algn="l">
+              <a:spcAft>
+                <a:spcPts val="800"/>
+              </a:spcAft>
+            </a:pPr>
+            <a:r>
+              <a:rPr sz="1400" b="0">
+                <a:solidFill>
+                  <a:srgbClr val="333333"/>
+                </a:solidFill>
+                <a:latin typeface="Open Sans"/>
+                <a:ea typeface="Open Sans"/>
+                <a:cs typeface="Open Sans"/>
+              </a:rPr>
+              <a:t>•  Не разрезайте рану, не прижигайте ее и не пытайтесь высасывать яд.</a:t>
+            </a:r>
+          </a:p>
+          <a:p>
+            <a:pPr algn="l">
+              <a:spcAft>
+                <a:spcPts val="800"/>
+              </a:spcAft>
+            </a:pPr>
+            <a:r>
+              <a:rPr sz="1400" b="0">
+                <a:solidFill>
+                  <a:srgbClr val="333333"/>
+                </a:solidFill>
+                <a:latin typeface="Open Sans"/>
+                <a:ea typeface="Open Sans"/>
+                <a:cs typeface="Open Sans"/>
+              </a:rPr>
+              <a:t>•  Следите за нарастающим отеком, сыпью, осиплостью и затруднением дыхания.</a:t>
+            </a:r>
+          </a:p>
+        </p:txBody>
+      </p:sp>
+    </p:spTree>
+  </p:cSld>
+  <p:clrMapOvr>
+    <a:masterClrMapping/>
+  </p:clrMapOvr>
+</p:sld>
+</file>
+
+<file path=ppt/slides/slide12.xml><?xml version="1.0" encoding="utf-8"?>
+<p:sld xmlns:a="http://schemas.openxmlformats.org/drawingml/2006/main" xmlns:p="http://schemas.openxmlformats.org/presentationml/2006/main" xmlns:r="http://schemas.openxmlformats.org/officeDocument/2006/relationships">
+  <p:cSld>
+    <p:spTree>
+      <p:nvGrpSpPr>
+        <p:cNvPr id="1" name=""/>
+        <p:cNvGrpSpPr/>
+        <p:nvPr/>
+      </p:nvGrpSpPr>
+      <p:grpSpPr/>
+      <p:sp>
+        <p:nvSpPr>
+          <p:cNvPr id="2" name="Rectangle 1"/>
+          <p:cNvSpPr/>
+          <p:nvPr/>
+        </p:nvSpPr>
+        <p:spPr>
+          <a:xfrm>
+            <a:off x="0" y="0"/>
+            <a:ext cx="12191695" cy="6858000"/>
+          </a:xfrm>
+          <a:prstGeom prst="rect">
+            <a:avLst/>
+          </a:prstGeom>
+          <a:solidFill>
+            <a:srgbClr val="FFFFFF"/>
+          </a:solidFill>
+          <a:ln>
+            <a:noFill/>
+          </a:ln>
+        </p:spPr>
+        <p:style>
+          <a:lnRef idx="1">
+            <a:schemeClr val="accent1"/>
+          </a:lnRef>
+          <a:fillRef idx="3">
+            <a:schemeClr val="accent1"/>
+          </a:fillRef>
+          <a:effectRef idx="2">
+            <a:schemeClr val="accent1"/>
+          </a:effectRef>
+          <a:fontRef idx="minor">
+            <a:schemeClr val="lt1"/>
+          </a:fontRef>
+        </p:style>
+        <p:txBody>
+          <a:bodyPr rtlCol="0" anchor="ctr"/>
+          <a:lstStyle/>
+          <a:p>
+            <a:pPr algn="ctr"/>
+          </a:p>
+        </p:txBody>
+      </p:sp>
+      <p:sp>
+        <p:nvSpPr>
+          <p:cNvPr id="3" name="TextBox 2"/>
+          <p:cNvSpPr txBox="1"/>
+          <p:nvPr/>
+        </p:nvSpPr>
+        <p:spPr>
+          <a:xfrm>
+            <a:off x="700000" y="250000"/>
+            <a:ext cx="11200000" cy="550000"/>
+          </a:xfrm>
+          <a:prstGeom prst="rect">
+            <a:avLst/>
+          </a:prstGeom>
+          <a:noFill/>
+        </p:spPr>
+        <p:txBody>
+          <a:bodyPr wrap="square" anchor="t">
+            <a:spAutoFit/>
+          </a:bodyPr>
+          <a:lstStyle/>
+          <a:p>
+            <a:pPr algn="l"/>
+            <a:r>
+              <a:rPr sz="2200" b="1">
+                <a:solidFill>
+                  <a:srgbClr val="333333"/>
+                </a:solidFill>
+                <a:latin typeface="Open Sans"/>
+                <a:ea typeface="Open Sans"/>
+                <a:cs typeface="Open Sans"/>
+              </a:rPr>
+              <a:t>СУДОРОГИ И ПОМОЩЬ С ЛЕКАРСТВОМ</a:t>
+            </a:r>
+          </a:p>
+        </p:txBody>
+      </p:sp>
+      <p:sp>
+        <p:nvSpPr>
+          <p:cNvPr id="4" name="Rectangle 3"/>
+          <p:cNvSpPr/>
+          <p:nvPr/>
+        </p:nvSpPr>
+        <p:spPr>
+          <a:xfrm>
+            <a:off x="700000" y="850000"/>
+            <a:ext cx="9000000" cy="28000"/>
+          </a:xfrm>
+          <a:prstGeom prst="rect">
+            <a:avLst/>
+          </a:prstGeom>
+          <a:solidFill>
+            <a:srgbClr val="555555"/>
+          </a:solidFill>
+          <a:ln>
+            <a:noFill/>
+          </a:ln>
+        </p:spPr>
+        <p:style>
+          <a:lnRef idx="1">
+            <a:schemeClr val="accent1"/>
+          </a:lnRef>
+          <a:fillRef idx="3">
+            <a:schemeClr val="accent1"/>
+          </a:fillRef>
+          <a:effectRef idx="2">
+            <a:schemeClr val="accent1"/>
+          </a:effectRef>
+          <a:fontRef idx="minor">
+            <a:schemeClr val="lt1"/>
+          </a:fontRef>
+        </p:style>
+        <p:txBody>
+          <a:bodyPr rtlCol="0" anchor="ctr"/>
+          <a:lstStyle/>
+          <a:p>
+            <a:pPr algn="ctr"/>
+          </a:p>
+        </p:txBody>
+      </p:sp>
+      <p:sp>
+        <p:nvSpPr>
+          <p:cNvPr id="5" name="TextBox 4"/>
+          <p:cNvSpPr txBox="1"/>
+          <p:nvPr/>
+        </p:nvSpPr>
+        <p:spPr>
+          <a:xfrm>
+            <a:off x="700000" y="920000"/>
+            <a:ext cx="11000000" cy="350000"/>
+          </a:xfrm>
+          <a:prstGeom prst="rect">
+            <a:avLst/>
+          </a:prstGeom>
+          <a:noFill/>
+        </p:spPr>
+        <p:txBody>
+          <a:bodyPr wrap="square" anchor="t">
+            <a:spAutoFit/>
+          </a:bodyPr>
+          <a:lstStyle/>
+          <a:p>
+            <a:pPr algn="l"/>
+            <a:r>
+              <a:rPr sz="1200" b="0">
+                <a:solidFill>
+                  <a:srgbClr val="666666"/>
+                </a:solidFill>
+                <a:latin typeface="Open Sans"/>
+                <a:ea typeface="Open Sans"/>
+                <a:cs typeface="Open Sans"/>
+              </a:rPr>
+              <a:t>Оказание первой помощи при травмах, ранениях и поражениях, прочих состояниях</a:t>
+            </a:r>
+          </a:p>
+        </p:txBody>
+      </p:sp>
+      <p:sp>
+        <p:nvSpPr>
+          <p:cNvPr id="6" name="Rectangle 5"/>
+          <p:cNvSpPr/>
+          <p:nvPr/>
+        </p:nvSpPr>
+        <p:spPr>
+          <a:xfrm>
+            <a:off x="0" y="2800000"/>
+            <a:ext cx="420000" cy="420000"/>
+          </a:xfrm>
+          <a:prstGeom prst="rect">
+            <a:avLst/>
+          </a:prstGeom>
+          <a:solidFill>
+            <a:srgbClr val="555555"/>
+          </a:solidFill>
+          <a:ln>
+            <a:noFill/>
+          </a:ln>
+        </p:spPr>
+        <p:style>
+          <a:lnRef idx="1">
+            <a:schemeClr val="accent1"/>
+          </a:lnRef>
+          <a:fillRef idx="3">
+            <a:schemeClr val="accent1"/>
+          </a:fillRef>
+          <a:effectRef idx="2">
+            <a:schemeClr val="accent1"/>
+          </a:effectRef>
+          <a:fontRef idx="minor">
+            <a:schemeClr val="lt1"/>
+          </a:fontRef>
+        </p:style>
+        <p:txBody>
+          <a:bodyPr rtlCol="0" anchor="ctr"/>
+          <a:lstStyle/>
+          <a:p>
+            <a:pPr algn="ctr"/>
+          </a:p>
+        </p:txBody>
+      </p:sp>
+      <p:sp>
+        <p:nvSpPr>
+          <p:cNvPr id="7" name="TextBox 6"/>
+          <p:cNvSpPr txBox="1"/>
+          <p:nvPr/>
+        </p:nvSpPr>
+        <p:spPr>
+          <a:xfrm>
+            <a:off x="0" y="2800000"/>
+            <a:ext cx="420000" cy="420000"/>
+          </a:xfrm>
+          <a:prstGeom prst="rect">
+            <a:avLst/>
+          </a:prstGeom>
+          <a:noFill/>
+        </p:spPr>
+        <p:txBody>
+          <a:bodyPr wrap="square" anchor="ctr">
+            <a:spAutoFit/>
+          </a:bodyPr>
+          <a:lstStyle/>
+          <a:p>
+            <a:pPr algn="ctr"/>
+            <a:r>
+              <a:rPr sz="1400" b="1">
+                <a:solidFill>
+                  <a:srgbClr val="FFFFFF"/>
+                </a:solidFill>
+                <a:latin typeface="Open Sans"/>
+                <a:ea typeface="Open Sans"/>
+                <a:cs typeface="Open Sans"/>
+              </a:rPr>
+              <a:t>12</a:t>
+            </a:r>
+          </a:p>
+        </p:txBody>
+      </p:sp>
+      <p:sp>
+        <p:nvSpPr>
+          <p:cNvPr id="8" name="TextBox 7"/>
+          <p:cNvSpPr txBox="1"/>
+          <p:nvPr/>
+        </p:nvSpPr>
+        <p:spPr>
+          <a:xfrm>
+            <a:off x="700000" y="1400000"/>
+            <a:ext cx="5400000" cy="400000"/>
+          </a:xfrm>
+          <a:prstGeom prst="rect">
+            <a:avLst/>
+          </a:prstGeom>
+          <a:noFill/>
+        </p:spPr>
+        <p:txBody>
+          <a:bodyPr wrap="square" anchor="t">
+            <a:spAutoFit/>
+          </a:bodyPr>
+          <a:lstStyle/>
+          <a:p>
+            <a:pPr algn="l"/>
+            <a:r>
+              <a:rPr sz="1400" b="1">
+                <a:solidFill>
+                  <a:srgbClr val="333333"/>
+                </a:solidFill>
+                <a:latin typeface="Open Sans"/>
+                <a:ea typeface="Open Sans"/>
+                <a:cs typeface="Open Sans"/>
+              </a:rPr>
+              <a:t>Судорожный приступ</a:t>
+            </a:r>
+          </a:p>
+        </p:txBody>
+      </p:sp>
+      <p:sp>
+        <p:nvSpPr>
+          <p:cNvPr id="9" name="TextBox 8"/>
+          <p:cNvSpPr txBox="1"/>
+          <p:nvPr/>
+        </p:nvSpPr>
+        <p:spPr>
+          <a:xfrm>
+            <a:off x="6600000" y="1400000"/>
+            <a:ext cx="5400000" cy="400000"/>
+          </a:xfrm>
+          <a:prstGeom prst="rect">
+            <a:avLst/>
+          </a:prstGeom>
+          <a:noFill/>
+        </p:spPr>
+        <p:txBody>
+          <a:bodyPr wrap="square" anchor="t">
+            <a:spAutoFit/>
+          </a:bodyPr>
+          <a:lstStyle/>
+          <a:p>
+            <a:pPr algn="l"/>
+            <a:r>
+              <a:rPr sz="1400" b="1">
+                <a:solidFill>
+                  <a:srgbClr val="333333"/>
+                </a:solidFill>
+                <a:latin typeface="Open Sans"/>
+                <a:ea typeface="Open Sans"/>
+                <a:cs typeface="Open Sans"/>
+              </a:rPr>
+              <a:t>Лекарство</a:t>
+            </a:r>
+          </a:p>
+        </p:txBody>
+      </p:sp>
+      <p:sp>
+        <p:nvSpPr>
+          <p:cNvPr id="10" name="TextBox 9"/>
+          <p:cNvSpPr txBox="1"/>
+          <p:nvPr/>
+        </p:nvSpPr>
+        <p:spPr>
+          <a:xfrm>
+            <a:off x="700000" y="1850000"/>
+            <a:ext cx="5400000" cy="4000000"/>
+          </a:xfrm>
+          <a:prstGeom prst="rect">
+            <a:avLst/>
+          </a:prstGeom>
+          <a:noFill/>
+        </p:spPr>
+        <p:txBody>
+          <a:bodyPr wrap="square">
+            <a:spAutoFit/>
+          </a:bodyPr>
+          <a:lstStyle/>
+          <a:p>
+            <a:pPr algn="l">
+              <a:spcAft>
+                <a:spcPts val="800"/>
+              </a:spcAft>
+            </a:pPr>
+            <a:r>
+              <a:rPr sz="1300" b="0">
+                <a:solidFill>
+                  <a:srgbClr val="333333"/>
+                </a:solidFill>
+                <a:latin typeface="Open Sans"/>
+                <a:ea typeface="Open Sans"/>
+                <a:cs typeface="Open Sans"/>
+              </a:rPr>
+              <a:t>•  освободите пространство и защитите голову</a:t>
+            </a:r>
+          </a:p>
+          <a:p>
+            <a:pPr algn="l">
+              <a:spcAft>
+                <a:spcPts val="800"/>
+              </a:spcAft>
+            </a:pPr>
+            <a:r>
+              <a:rPr sz="1300" b="0">
+                <a:solidFill>
+                  <a:srgbClr val="333333"/>
+                </a:solidFill>
+                <a:latin typeface="Open Sans"/>
+                <a:ea typeface="Open Sans"/>
+                <a:cs typeface="Open Sans"/>
+              </a:rPr>
+              <a:t>•  не удерживайте человека и ничего не кладите ему в рот</a:t>
+            </a:r>
+          </a:p>
+          <a:p>
+            <a:pPr algn="l">
+              <a:spcAft>
+                <a:spcPts val="800"/>
+              </a:spcAft>
+            </a:pPr>
+            <a:r>
+              <a:rPr sz="1300" b="0">
+                <a:solidFill>
+                  <a:srgbClr val="333333"/>
+                </a:solidFill>
+                <a:latin typeface="Open Sans"/>
+                <a:ea typeface="Open Sans"/>
+                <a:cs typeface="Open Sans"/>
+              </a:rPr>
+              <a:t>•  после приступа проверьте дыхание и травмы</a:t>
+            </a:r>
+          </a:p>
+          <a:p>
+            <a:pPr algn="l">
+              <a:spcAft>
+                <a:spcPts val="800"/>
+              </a:spcAft>
+            </a:pPr>
+            <a:r>
+              <a:rPr sz="1300" b="0">
+                <a:solidFill>
+                  <a:srgbClr val="333333"/>
+                </a:solidFill>
+                <a:latin typeface="Open Sans"/>
+                <a:ea typeface="Open Sans"/>
+                <a:cs typeface="Open Sans"/>
+              </a:rPr>
+              <a:t>•  при нормальном дыхании уложите на бок</a:t>
+            </a:r>
+          </a:p>
+        </p:txBody>
+      </p:sp>
+      <p:sp>
+        <p:nvSpPr>
+          <p:cNvPr id="11" name="TextBox 10"/>
+          <p:cNvSpPr txBox="1"/>
+          <p:nvPr/>
+        </p:nvSpPr>
+        <p:spPr>
+          <a:xfrm>
+            <a:off x="6600000" y="1850000"/>
+            <a:ext cx="5400000" cy="4000000"/>
+          </a:xfrm>
+          <a:prstGeom prst="rect">
+            <a:avLst/>
+          </a:prstGeom>
+          <a:noFill/>
+        </p:spPr>
+        <p:txBody>
+          <a:bodyPr wrap="square">
+            <a:spAutoFit/>
+          </a:bodyPr>
+          <a:lstStyle/>
+          <a:p>
+            <a:pPr algn="l">
+              <a:spcAft>
+                <a:spcPts val="800"/>
+              </a:spcAft>
+            </a:pPr>
+            <a:r>
+              <a:rPr sz="1300" b="0">
+                <a:solidFill>
+                  <a:srgbClr val="333333"/>
+                </a:solidFill>
+                <a:latin typeface="Open Sans"/>
+                <a:ea typeface="Open Sans"/>
+                <a:cs typeface="Open Sans"/>
+              </a:rPr>
+              <a:t>•  помогайте только с препаратом самого пострадавшего</a:t>
+            </a:r>
+          </a:p>
+          <a:p>
+            <a:pPr algn="l">
+              <a:spcAft>
+                <a:spcPts val="800"/>
+              </a:spcAft>
+            </a:pPr>
+            <a:r>
+              <a:rPr sz="1300" b="0">
+                <a:solidFill>
+                  <a:srgbClr val="333333"/>
+                </a:solidFill>
+                <a:latin typeface="Open Sans"/>
+                <a:ea typeface="Open Sans"/>
+                <a:cs typeface="Open Sans"/>
+              </a:rPr>
+              <a:t>•  убедитесь, что препарат назначен врачом для медицинской цели</a:t>
+            </a:r>
+          </a:p>
+          <a:p>
+            <a:pPr algn="l">
+              <a:spcAft>
+                <a:spcPts val="800"/>
+              </a:spcAft>
+            </a:pPr>
+            <a:r>
+              <a:rPr sz="1300" b="0">
+                <a:solidFill>
+                  <a:srgbClr val="333333"/>
+                </a:solidFill>
+                <a:latin typeface="Open Sans"/>
+                <a:ea typeface="Open Sans"/>
+                <a:cs typeface="Open Sans"/>
+              </a:rPr>
+              <a:t>•  не выбирайте препарат и не меняйте дозу</a:t>
+            </a:r>
+          </a:p>
+          <a:p>
+            <a:pPr algn="l">
+              <a:spcAft>
+                <a:spcPts val="800"/>
+              </a:spcAft>
+            </a:pPr>
+            <a:r>
+              <a:rPr sz="1300" b="0">
+                <a:solidFill>
+                  <a:srgbClr val="333333"/>
+                </a:solidFill>
+                <a:latin typeface="Open Sans"/>
+                <a:ea typeface="Open Sans"/>
+                <a:cs typeface="Open Sans"/>
+              </a:rPr>
+              <a:t>•  ничего не давайте через рот человеку без сознания</a:t>
+            </a:r>
+          </a:p>
+        </p:txBody>
+      </p:sp>
+    </p:spTree>
+  </p:cSld>
+  <p:clrMapOvr>
+    <a:masterClrMapping/>
+  </p:clrMapOvr>
+</p:sld>
+</file>
+
+<file path=ppt/slides/slide13.xml><?xml version="1.0" encoding="utf-8"?>
+<p:sld xmlns:a="http://schemas.openxmlformats.org/drawingml/2006/main" xmlns:p="http://schemas.openxmlformats.org/presentationml/2006/main" xmlns:r="http://schemas.openxmlformats.org/officeDocument/2006/relationships">
+  <p:cSld>
+    <p:spTree>
+      <p:nvGrpSpPr>
+        <p:cNvPr id="1" name=""/>
+        <p:cNvGrpSpPr/>
+        <p:nvPr/>
+      </p:nvGrpSpPr>
+      <p:grpSpPr/>
+      <p:sp>
+        <p:nvSpPr>
+          <p:cNvPr id="2" name="Rectangle 1"/>
+          <p:cNvSpPr/>
+          <p:nvPr/>
+        </p:nvSpPr>
+        <p:spPr>
+          <a:xfrm>
+            <a:off x="0" y="0"/>
+            <a:ext cx="12191695" cy="6858000"/>
+          </a:xfrm>
+          <a:prstGeom prst="rect">
+            <a:avLst/>
+          </a:prstGeom>
+          <a:solidFill>
+            <a:srgbClr val="FFFFFF"/>
+          </a:solidFill>
+          <a:ln>
+            <a:noFill/>
+          </a:ln>
+        </p:spPr>
+        <p:style>
+          <a:lnRef idx="1">
+            <a:schemeClr val="accent1"/>
+          </a:lnRef>
+          <a:fillRef idx="3">
+            <a:schemeClr val="accent1"/>
+          </a:fillRef>
+          <a:effectRef idx="2">
+            <a:schemeClr val="accent1"/>
+          </a:effectRef>
+          <a:fontRef idx="minor">
+            <a:schemeClr val="lt1"/>
+          </a:fontRef>
+        </p:style>
+        <p:txBody>
+          <a:bodyPr rtlCol="0" anchor="ctr"/>
+          <a:lstStyle/>
+          <a:p>
+            <a:pPr algn="ctr"/>
+          </a:p>
+        </p:txBody>
+      </p:sp>
+      <p:sp>
+        <p:nvSpPr>
+          <p:cNvPr id="3" name="TextBox 2"/>
+          <p:cNvSpPr txBox="1"/>
+          <p:nvPr/>
+        </p:nvSpPr>
+        <p:spPr>
+          <a:xfrm>
+            <a:off x="700000" y="250000"/>
+            <a:ext cx="11200000" cy="550000"/>
+          </a:xfrm>
+          <a:prstGeom prst="rect">
+            <a:avLst/>
+          </a:prstGeom>
+          <a:noFill/>
+        </p:spPr>
+        <p:txBody>
+          <a:bodyPr wrap="square" anchor="t">
+            <a:spAutoFit/>
+          </a:bodyPr>
+          <a:lstStyle/>
+          <a:p>
+            <a:pPr algn="l"/>
+            <a:r>
+              <a:rPr sz="2200" b="1">
+                <a:solidFill>
+                  <a:srgbClr val="333333"/>
+                </a:solidFill>
+                <a:latin typeface="Open Sans"/>
+                <a:ea typeface="Open Sans"/>
+                <a:cs typeface="Open Sans"/>
+              </a:rPr>
+              <a:t>НАБЛЮДЕНИЕ И ПСИХОЛОГИЧЕСКАЯ ПОДДЕРЖКА</a:t>
+            </a:r>
+          </a:p>
+        </p:txBody>
+      </p:sp>
+      <p:sp>
+        <p:nvSpPr>
+          <p:cNvPr id="4" name="Rectangle 3"/>
+          <p:cNvSpPr/>
+          <p:nvPr/>
+        </p:nvSpPr>
+        <p:spPr>
+          <a:xfrm>
+            <a:off x="700000" y="850000"/>
+            <a:ext cx="9000000" cy="28000"/>
+          </a:xfrm>
+          <a:prstGeom prst="rect">
+            <a:avLst/>
+          </a:prstGeom>
+          <a:solidFill>
+            <a:srgbClr val="555555"/>
+          </a:solidFill>
+          <a:ln>
+            <a:noFill/>
+          </a:ln>
+        </p:spPr>
+        <p:style>
+          <a:lnRef idx="1">
+            <a:schemeClr val="accent1"/>
+          </a:lnRef>
+          <a:fillRef idx="3">
+            <a:schemeClr val="accent1"/>
+          </a:fillRef>
+          <a:effectRef idx="2">
+            <a:schemeClr val="accent1"/>
+          </a:effectRef>
+          <a:fontRef idx="minor">
+            <a:schemeClr val="lt1"/>
+          </a:fontRef>
+        </p:style>
+        <p:txBody>
+          <a:bodyPr rtlCol="0" anchor="ctr"/>
+          <a:lstStyle/>
+          <a:p>
+            <a:pPr algn="ctr"/>
+          </a:p>
+        </p:txBody>
+      </p:sp>
+      <p:sp>
+        <p:nvSpPr>
+          <p:cNvPr id="5" name="TextBox 4"/>
+          <p:cNvSpPr txBox="1"/>
+          <p:nvPr/>
+        </p:nvSpPr>
+        <p:spPr>
+          <a:xfrm>
+            <a:off x="700000" y="920000"/>
+            <a:ext cx="11000000" cy="350000"/>
+          </a:xfrm>
+          <a:prstGeom prst="rect">
+            <a:avLst/>
+          </a:prstGeom>
+          <a:noFill/>
+        </p:spPr>
+        <p:txBody>
+          <a:bodyPr wrap="square" anchor="t">
+            <a:spAutoFit/>
+          </a:bodyPr>
+          <a:lstStyle/>
+          <a:p>
+            <a:pPr algn="l"/>
+            <a:r>
+              <a:rPr sz="1200" b="0">
+                <a:solidFill>
+                  <a:srgbClr val="666666"/>
+                </a:solidFill>
+                <a:latin typeface="Open Sans"/>
+                <a:ea typeface="Open Sans"/>
+                <a:cs typeface="Open Sans"/>
+              </a:rPr>
+              <a:t>Оказание первой помощи при травмах, ранениях и поражениях, прочих состояниях</a:t>
+            </a:r>
+          </a:p>
+        </p:txBody>
+      </p:sp>
+      <p:sp>
+        <p:nvSpPr>
+          <p:cNvPr id="6" name="Rectangle 5"/>
+          <p:cNvSpPr/>
+          <p:nvPr/>
+        </p:nvSpPr>
+        <p:spPr>
+          <a:xfrm>
+            <a:off x="0" y="2800000"/>
+            <a:ext cx="420000" cy="420000"/>
+          </a:xfrm>
+          <a:prstGeom prst="rect">
+            <a:avLst/>
+          </a:prstGeom>
+          <a:solidFill>
+            <a:srgbClr val="555555"/>
+          </a:solidFill>
+          <a:ln>
+            <a:noFill/>
+          </a:ln>
+        </p:spPr>
+        <p:style>
+          <a:lnRef idx="1">
+            <a:schemeClr val="accent1"/>
+          </a:lnRef>
+          <a:fillRef idx="3">
+            <a:schemeClr val="accent1"/>
+          </a:fillRef>
+          <a:effectRef idx="2">
+            <a:schemeClr val="accent1"/>
+          </a:effectRef>
+          <a:fontRef idx="minor">
+            <a:schemeClr val="lt1"/>
+          </a:fontRef>
+        </p:style>
+        <p:txBody>
+          <a:bodyPr rtlCol="0" anchor="ctr"/>
+          <a:lstStyle/>
+          <a:p>
+            <a:pPr algn="ctr"/>
+          </a:p>
+        </p:txBody>
+      </p:sp>
+      <p:sp>
+        <p:nvSpPr>
+          <p:cNvPr id="7" name="TextBox 6"/>
+          <p:cNvSpPr txBox="1"/>
+          <p:nvPr/>
+        </p:nvSpPr>
+        <p:spPr>
+          <a:xfrm>
+            <a:off x="0" y="2800000"/>
+            <a:ext cx="420000" cy="420000"/>
+          </a:xfrm>
+          <a:prstGeom prst="rect">
+            <a:avLst/>
+          </a:prstGeom>
+          <a:noFill/>
+        </p:spPr>
+        <p:txBody>
+          <a:bodyPr wrap="square" anchor="ctr">
+            <a:spAutoFit/>
+          </a:bodyPr>
+          <a:lstStyle/>
+          <a:p>
+            <a:pPr algn="ctr"/>
+            <a:r>
+              <a:rPr sz="1400" b="1">
+                <a:solidFill>
+                  <a:srgbClr val="FFFFFF"/>
+                </a:solidFill>
+                <a:latin typeface="Open Sans"/>
+                <a:ea typeface="Open Sans"/>
+                <a:cs typeface="Open Sans"/>
+              </a:rPr>
+              <a:t>13</a:t>
+            </a:r>
+          </a:p>
+        </p:txBody>
+      </p:sp>
+      <p:sp>
+        <p:nvSpPr>
+          <p:cNvPr id="8" name="TextBox 7"/>
+          <p:cNvSpPr txBox="1"/>
+          <p:nvPr/>
+        </p:nvSpPr>
+        <p:spPr>
+          <a:xfrm>
+            <a:off x="700000" y="1450000"/>
+            <a:ext cx="11000000" cy="4000000"/>
+          </a:xfrm>
+          <a:prstGeom prst="rect">
+            <a:avLst/>
+          </a:prstGeom>
+          <a:noFill/>
+        </p:spPr>
+        <p:txBody>
+          <a:bodyPr wrap="square">
+            <a:spAutoFit/>
+          </a:bodyPr>
+          <a:lstStyle/>
+          <a:p>
+            <a:pPr algn="l">
+              <a:spcAft>
+                <a:spcPts val="800"/>
+              </a:spcAft>
+            </a:pPr>
+            <a:r>
+              <a:rPr sz="1400" b="0">
+                <a:solidFill>
+                  <a:srgbClr val="333333"/>
+                </a:solidFill>
+                <a:latin typeface="Open Sans"/>
+                <a:ea typeface="Open Sans"/>
+                <a:cs typeface="Open Sans"/>
+              </a:rPr>
+              <a:t>•  Придайте положение, соответствующее травме и облегчающее дыхание.</a:t>
+            </a:r>
+          </a:p>
+          <a:p>
+            <a:pPr algn="l">
+              <a:spcAft>
+                <a:spcPts val="800"/>
+              </a:spcAft>
+            </a:pPr>
+            <a:r>
+              <a:rPr sz="1400" b="0">
+                <a:solidFill>
+                  <a:srgbClr val="333333"/>
+                </a:solidFill>
+                <a:latin typeface="Open Sans"/>
+                <a:ea typeface="Open Sans"/>
+                <a:cs typeface="Open Sans"/>
+              </a:rPr>
+              <a:t>•  Регулярно проверяйте сознание, дыхание, цвет кожи и жалобы.</a:t>
+            </a:r>
+          </a:p>
+          <a:p>
+            <a:pPr algn="l">
+              <a:spcAft>
+                <a:spcPts val="800"/>
+              </a:spcAft>
+            </a:pPr>
+            <a:r>
+              <a:rPr sz="1400" b="0">
+                <a:solidFill>
+                  <a:srgbClr val="333333"/>
+                </a:solidFill>
+                <a:latin typeface="Open Sans"/>
+                <a:ea typeface="Open Sans"/>
+                <a:cs typeface="Open Sans"/>
+              </a:rPr>
+              <a:t>•  Следите за повязками, кровотечением и состоянием обездвиженных конечностей.</a:t>
+            </a:r>
+          </a:p>
+          <a:p>
+            <a:pPr algn="l">
+              <a:spcAft>
+                <a:spcPts val="800"/>
+              </a:spcAft>
+            </a:pPr>
+            <a:r>
+              <a:rPr sz="1400" b="0">
+                <a:solidFill>
+                  <a:srgbClr val="333333"/>
+                </a:solidFill>
+                <a:latin typeface="Open Sans"/>
+                <a:ea typeface="Open Sans"/>
+                <a:cs typeface="Open Sans"/>
+              </a:rPr>
+              <a:t>•  Говорите спокойно, представьтесь и объясняйте каждое действие.</a:t>
+            </a:r>
+          </a:p>
+          <a:p>
+            <a:pPr algn="l">
+              <a:spcAft>
+                <a:spcPts val="800"/>
+              </a:spcAft>
+            </a:pPr>
+            <a:r>
+              <a:rPr sz="1400" b="0">
+                <a:solidFill>
+                  <a:srgbClr val="333333"/>
+                </a:solidFill>
+                <a:latin typeface="Open Sans"/>
+                <a:ea typeface="Open Sans"/>
+                <a:cs typeface="Open Sans"/>
+              </a:rPr>
+              <a:t>•  Не обесценивайте страх, не спорьте и не давайте ложных обещаний.</a:t>
+            </a:r>
+          </a:p>
+          <a:p>
+            <a:pPr algn="l">
+              <a:spcAft>
+                <a:spcPts val="800"/>
+              </a:spcAft>
+            </a:pPr>
+            <a:r>
+              <a:rPr sz="1400" b="0">
+                <a:solidFill>
+                  <a:srgbClr val="333333"/>
+                </a:solidFill>
+                <a:latin typeface="Open Sans"/>
+                <a:ea typeface="Open Sans"/>
+                <a:cs typeface="Open Sans"/>
+              </a:rPr>
+              <a:t>•  Оставайтесь рядом до передачи пострадавшего специалистам.</a:t>
+            </a:r>
+          </a:p>
+        </p:txBody>
+      </p:sp>
+    </p:spTree>
+  </p:cSld>
+  <p:clrMapOvr>
+    <a:masterClrMapping/>
+  </p:clrMapOvr>
+</p:sld>
+</file>
+
+<file path=ppt/slides/slide14.xml><?xml version="1.0" encoding="utf-8"?>
+<p:sld xmlns:a="http://schemas.openxmlformats.org/drawingml/2006/main" xmlns:p="http://schemas.openxmlformats.org/presentationml/2006/main" xmlns:r="http://schemas.openxmlformats.org/officeDocument/2006/relationships">
+  <p:cSld>
+    <p:spTree>
+      <p:nvGrpSpPr>
+        <p:cNvPr id="1" name=""/>
+        <p:cNvGrpSpPr/>
+        <p:nvPr/>
+      </p:nvGrpSpPr>
+      <p:grpSpPr/>
+      <p:sp>
+        <p:nvSpPr>
+          <p:cNvPr id="2" name="Rectangle 1"/>
+          <p:cNvSpPr/>
+          <p:nvPr/>
+        </p:nvSpPr>
+        <p:spPr>
+          <a:xfrm>
+            <a:off x="0" y="0"/>
+            <a:ext cx="12191695" cy="6858000"/>
+          </a:xfrm>
+          <a:prstGeom prst="rect">
+            <a:avLst/>
+          </a:prstGeom>
+          <a:solidFill>
+            <a:srgbClr val="FFFFFF"/>
+          </a:solidFill>
+          <a:ln>
+            <a:noFill/>
+          </a:ln>
+        </p:spPr>
+        <p:style>
+          <a:lnRef idx="1">
+            <a:schemeClr val="accent1"/>
+          </a:lnRef>
+          <a:fillRef idx="3">
+            <a:schemeClr val="accent1"/>
+          </a:fillRef>
+          <a:effectRef idx="2">
+            <a:schemeClr val="accent1"/>
+          </a:effectRef>
+          <a:fontRef idx="minor">
+            <a:schemeClr val="lt1"/>
+          </a:fontRef>
+        </p:style>
+        <p:txBody>
+          <a:bodyPr rtlCol="0" anchor="ctr"/>
+          <a:lstStyle/>
+          <a:p>
+            <a:pPr algn="ctr"/>
+          </a:p>
+        </p:txBody>
+      </p:sp>
+      <p:sp>
+        <p:nvSpPr>
+          <p:cNvPr id="3" name="TextBox 2"/>
+          <p:cNvSpPr txBox="1"/>
+          <p:nvPr/>
+        </p:nvSpPr>
+        <p:spPr>
+          <a:xfrm>
+            <a:off x="700000" y="250000"/>
+            <a:ext cx="11200000" cy="550000"/>
+          </a:xfrm>
+          <a:prstGeom prst="rect">
+            <a:avLst/>
+          </a:prstGeom>
+          <a:noFill/>
+        </p:spPr>
+        <p:txBody>
+          <a:bodyPr wrap="square" anchor="t">
+            <a:spAutoFit/>
+          </a:bodyPr>
+          <a:lstStyle/>
+          <a:p>
+            <a:pPr algn="l"/>
+            <a:r>
+              <a:rPr sz="2200" b="1">
+                <a:solidFill>
+                  <a:srgbClr val="333333"/>
+                </a:solidFill>
+                <a:latin typeface="Open Sans"/>
+                <a:ea typeface="Open Sans"/>
+                <a:cs typeface="Open Sans"/>
+              </a:rPr>
+              <a:t>ГЛАВНОЕ ЗАПОМНИТЬ</a:t>
+            </a:r>
+          </a:p>
+        </p:txBody>
+      </p:sp>
+      <p:sp>
+        <p:nvSpPr>
+          <p:cNvPr id="4" name="Rectangle 3"/>
+          <p:cNvSpPr/>
+          <p:nvPr/>
+        </p:nvSpPr>
+        <p:spPr>
+          <a:xfrm>
+            <a:off x="700000" y="850000"/>
+            <a:ext cx="9000000" cy="28000"/>
+          </a:xfrm>
+          <a:prstGeom prst="rect">
+            <a:avLst/>
+          </a:prstGeom>
+          <a:solidFill>
+            <a:srgbClr val="555555"/>
+          </a:solidFill>
+          <a:ln>
+            <a:noFill/>
+          </a:ln>
+        </p:spPr>
+        <p:style>
+          <a:lnRef idx="1">
+            <a:schemeClr val="accent1"/>
+          </a:lnRef>
+          <a:fillRef idx="3">
+            <a:schemeClr val="accent1"/>
+          </a:fillRef>
+          <a:effectRef idx="2">
+            <a:schemeClr val="accent1"/>
+          </a:effectRef>
+          <a:fontRef idx="minor">
+            <a:schemeClr val="lt1"/>
+          </a:fontRef>
+        </p:style>
+        <p:txBody>
+          <a:bodyPr rtlCol="0" anchor="ctr"/>
+          <a:lstStyle/>
+          <a:p>
+            <a:pPr algn="ctr"/>
+          </a:p>
+        </p:txBody>
+      </p:sp>
+      <p:sp>
+        <p:nvSpPr>
+          <p:cNvPr id="5" name="TextBox 4"/>
+          <p:cNvSpPr txBox="1"/>
+          <p:nvPr/>
+        </p:nvSpPr>
+        <p:spPr>
+          <a:xfrm>
+            <a:off x="700000" y="920000"/>
+            <a:ext cx="11000000" cy="350000"/>
+          </a:xfrm>
+          <a:prstGeom prst="rect">
+            <a:avLst/>
+          </a:prstGeom>
+          <a:noFill/>
+        </p:spPr>
+        <p:txBody>
+          <a:bodyPr wrap="square" anchor="t">
+            <a:spAutoFit/>
+          </a:bodyPr>
+          <a:lstStyle/>
+          <a:p>
+            <a:pPr algn="l"/>
+            <a:r>
+              <a:rPr sz="1200" b="0">
+                <a:solidFill>
+                  <a:srgbClr val="666666"/>
+                </a:solidFill>
+                <a:latin typeface="Open Sans"/>
+                <a:ea typeface="Open Sans"/>
+                <a:cs typeface="Open Sans"/>
+              </a:rPr>
+              <a:t>Оказание первой помощи при травмах, ранениях и поражениях, прочих состояниях</a:t>
+            </a:r>
+          </a:p>
+        </p:txBody>
+      </p:sp>
+      <p:sp>
+        <p:nvSpPr>
+          <p:cNvPr id="6" name="Rectangle 5"/>
+          <p:cNvSpPr/>
+          <p:nvPr/>
+        </p:nvSpPr>
+        <p:spPr>
+          <a:xfrm>
+            <a:off x="0" y="2800000"/>
+            <a:ext cx="420000" cy="420000"/>
+          </a:xfrm>
+          <a:prstGeom prst="rect">
+            <a:avLst/>
+          </a:prstGeom>
+          <a:solidFill>
+            <a:srgbClr val="555555"/>
+          </a:solidFill>
+          <a:ln>
+            <a:noFill/>
+          </a:ln>
+        </p:spPr>
+        <p:style>
+          <a:lnRef idx="1">
+            <a:schemeClr val="accent1"/>
+          </a:lnRef>
+          <a:fillRef idx="3">
+            <a:schemeClr val="accent1"/>
+          </a:fillRef>
+          <a:effectRef idx="2">
+            <a:schemeClr val="accent1"/>
+          </a:effectRef>
+          <a:fontRef idx="minor">
+            <a:schemeClr val="lt1"/>
+          </a:fontRef>
+        </p:style>
+        <p:txBody>
+          <a:bodyPr rtlCol="0" anchor="ctr"/>
+          <a:lstStyle/>
+          <a:p>
+            <a:pPr algn="ctr"/>
+          </a:p>
+        </p:txBody>
+      </p:sp>
+      <p:sp>
+        <p:nvSpPr>
+          <p:cNvPr id="7" name="TextBox 6"/>
+          <p:cNvSpPr txBox="1"/>
+          <p:nvPr/>
+        </p:nvSpPr>
+        <p:spPr>
+          <a:xfrm>
+            <a:off x="0" y="2800000"/>
+            <a:ext cx="420000" cy="420000"/>
+          </a:xfrm>
+          <a:prstGeom prst="rect">
+            <a:avLst/>
+          </a:prstGeom>
+          <a:noFill/>
+        </p:spPr>
+        <p:txBody>
+          <a:bodyPr wrap="square" anchor="ctr">
+            <a:spAutoFit/>
+          </a:bodyPr>
+          <a:lstStyle/>
+          <a:p>
+            <a:pPr algn="ctr"/>
+            <a:r>
+              <a:rPr sz="1400" b="1">
+                <a:solidFill>
+                  <a:srgbClr val="FFFFFF"/>
+                </a:solidFill>
+                <a:latin typeface="Open Sans"/>
+                <a:ea typeface="Open Sans"/>
+                <a:cs typeface="Open Sans"/>
+              </a:rPr>
+              <a:t>14</a:t>
+            </a:r>
+          </a:p>
+        </p:txBody>
+      </p:sp>
+      <p:sp>
+        <p:nvSpPr>
+          <p:cNvPr id="8" name="Rectangle 7"/>
+          <p:cNvSpPr/>
+          <p:nvPr/>
+        </p:nvSpPr>
+        <p:spPr>
+          <a:xfrm>
+            <a:off x="700000" y="1450000"/>
+            <a:ext cx="11000000" cy="850000"/>
+          </a:xfrm>
+          <a:prstGeom prst="rect">
+            <a:avLst/>
+          </a:prstGeom>
+          <a:solidFill>
+            <a:srgbClr val="FFFFFF"/>
+          </a:solidFill>
+          <a:ln w="12700">
+            <a:solidFill>
+              <a:srgbClr val="999999"/>
+            </a:solidFill>
+          </a:ln>
+        </p:spPr>
+        <p:style>
+          <a:lnRef idx="1">
+            <a:schemeClr val="accent1"/>
+          </a:lnRef>
+          <a:fillRef idx="3">
+            <a:schemeClr val="accent1"/>
+          </a:fillRef>
+          <a:effectRef idx="2">
+            <a:schemeClr val="accent1"/>
+          </a:effectRef>
+          <a:fontRef idx="minor">
+            <a:schemeClr val="lt1"/>
+          </a:fontRef>
+        </p:style>
+        <p:txBody>
+          <a:bodyPr rtlCol="0" anchor="ctr"/>
+          <a:lstStyle/>
+          <a:p>
+            <a:pPr algn="ctr"/>
+          </a:p>
+        </p:txBody>
+      </p:sp>
+      <p:sp>
+        <p:nvSpPr>
+          <p:cNvPr id="9" name="Rectangle 8"/>
+          <p:cNvSpPr/>
+          <p:nvPr/>
+        </p:nvSpPr>
+        <p:spPr>
+          <a:xfrm>
+            <a:off x="700000" y="1450000"/>
+            <a:ext cx="90000" cy="850000"/>
+          </a:xfrm>
+          <a:prstGeom prst="rect">
+            <a:avLst/>
+          </a:prstGeom>
+          <a:solidFill>
+            <a:srgbClr val="CC0000"/>
+          </a:solidFill>
+          <a:ln>
+            <a:noFill/>
+          </a:ln>
+        </p:spPr>
+        <p:style>
+          <a:lnRef idx="1">
+            <a:schemeClr val="accent1"/>
+          </a:lnRef>
+          <a:fillRef idx="3">
+            <a:schemeClr val="accent1"/>
+          </a:fillRef>
+          <a:effectRef idx="2">
+            <a:schemeClr val="accent1"/>
+          </a:effectRef>
+          <a:fontRef idx="minor">
+            <a:schemeClr val="lt1"/>
+          </a:fontRef>
+        </p:style>
+        <p:txBody>
+          <a:bodyPr rtlCol="0" anchor="ctr"/>
+          <a:lstStyle/>
+          <a:p>
+            <a:pPr algn="ctr"/>
+          </a:p>
+        </p:txBody>
+      </p:sp>
+      <p:sp>
+        <p:nvSpPr>
+          <p:cNvPr id="10" name="TextBox 9"/>
+          <p:cNvSpPr txBox="1"/>
+          <p:nvPr/>
+        </p:nvSpPr>
+        <p:spPr>
+          <a:xfrm>
+            <a:off x="1000000" y="1530000"/>
+            <a:ext cx="10400000" cy="690000"/>
+          </a:xfrm>
+          <a:prstGeom prst="rect">
+            <a:avLst/>
+          </a:prstGeom>
+          <a:noFill/>
+        </p:spPr>
+        <p:txBody>
+          <a:bodyPr wrap="square" anchor="ctr">
+            <a:spAutoFit/>
+          </a:bodyPr>
+          <a:lstStyle/>
+          <a:p>
+            <a:pPr algn="l"/>
+            <a:r>
+              <a:rPr sz="1300" b="0">
+                <a:solidFill>
+                  <a:srgbClr val="333333"/>
+                </a:solidFill>
+                <a:latin typeface="Open Sans"/>
+                <a:ea typeface="Open Sans"/>
+                <a:cs typeface="Open Sans"/>
+              </a:rPr>
+              <a:t>Сначала устраните опасность для себя и пострадавшего</a:t>
+            </a:r>
+          </a:p>
+        </p:txBody>
+      </p:sp>
+      <p:sp>
+        <p:nvSpPr>
+          <p:cNvPr id="11" name="Rectangle 10"/>
+          <p:cNvSpPr/>
+          <p:nvPr/>
+        </p:nvSpPr>
+        <p:spPr>
+          <a:xfrm>
+            <a:off x="700000" y="2380000"/>
+            <a:ext cx="11000000" cy="850000"/>
+          </a:xfrm>
+          <a:prstGeom prst="rect">
+            <a:avLst/>
+          </a:prstGeom>
+          <a:solidFill>
+            <a:srgbClr val="FFFFFF"/>
+          </a:solidFill>
+          <a:ln w="12700">
+            <a:solidFill>
+              <a:srgbClr val="999999"/>
+            </a:solidFill>
+          </a:ln>
+        </p:spPr>
+        <p:style>
+          <a:lnRef idx="1">
+            <a:schemeClr val="accent1"/>
+          </a:lnRef>
+          <a:fillRef idx="3">
+            <a:schemeClr val="accent1"/>
+          </a:fillRef>
+          <a:effectRef idx="2">
+            <a:schemeClr val="accent1"/>
+          </a:effectRef>
+          <a:fontRef idx="minor">
+            <a:schemeClr val="lt1"/>
+          </a:fontRef>
+        </p:style>
+        <p:txBody>
+          <a:bodyPr rtlCol="0" anchor="ctr"/>
+          <a:lstStyle/>
+          <a:p>
+            <a:pPr algn="ctr"/>
+          </a:p>
+        </p:txBody>
+      </p:sp>
+      <p:sp>
+        <p:nvSpPr>
+          <p:cNvPr id="12" name="Rectangle 11"/>
+          <p:cNvSpPr/>
+          <p:nvPr/>
+        </p:nvSpPr>
+        <p:spPr>
+          <a:xfrm>
+            <a:off x="700000" y="2380000"/>
+            <a:ext cx="90000" cy="850000"/>
+          </a:xfrm>
+          <a:prstGeom prst="rect">
+            <a:avLst/>
+          </a:prstGeom>
+          <a:solidFill>
+            <a:srgbClr val="CC0000"/>
+          </a:solidFill>
+          <a:ln>
+            <a:noFill/>
+          </a:ln>
+        </p:spPr>
+        <p:style>
+          <a:lnRef idx="1">
+            <a:schemeClr val="accent1"/>
+          </a:lnRef>
+          <a:fillRef idx="3">
+            <a:schemeClr val="accent1"/>
+          </a:fillRef>
+          <a:effectRef idx="2">
+            <a:schemeClr val="accent1"/>
+          </a:effectRef>
+          <a:fontRef idx="minor">
+            <a:schemeClr val="lt1"/>
+          </a:fontRef>
+        </p:style>
+        <p:txBody>
+          <a:bodyPr rtlCol="0" anchor="ctr"/>
+          <a:lstStyle/>
+          <a:p>
+            <a:pPr algn="ctr"/>
+          </a:p>
+        </p:txBody>
+      </p:sp>
+      <p:sp>
+        <p:nvSpPr>
+          <p:cNvPr id="13" name="TextBox 12"/>
+          <p:cNvSpPr txBox="1"/>
+          <p:nvPr/>
+        </p:nvSpPr>
+        <p:spPr>
+          <a:xfrm>
+            <a:off x="1000000" y="2460000"/>
+            <a:ext cx="10400000" cy="690000"/>
+          </a:xfrm>
+          <a:prstGeom prst="rect">
+            <a:avLst/>
+          </a:prstGeom>
+          <a:noFill/>
+        </p:spPr>
+        <p:txBody>
+          <a:bodyPr wrap="square" anchor="ctr">
+            <a:spAutoFit/>
+          </a:bodyPr>
+          <a:lstStyle/>
+          <a:p>
+            <a:pPr algn="l"/>
+            <a:r>
+              <a:rPr sz="1300" b="0">
+                <a:solidFill>
+                  <a:srgbClr val="333333"/>
+                </a:solidFill>
+                <a:latin typeface="Open Sans"/>
+                <a:ea typeface="Open Sans"/>
+                <a:cs typeface="Open Sans"/>
+              </a:rPr>
+              <a:t>Оцените сознание, дыхание и сильное кровотечение</a:t>
+            </a:r>
+          </a:p>
+        </p:txBody>
+      </p:sp>
+      <p:sp>
+        <p:nvSpPr>
+          <p:cNvPr id="14" name="Rectangle 13"/>
+          <p:cNvSpPr/>
+          <p:nvPr/>
+        </p:nvSpPr>
+        <p:spPr>
+          <a:xfrm>
+            <a:off x="700000" y="3310000"/>
+            <a:ext cx="11000000" cy="850000"/>
+          </a:xfrm>
+          <a:prstGeom prst="rect">
+            <a:avLst/>
+          </a:prstGeom>
+          <a:solidFill>
+            <a:srgbClr val="FFFFFF"/>
+          </a:solidFill>
+          <a:ln w="12700">
+            <a:solidFill>
+              <a:srgbClr val="999999"/>
+            </a:solidFill>
+          </a:ln>
+        </p:spPr>
+        <p:style>
+          <a:lnRef idx="1">
+            <a:schemeClr val="accent1"/>
+          </a:lnRef>
+          <a:fillRef idx="3">
+            <a:schemeClr val="accent1"/>
+          </a:fillRef>
+          <a:effectRef idx="2">
+            <a:schemeClr val="accent1"/>
+          </a:effectRef>
+          <a:fontRef idx="minor">
+            <a:schemeClr val="lt1"/>
+          </a:fontRef>
+        </p:style>
+        <p:txBody>
+          <a:bodyPr rtlCol="0" anchor="ctr"/>
+          <a:lstStyle/>
+          <a:p>
+            <a:pPr algn="ctr"/>
+          </a:p>
+        </p:txBody>
+      </p:sp>
+      <p:sp>
+        <p:nvSpPr>
+          <p:cNvPr id="15" name="Rectangle 14"/>
+          <p:cNvSpPr/>
+          <p:nvPr/>
+        </p:nvSpPr>
+        <p:spPr>
+          <a:xfrm>
+            <a:off x="700000" y="3310000"/>
+            <a:ext cx="90000" cy="850000"/>
+          </a:xfrm>
+          <a:prstGeom prst="rect">
+            <a:avLst/>
+          </a:prstGeom>
+          <a:solidFill>
+            <a:srgbClr val="CC0000"/>
+          </a:solidFill>
+          <a:ln>
+            <a:noFill/>
+          </a:ln>
+        </p:spPr>
+        <p:style>
+          <a:lnRef idx="1">
+            <a:schemeClr val="accent1"/>
+          </a:lnRef>
+          <a:fillRef idx="3">
+            <a:schemeClr val="accent1"/>
+          </a:fillRef>
+          <a:effectRef idx="2">
+            <a:schemeClr val="accent1"/>
+          </a:effectRef>
+          <a:fontRef idx="minor">
+            <a:schemeClr val="lt1"/>
+          </a:fontRef>
+        </p:style>
+        <p:txBody>
+          <a:bodyPr rtlCol="0" anchor="ctr"/>
+          <a:lstStyle/>
+          <a:p>
+            <a:pPr algn="ctr"/>
+          </a:p>
+        </p:txBody>
+      </p:sp>
+      <p:sp>
+        <p:nvSpPr>
+          <p:cNvPr id="16" name="TextBox 15"/>
+          <p:cNvSpPr txBox="1"/>
+          <p:nvPr/>
+        </p:nvSpPr>
+        <p:spPr>
+          <a:xfrm>
+            <a:off x="1000000" y="3390000"/>
+            <a:ext cx="10400000" cy="690000"/>
+          </a:xfrm>
+          <a:prstGeom prst="rect">
+            <a:avLst/>
+          </a:prstGeom>
+          <a:noFill/>
+        </p:spPr>
+        <p:txBody>
+          <a:bodyPr wrap="square" anchor="ctr">
+            <a:spAutoFit/>
+          </a:bodyPr>
+          <a:lstStyle/>
+          <a:p>
+            <a:pPr algn="l"/>
+            <a:r>
+              <a:rPr sz="1300" b="0">
+                <a:solidFill>
+                  <a:srgbClr val="333333"/>
+                </a:solidFill>
+                <a:latin typeface="Open Sans"/>
+                <a:ea typeface="Open Sans"/>
+                <a:cs typeface="Open Sans"/>
+              </a:rPr>
+              <a:t>Вызовите скорую помощь и следуйте указаниям диспетчера</a:t>
+            </a:r>
+          </a:p>
+        </p:txBody>
+      </p:sp>
+      <p:sp>
+        <p:nvSpPr>
+          <p:cNvPr id="17" name="Rectangle 16"/>
+          <p:cNvSpPr/>
+          <p:nvPr/>
+        </p:nvSpPr>
+        <p:spPr>
+          <a:xfrm>
+            <a:off x="700000" y="4240000"/>
+            <a:ext cx="11000000" cy="850000"/>
+          </a:xfrm>
+          <a:prstGeom prst="rect">
+            <a:avLst/>
+          </a:prstGeom>
+          <a:solidFill>
+            <a:srgbClr val="FFFFFF"/>
+          </a:solidFill>
+          <a:ln w="12700">
+            <a:solidFill>
+              <a:srgbClr val="999999"/>
+            </a:solidFill>
+          </a:ln>
+        </p:spPr>
+        <p:style>
+          <a:lnRef idx="1">
+            <a:schemeClr val="accent1"/>
+          </a:lnRef>
+          <a:fillRef idx="3">
+            <a:schemeClr val="accent1"/>
+          </a:fillRef>
+          <a:effectRef idx="2">
+            <a:schemeClr val="accent1"/>
+          </a:effectRef>
+          <a:fontRef idx="minor">
+            <a:schemeClr val="lt1"/>
+          </a:fontRef>
+        </p:style>
+        <p:txBody>
+          <a:bodyPr rtlCol="0" anchor="ctr"/>
+          <a:lstStyle/>
+          <a:p>
+            <a:pPr algn="ctr"/>
+          </a:p>
+        </p:txBody>
+      </p:sp>
+      <p:sp>
+        <p:nvSpPr>
+          <p:cNvPr id="18" name="Rectangle 17"/>
+          <p:cNvSpPr/>
+          <p:nvPr/>
+        </p:nvSpPr>
+        <p:spPr>
+          <a:xfrm>
+            <a:off x="700000" y="4240000"/>
+            <a:ext cx="90000" cy="850000"/>
+          </a:xfrm>
+          <a:prstGeom prst="rect">
+            <a:avLst/>
+          </a:prstGeom>
+          <a:solidFill>
+            <a:srgbClr val="CC0000"/>
+          </a:solidFill>
+          <a:ln>
+            <a:noFill/>
+          </a:ln>
+        </p:spPr>
+        <p:style>
+          <a:lnRef idx="1">
+            <a:schemeClr val="accent1"/>
+          </a:lnRef>
+          <a:fillRef idx="3">
+            <a:schemeClr val="accent1"/>
+          </a:fillRef>
+          <a:effectRef idx="2">
+            <a:schemeClr val="accent1"/>
+          </a:effectRef>
+          <a:fontRef idx="minor">
+            <a:schemeClr val="lt1"/>
+          </a:fontRef>
+        </p:style>
+        <p:txBody>
+          <a:bodyPr rtlCol="0" anchor="ctr"/>
+          <a:lstStyle/>
+          <a:p>
+            <a:pPr algn="ctr"/>
+          </a:p>
+        </p:txBody>
+      </p:sp>
+      <p:sp>
+        <p:nvSpPr>
+          <p:cNvPr id="19" name="TextBox 18"/>
+          <p:cNvSpPr txBox="1"/>
+          <p:nvPr/>
+        </p:nvSpPr>
+        <p:spPr>
+          <a:xfrm>
+            <a:off x="1000000" y="4320000"/>
+            <a:ext cx="10400000" cy="690000"/>
+          </a:xfrm>
+          <a:prstGeom prst="rect">
+            <a:avLst/>
+          </a:prstGeom>
+          <a:noFill/>
+        </p:spPr>
+        <p:txBody>
+          <a:bodyPr wrap="square" anchor="ctr">
+            <a:spAutoFit/>
+          </a:bodyPr>
+          <a:lstStyle/>
+          <a:p>
+            <a:pPr algn="l"/>
+            <a:r>
+              <a:rPr sz="1300" b="0">
+                <a:solidFill>
+                  <a:srgbClr val="333333"/>
+                </a:solidFill>
+                <a:latin typeface="Open Sans"/>
+                <a:ea typeface="Open Sans"/>
+                <a:cs typeface="Open Sans"/>
+              </a:rPr>
+              <a:t>Помогайте по найденным состояниям в порядке срочности</a:t>
+            </a:r>
+          </a:p>
+        </p:txBody>
+      </p:sp>
+      <p:sp>
+        <p:nvSpPr>
+          <p:cNvPr id="20" name="Rectangle 19"/>
+          <p:cNvSpPr/>
+          <p:nvPr/>
+        </p:nvSpPr>
+        <p:spPr>
+          <a:xfrm>
+            <a:off x="700000" y="5170000"/>
+            <a:ext cx="11000000" cy="850000"/>
+          </a:xfrm>
+          <a:prstGeom prst="rect">
+            <a:avLst/>
+          </a:prstGeom>
+          <a:solidFill>
+            <a:srgbClr val="FFFFFF"/>
+          </a:solidFill>
+          <a:ln w="12700">
+            <a:solidFill>
+              <a:srgbClr val="999999"/>
+            </a:solidFill>
+          </a:ln>
+        </p:spPr>
+        <p:style>
+          <a:lnRef idx="1">
+            <a:schemeClr val="accent1"/>
+          </a:lnRef>
+          <a:fillRef idx="3">
+            <a:schemeClr val="accent1"/>
+          </a:fillRef>
+          <a:effectRef idx="2">
+            <a:schemeClr val="accent1"/>
+          </a:effectRef>
+          <a:fontRef idx="minor">
+            <a:schemeClr val="lt1"/>
+          </a:fontRef>
+        </p:style>
+        <p:txBody>
+          <a:bodyPr rtlCol="0" anchor="ctr"/>
+          <a:lstStyle/>
+          <a:p>
+            <a:pPr algn="ctr"/>
+          </a:p>
+        </p:txBody>
+      </p:sp>
+      <p:sp>
+        <p:nvSpPr>
+          <p:cNvPr id="21" name="Rectangle 20"/>
+          <p:cNvSpPr/>
+          <p:nvPr/>
+        </p:nvSpPr>
+        <p:spPr>
+          <a:xfrm>
+            <a:off x="700000" y="5170000"/>
+            <a:ext cx="90000" cy="850000"/>
+          </a:xfrm>
+          <a:prstGeom prst="rect">
+            <a:avLst/>
+          </a:prstGeom>
+          <a:solidFill>
+            <a:srgbClr val="CC0000"/>
+          </a:solidFill>
+          <a:ln>
+            <a:noFill/>
+          </a:ln>
+        </p:spPr>
+        <p:style>
+          <a:lnRef idx="1">
+            <a:schemeClr val="accent1"/>
+          </a:lnRef>
+          <a:fillRef idx="3">
+            <a:schemeClr val="accent1"/>
+          </a:fillRef>
+          <a:effectRef idx="2">
+            <a:schemeClr val="accent1"/>
+          </a:effectRef>
+          <a:fontRef idx="minor">
+            <a:schemeClr val="lt1"/>
+          </a:fontRef>
+        </p:style>
+        <p:txBody>
+          <a:bodyPr rtlCol="0" anchor="ctr"/>
+          <a:lstStyle/>
+          <a:p>
+            <a:pPr algn="ctr"/>
+          </a:p>
+        </p:txBody>
+      </p:sp>
+      <p:sp>
+        <p:nvSpPr>
+          <p:cNvPr id="22" name="TextBox 21"/>
+          <p:cNvSpPr txBox="1"/>
+          <p:nvPr/>
+        </p:nvSpPr>
+        <p:spPr>
+          <a:xfrm>
+            <a:off x="1000000" y="5250000"/>
+            <a:ext cx="10400000" cy="690000"/>
+          </a:xfrm>
+          <a:prstGeom prst="rect">
+            <a:avLst/>
+          </a:prstGeom>
+          <a:noFill/>
+        </p:spPr>
+        <p:txBody>
+          <a:bodyPr wrap="square" anchor="ctr">
+            <a:spAutoFit/>
+          </a:bodyPr>
+          <a:lstStyle/>
+          <a:p>
+            <a:pPr algn="l"/>
+            <a:r>
+              <a:rPr sz="1300" b="0">
+                <a:solidFill>
+                  <a:srgbClr val="333333"/>
+                </a:solidFill>
+                <a:latin typeface="Open Sans"/>
+                <a:ea typeface="Open Sans"/>
+                <a:cs typeface="Open Sans"/>
+              </a:rPr>
+              <a:t>Наблюдайте и поддерживайте до передачи специалистам</a:t>
+            </a:r>
+          </a:p>
+        </p:txBody>
+      </p:sp>
+    </p:spTree>
+  </p:cSld>
+  <p:clrMapOvr>
+    <a:masterClrMapping/>
+  </p:clrMapOvr>
+</p:sld>
+</file>
+
+<file path=ppt/slides/slide15.xml><?xml version="1.0" encoding="utf-8"?>
+<p:sld xmlns:a="http://schemas.openxmlformats.org/drawingml/2006/main" xmlns:p="http://schemas.openxmlformats.org/presentationml/2006/main" xmlns:r="http://schemas.openxmlformats.org/officeDocument/2006/relationships">
+  <p:cSld>
+    <p:spTree>
+      <p:nvGrpSpPr>
+        <p:cNvPr id="1" name=""/>
+        <p:cNvGrpSpPr/>
+        <p:nvPr/>
+      </p:nvGrpSpPr>
+      <p:grpSpPr/>
+      <p:sp>
+        <p:nvSpPr>
+          <p:cNvPr id="2" name="Rectangle 1"/>
+          <p:cNvSpPr/>
+          <p:nvPr/>
+        </p:nvSpPr>
+        <p:spPr>
+          <a:xfrm>
+            <a:off x="0" y="0"/>
+            <a:ext cx="12191695" cy="6858000"/>
+          </a:xfrm>
+          <a:prstGeom prst="rect">
+            <a:avLst/>
+          </a:prstGeom>
+          <a:solidFill>
+            <a:srgbClr val="FFFFFF"/>
+          </a:solidFill>
+          <a:ln>
+            <a:noFill/>
+          </a:ln>
+        </p:spPr>
+        <p:style>
+          <a:lnRef idx="1">
+            <a:schemeClr val="accent1"/>
+          </a:lnRef>
+          <a:fillRef idx="3">
+            <a:schemeClr val="accent1"/>
+          </a:fillRef>
+          <a:effectRef idx="2">
+            <a:schemeClr val="accent1"/>
+          </a:effectRef>
+          <a:fontRef idx="minor">
+            <a:schemeClr val="lt1"/>
+          </a:fontRef>
+        </p:style>
+        <p:txBody>
+          <a:bodyPr rtlCol="0" anchor="ctr"/>
+          <a:lstStyle/>
+          <a:p>
+            <a:pPr algn="ctr"/>
+          </a:p>
+        </p:txBody>
+      </p:sp>
+      <p:sp>
+        <p:nvSpPr>
+          <p:cNvPr id="3" name="TextBox 2"/>
+          <p:cNvSpPr txBox="1"/>
+          <p:nvPr/>
+        </p:nvSpPr>
+        <p:spPr>
+          <a:xfrm>
+            <a:off x="700000" y="250000"/>
+            <a:ext cx="11200000" cy="550000"/>
+          </a:xfrm>
+          <a:prstGeom prst="rect">
+            <a:avLst/>
+          </a:prstGeom>
+          <a:noFill/>
+        </p:spPr>
+        <p:txBody>
+          <a:bodyPr wrap="square" anchor="t">
+            <a:spAutoFit/>
+          </a:bodyPr>
+          <a:lstStyle/>
+          <a:p>
+            <a:pPr algn="l"/>
+            <a:r>
+              <a:rPr sz="2200" b="1">
+                <a:solidFill>
+                  <a:srgbClr val="333333"/>
+                </a:solidFill>
+                <a:latin typeface="Open Sans"/>
+                <a:ea typeface="Open Sans"/>
+                <a:cs typeface="Open Sans"/>
+              </a:rPr>
+              <a:t>ПАМЯТКА</a:t>
+            </a:r>
+          </a:p>
+        </p:txBody>
+      </p:sp>
+      <p:sp>
+        <p:nvSpPr>
+          <p:cNvPr id="4" name="Rectangle 3"/>
+          <p:cNvSpPr/>
+          <p:nvPr/>
+        </p:nvSpPr>
+        <p:spPr>
+          <a:xfrm>
+            <a:off x="700000" y="850000"/>
+            <a:ext cx="9000000" cy="28000"/>
+          </a:xfrm>
+          <a:prstGeom prst="rect">
+            <a:avLst/>
+          </a:prstGeom>
+          <a:solidFill>
+            <a:srgbClr val="555555"/>
+          </a:solidFill>
+          <a:ln>
+            <a:noFill/>
+          </a:ln>
+        </p:spPr>
+        <p:style>
+          <a:lnRef idx="1">
+            <a:schemeClr val="accent1"/>
+          </a:lnRef>
+          <a:fillRef idx="3">
+            <a:schemeClr val="accent1"/>
+          </a:fillRef>
+          <a:effectRef idx="2">
+            <a:schemeClr val="accent1"/>
+          </a:effectRef>
+          <a:fontRef idx="minor">
+            <a:schemeClr val="lt1"/>
+          </a:fontRef>
+        </p:style>
+        <p:txBody>
+          <a:bodyPr rtlCol="0" anchor="ctr"/>
+          <a:lstStyle/>
+          <a:p>
+            <a:pPr algn="ctr"/>
+          </a:p>
+        </p:txBody>
+      </p:sp>
+      <p:sp>
+        <p:nvSpPr>
+          <p:cNvPr id="5" name="TextBox 4"/>
+          <p:cNvSpPr txBox="1"/>
+          <p:nvPr/>
+        </p:nvSpPr>
+        <p:spPr>
+          <a:xfrm>
+            <a:off x="700000" y="920000"/>
+            <a:ext cx="11000000" cy="350000"/>
+          </a:xfrm>
+          <a:prstGeom prst="rect">
+            <a:avLst/>
+          </a:prstGeom>
+          <a:noFill/>
+        </p:spPr>
+        <p:txBody>
+          <a:bodyPr wrap="square" anchor="t">
+            <a:spAutoFit/>
+          </a:bodyPr>
+          <a:lstStyle/>
+          <a:p>
+            <a:pPr algn="l"/>
+            <a:r>
+              <a:rPr sz="1200" b="0">
+                <a:solidFill>
+                  <a:srgbClr val="666666"/>
+                </a:solidFill>
+                <a:latin typeface="Open Sans"/>
+                <a:ea typeface="Open Sans"/>
+                <a:cs typeface="Open Sans"/>
+              </a:rPr>
+              <a:t>Оказание первой помощи при травмах, ранениях и поражениях, прочих состояниях</a:t>
+            </a:r>
+          </a:p>
+        </p:txBody>
+      </p:sp>
+      <p:sp>
+        <p:nvSpPr>
+          <p:cNvPr id="6" name="Rectangle 5"/>
+          <p:cNvSpPr/>
+          <p:nvPr/>
+        </p:nvSpPr>
+        <p:spPr>
+          <a:xfrm>
+            <a:off x="0" y="2800000"/>
+            <a:ext cx="420000" cy="420000"/>
+          </a:xfrm>
+          <a:prstGeom prst="rect">
+            <a:avLst/>
+          </a:prstGeom>
+          <a:solidFill>
+            <a:srgbClr val="555555"/>
+          </a:solidFill>
+          <a:ln>
+            <a:noFill/>
+          </a:ln>
+        </p:spPr>
+        <p:style>
+          <a:lnRef idx="1">
+            <a:schemeClr val="accent1"/>
+          </a:lnRef>
+          <a:fillRef idx="3">
+            <a:schemeClr val="accent1"/>
+          </a:fillRef>
+          <a:effectRef idx="2">
+            <a:schemeClr val="accent1"/>
+          </a:effectRef>
+          <a:fontRef idx="minor">
+            <a:schemeClr val="lt1"/>
+          </a:fontRef>
+        </p:style>
+        <p:txBody>
+          <a:bodyPr rtlCol="0" anchor="ctr"/>
+          <a:lstStyle/>
+          <a:p>
+            <a:pPr algn="ctr"/>
+          </a:p>
+        </p:txBody>
+      </p:sp>
+      <p:sp>
+        <p:nvSpPr>
+          <p:cNvPr id="7" name="TextBox 6"/>
+          <p:cNvSpPr txBox="1"/>
+          <p:nvPr/>
+        </p:nvSpPr>
+        <p:spPr>
+          <a:xfrm>
+            <a:off x="0" y="2800000"/>
+            <a:ext cx="420000" cy="420000"/>
+          </a:xfrm>
+          <a:prstGeom prst="rect">
+            <a:avLst/>
+          </a:prstGeom>
+          <a:noFill/>
+        </p:spPr>
+        <p:txBody>
+          <a:bodyPr wrap="square" anchor="ctr">
+            <a:spAutoFit/>
+          </a:bodyPr>
+          <a:lstStyle/>
+          <a:p>
+            <a:pPr algn="ctr"/>
+            <a:r>
+              <a:rPr sz="1400" b="1">
+                <a:solidFill>
+                  <a:srgbClr val="FFFFFF"/>
+                </a:solidFill>
+                <a:latin typeface="Open Sans"/>
+                <a:ea typeface="Open Sans"/>
+                <a:cs typeface="Open Sans"/>
+              </a:rPr>
+              <a:t>15</a:t>
+            </a:r>
+          </a:p>
+        </p:txBody>
+      </p:sp>
+      <p:pic>
+        <p:nvPicPr>
+          <p:cNvPr id="8" name="Picture 7" descr="pamyatka-tema4-osnovnye-sostoyaniya-16x9.png"/>
+          <p:cNvPicPr>
+            <a:picLocks noChangeAspect="1"/>
+          </p:cNvPicPr>
+          <p:nvPr/>
+        </p:nvPicPr>
+        <p:blipFill>
+          <a:blip r:embed="rId2"/>
+          <a:stretch>
+            <a:fillRect/>
+          </a:stretch>
+        </p:blipFill>
+        <p:spPr>
+          <a:xfrm>
+            <a:off x="2300000" y="1400000"/>
+            <a:ext cx="7800000" cy="5200000"/>
+          </a:xfrm>
+          <a:prstGeom prst="rect">
+            <a:avLst/>
+          </a:prstGeom>
+        </p:spPr>
+      </p:pic>
+    </p:spTree>
+  </p:cSld>
+  <p:clrMapOvr>
+    <a:masterClrMapping/>
+  </p:clrMapOvr>
+</p:sld>
+</file>
+
+<file path=ppt/slides/slide16.xml><?xml version="1.0" encoding="utf-8"?>
+<p:sld xmlns:a="http://schemas.openxmlformats.org/drawingml/2006/main" xmlns:p="http://schemas.openxmlformats.org/presentationml/2006/main" xmlns:r="http://schemas.openxmlformats.org/officeDocument/2006/relationships">
+  <p:cSld>
+    <p:spTree>
+      <p:nvGrpSpPr>
+        <p:cNvPr id="1" name=""/>
+        <p:cNvGrpSpPr/>
+        <p:nvPr/>
+      </p:nvGrpSpPr>
+      <p:grpSpPr/>
+      <p:sp>
+        <p:nvSpPr>
+          <p:cNvPr id="2" name="Rectangle 1"/>
+          <p:cNvSpPr/>
+          <p:nvPr/>
+        </p:nvSpPr>
+        <p:spPr>
+          <a:xfrm>
+            <a:off x="0" y="0"/>
             <a:ext cx="3400000" cy="6858000"/>
           </a:xfrm>
           <a:prstGeom prst="rect">
@@ -3943,7 +6883,7 @@
                 <a:ea typeface="Open Sans"/>
                 <a:cs typeface="Open Sans"/>
               </a:rPr>
-              <a:t>Травмы</a:t>
+              <a:t>Общий порядок действий</a:t>
             </a:r>
           </a:p>
         </p:txBody>
@@ -4105,7 +7045,7 @@
                 <a:ea typeface="Open Sans"/>
                 <a:cs typeface="Open Sans"/>
               </a:rPr>
-              <a:t>Температурные поражения</a:t>
+              <a:t>Травмы и поражения</a:t>
             </a:r>
           </a:p>
         </p:txBody>
@@ -4429,7 +7369,7 @@
                 <a:ea typeface="Open Sans"/>
                 <a:cs typeface="Open Sans"/>
               </a:rPr>
-              <a:t>Судороги</a:t>
+              <a:t>Судороги и лекарства</a:t>
             </a:r>
           </a:p>
         </p:txBody>
@@ -4591,7 +7531,7 @@
                 <a:ea typeface="Open Sans"/>
                 <a:cs typeface="Open Sans"/>
               </a:rPr>
-              <a:t>Реакции на стресс</a:t>
+              <a:t>Поддержка и наблюдение</a:t>
             </a:r>
           </a:p>
         </p:txBody>
@@ -4689,7 +7629,7 @@
                 <a:ea typeface="Open Sans"/>
                 <a:cs typeface="Open Sans"/>
               </a:rPr>
-              <a:t>ЧТО МОЖЕТ ВЫЯВИТЬ ОСМОТР</a:t>
+              <a:t>ЕДИНЫЙ ПОРЯДОК ПЕРВОЙ ПОМОЩИ</a:t>
             </a:r>
           </a:p>
         </p:txBody>
@@ -4856,14 +7796,57 @@
       </p:sp>
       <p:sp>
         <p:nvSpPr>
-          <p:cNvPr id="8" name="TextBox 7"/>
+          <p:cNvPr id="8" name="Oval 7"/>
+          <p:cNvSpPr/>
+          <p:nvPr/>
+        </p:nvSpPr>
+        <p:spPr>
+          <a:xfrm>
+            <a:off x="700000" y="1400000"/>
+            <a:ext cx="500000" cy="500000"/>
+          </a:xfrm>
+          <a:prstGeom prst="ellipse">
+            <a:avLst/>
+          </a:prstGeom>
+          <a:solidFill>
+            <a:srgbClr val="CC0000"/>
+          </a:solidFill>
+          <a:ln>
+            <a:noFill/>
+          </a:ln>
+        </p:spPr>
+        <p:style>
+          <a:lnRef idx="1">
+            <a:schemeClr val="accent1"/>
+          </a:lnRef>
+          <a:fillRef idx="3">
+            <a:schemeClr val="accent1"/>
+          </a:fillRef>
+          <a:effectRef idx="2">
+            <a:schemeClr val="accent1"/>
+          </a:effectRef>
+          <a:fontRef idx="minor">
+            <a:schemeClr val="lt1"/>
+          </a:fontRef>
+        </p:style>
+        <p:txBody>
+          <a:bodyPr rtlCol="0" anchor="ctr"/>
+          <a:lstStyle/>
+          <a:p>
+            <a:pPr algn="ctr"/>
+          </a:p>
+        </p:txBody>
+      </p:sp>
+      <p:sp>
+        <p:nvSpPr>
+          <p:cNvPr id="9" name="TextBox 8"/>
           <p:cNvSpPr txBox="1"/>
           <p:nvPr/>
         </p:nvSpPr>
         <p:spPr>
           <a:xfrm>
-            <a:off x="700000" y="1600000"/>
-            <a:ext cx="11000000" cy="4200000"/>
+            <a:off x="700000" y="1400000"/>
+            <a:ext cx="500000" cy="500000"/>
           </a:xfrm>
           <a:prstGeom prst="rect">
             <a:avLst/>
@@ -4871,14 +7854,96 @@
           <a:noFill/>
         </p:spPr>
         <p:txBody>
-          <a:bodyPr wrap="square" anchor="t">
+          <a:bodyPr wrap="square" anchor="ctr">
             <a:spAutoFit/>
           </a:bodyPr>
           <a:lstStyle/>
           <a:p>
+            <a:pPr algn="ctr"/>
+            <a:r>
+              <a:rPr sz="1300" b="1">
+                <a:solidFill>
+                  <a:srgbClr val="FFFFFF"/>
+                </a:solidFill>
+                <a:latin typeface="Open Sans"/>
+                <a:ea typeface="Open Sans"/>
+                <a:cs typeface="Open Sans"/>
+              </a:rPr>
+              <a:t>1</a:t>
+            </a:r>
+          </a:p>
+        </p:txBody>
+      </p:sp>
+      <p:sp>
+        <p:nvSpPr>
+          <p:cNvPr id="10" name="Rectangle 9"/>
+          <p:cNvSpPr/>
+          <p:nvPr/>
+        </p:nvSpPr>
+        <p:spPr>
+          <a:xfrm>
+            <a:off x="1400000" y="1400000"/>
+            <a:ext cx="10550000" cy="620000"/>
+          </a:xfrm>
+          <a:prstGeom prst="rect">
+            <a:avLst/>
+          </a:prstGeom>
+          <a:solidFill>
+            <a:srgbClr val="FFFFFF"/>
+          </a:solidFill>
+          <a:ln w="12700">
+            <a:solidFill>
+              <a:srgbClr val="999999"/>
+            </a:solidFill>
+          </a:ln>
+        </p:spPr>
+        <p:style>
+          <a:lnRef idx="1">
+            <a:schemeClr val="accent1"/>
+          </a:lnRef>
+          <a:fillRef idx="3">
+            <a:schemeClr val="accent1"/>
+          </a:fillRef>
+          <a:effectRef idx="2">
+            <a:schemeClr val="accent1"/>
+          </a:effectRef>
+          <a:fontRef idx="minor">
+            <a:schemeClr val="lt1"/>
+          </a:fontRef>
+        </p:style>
+        <p:txBody>
+          <a:bodyPr rtlCol="0" anchor="ctr"/>
+          <a:lstStyle/>
+          <a:p>
+            <a:pPr algn="ctr"/>
+          </a:p>
+        </p:txBody>
+      </p:sp>
+      <p:sp>
+        <p:nvSpPr>
+          <p:cNvPr id="11" name="TextBox 10"/>
+          <p:cNvSpPr txBox="1"/>
+          <p:nvPr/>
+        </p:nvSpPr>
+        <p:spPr>
+          <a:xfrm>
+            <a:off x="1600000" y="1400000"/>
+            <a:ext cx="10150000" cy="620000"/>
+          </a:xfrm>
+          <a:prstGeom prst="rect">
+            <a:avLst/>
+          </a:prstGeom>
+          <a:noFill/>
+        </p:spPr>
+        <p:txBody>
+          <a:bodyPr wrap="square" anchor="ctr">
+            <a:spAutoFit/>
+          </a:bodyPr>
+          <a:lstStyle/>
+          <a:p>
             <a:pPr algn="l"/>
             <a:r>
-              <a:rPr sz="1600" b="0">
+              <a:rPr sz="1300" b="0">
                 <a:solidFill>
                   <a:srgbClr val="333333"/>
                 </a:solidFill>
@@ -4886,7 +7951,897 @@
                 <a:ea typeface="Open Sans"/>
                 <a:cs typeface="Open Sans"/>
               </a:rPr>
-              <a:t>Подробный осмотр и опрос помогают распознать основные состояния, выбрать безопасные действия и вовремя вызвать скорую медицинскую помощь.</a:t>
+              <a:t>Оцените обстановку, определите опасности и обеспечьте безопасность.</a:t>
+            </a:r>
+          </a:p>
+        </p:txBody>
+      </p:sp>
+      <p:sp>
+        <p:nvSpPr>
+          <p:cNvPr id="12" name="Oval 11"/>
+          <p:cNvSpPr/>
+          <p:nvPr/>
+        </p:nvSpPr>
+        <p:spPr>
+          <a:xfrm>
+            <a:off x="700000" y="2100000"/>
+            <a:ext cx="500000" cy="500000"/>
+          </a:xfrm>
+          <a:prstGeom prst="ellipse">
+            <a:avLst/>
+          </a:prstGeom>
+          <a:solidFill>
+            <a:srgbClr val="555555"/>
+          </a:solidFill>
+          <a:ln>
+            <a:noFill/>
+          </a:ln>
+        </p:spPr>
+        <p:style>
+          <a:lnRef idx="1">
+            <a:schemeClr val="accent1"/>
+          </a:lnRef>
+          <a:fillRef idx="3">
+            <a:schemeClr val="accent1"/>
+          </a:fillRef>
+          <a:effectRef idx="2">
+            <a:schemeClr val="accent1"/>
+          </a:effectRef>
+          <a:fontRef idx="minor">
+            <a:schemeClr val="lt1"/>
+          </a:fontRef>
+        </p:style>
+        <p:txBody>
+          <a:bodyPr rtlCol="0" anchor="ctr"/>
+          <a:lstStyle/>
+          <a:p>
+            <a:pPr algn="ctr"/>
+          </a:p>
+        </p:txBody>
+      </p:sp>
+      <p:sp>
+        <p:nvSpPr>
+          <p:cNvPr id="13" name="TextBox 12"/>
+          <p:cNvSpPr txBox="1"/>
+          <p:nvPr/>
+        </p:nvSpPr>
+        <p:spPr>
+          <a:xfrm>
+            <a:off x="700000" y="2100000"/>
+            <a:ext cx="500000" cy="500000"/>
+          </a:xfrm>
+          <a:prstGeom prst="rect">
+            <a:avLst/>
+          </a:prstGeom>
+          <a:noFill/>
+        </p:spPr>
+        <p:txBody>
+          <a:bodyPr wrap="square" anchor="ctr">
+            <a:spAutoFit/>
+          </a:bodyPr>
+          <a:lstStyle/>
+          <a:p>
+            <a:pPr algn="ctr"/>
+            <a:r>
+              <a:rPr sz="1300" b="1">
+                <a:solidFill>
+                  <a:srgbClr val="FFFFFF"/>
+                </a:solidFill>
+                <a:latin typeface="Open Sans"/>
+                <a:ea typeface="Open Sans"/>
+                <a:cs typeface="Open Sans"/>
+              </a:rPr>
+              <a:t>2</a:t>
+            </a:r>
+          </a:p>
+        </p:txBody>
+      </p:sp>
+      <p:sp>
+        <p:nvSpPr>
+          <p:cNvPr id="14" name="Rectangle 13"/>
+          <p:cNvSpPr/>
+          <p:nvPr/>
+        </p:nvSpPr>
+        <p:spPr>
+          <a:xfrm>
+            <a:off x="1400000" y="2100000"/>
+            <a:ext cx="10550000" cy="620000"/>
+          </a:xfrm>
+          <a:prstGeom prst="rect">
+            <a:avLst/>
+          </a:prstGeom>
+          <a:solidFill>
+            <a:srgbClr val="FFFFFF"/>
+          </a:solidFill>
+          <a:ln w="12700">
+            <a:solidFill>
+              <a:srgbClr val="999999"/>
+            </a:solidFill>
+          </a:ln>
+        </p:spPr>
+        <p:style>
+          <a:lnRef idx="1">
+            <a:schemeClr val="accent1"/>
+          </a:lnRef>
+          <a:fillRef idx="3">
+            <a:schemeClr val="accent1"/>
+          </a:fillRef>
+          <a:effectRef idx="2">
+            <a:schemeClr val="accent1"/>
+          </a:effectRef>
+          <a:fontRef idx="minor">
+            <a:schemeClr val="lt1"/>
+          </a:fontRef>
+        </p:style>
+        <p:txBody>
+          <a:bodyPr rtlCol="0" anchor="ctr"/>
+          <a:lstStyle/>
+          <a:p>
+            <a:pPr algn="ctr"/>
+          </a:p>
+        </p:txBody>
+      </p:sp>
+      <p:sp>
+        <p:nvSpPr>
+          <p:cNvPr id="15" name="TextBox 14"/>
+          <p:cNvSpPr txBox="1"/>
+          <p:nvPr/>
+        </p:nvSpPr>
+        <p:spPr>
+          <a:xfrm>
+            <a:off x="1600000" y="2100000"/>
+            <a:ext cx="10150000" cy="620000"/>
+          </a:xfrm>
+          <a:prstGeom prst="rect">
+            <a:avLst/>
+          </a:prstGeom>
+          <a:noFill/>
+        </p:spPr>
+        <p:txBody>
+          <a:bodyPr wrap="square" anchor="ctr">
+            <a:spAutoFit/>
+          </a:bodyPr>
+          <a:lstStyle/>
+          <a:p>
+            <a:pPr algn="l"/>
+            <a:r>
+              <a:rPr sz="1300" b="0">
+                <a:solidFill>
+                  <a:srgbClr val="333333"/>
+                </a:solidFill>
+                <a:latin typeface="Open Sans"/>
+                <a:ea typeface="Open Sans"/>
+                <a:cs typeface="Open Sans"/>
+              </a:rPr>
+              <a:t>Проверьте сознание; восстановите проходимость дыхательных путей.</a:t>
+            </a:r>
+          </a:p>
+        </p:txBody>
+      </p:sp>
+      <p:sp>
+        <p:nvSpPr>
+          <p:cNvPr id="16" name="Oval 15"/>
+          <p:cNvSpPr/>
+          <p:nvPr/>
+        </p:nvSpPr>
+        <p:spPr>
+          <a:xfrm>
+            <a:off x="700000" y="2800000"/>
+            <a:ext cx="500000" cy="500000"/>
+          </a:xfrm>
+          <a:prstGeom prst="ellipse">
+            <a:avLst/>
+          </a:prstGeom>
+          <a:solidFill>
+            <a:srgbClr val="555555"/>
+          </a:solidFill>
+          <a:ln>
+            <a:noFill/>
+          </a:ln>
+        </p:spPr>
+        <p:style>
+          <a:lnRef idx="1">
+            <a:schemeClr val="accent1"/>
+          </a:lnRef>
+          <a:fillRef idx="3">
+            <a:schemeClr val="accent1"/>
+          </a:fillRef>
+          <a:effectRef idx="2">
+            <a:schemeClr val="accent1"/>
+          </a:effectRef>
+          <a:fontRef idx="minor">
+            <a:schemeClr val="lt1"/>
+          </a:fontRef>
+        </p:style>
+        <p:txBody>
+          <a:bodyPr rtlCol="0" anchor="ctr"/>
+          <a:lstStyle/>
+          <a:p>
+            <a:pPr algn="ctr"/>
+          </a:p>
+        </p:txBody>
+      </p:sp>
+      <p:sp>
+        <p:nvSpPr>
+          <p:cNvPr id="17" name="TextBox 16"/>
+          <p:cNvSpPr txBox="1"/>
+          <p:nvPr/>
+        </p:nvSpPr>
+        <p:spPr>
+          <a:xfrm>
+            <a:off x="700000" y="2800000"/>
+            <a:ext cx="500000" cy="500000"/>
+          </a:xfrm>
+          <a:prstGeom prst="rect">
+            <a:avLst/>
+          </a:prstGeom>
+          <a:noFill/>
+        </p:spPr>
+        <p:txBody>
+          <a:bodyPr wrap="square" anchor="ctr">
+            <a:spAutoFit/>
+          </a:bodyPr>
+          <a:lstStyle/>
+          <a:p>
+            <a:pPr algn="ctr"/>
+            <a:r>
+              <a:rPr sz="1300" b="1">
+                <a:solidFill>
+                  <a:srgbClr val="FFFFFF"/>
+                </a:solidFill>
+                <a:latin typeface="Open Sans"/>
+                <a:ea typeface="Open Sans"/>
+                <a:cs typeface="Open Sans"/>
+              </a:rPr>
+              <a:t>3</a:t>
+            </a:r>
+          </a:p>
+        </p:txBody>
+      </p:sp>
+      <p:sp>
+        <p:nvSpPr>
+          <p:cNvPr id="18" name="Rectangle 17"/>
+          <p:cNvSpPr/>
+          <p:nvPr/>
+        </p:nvSpPr>
+        <p:spPr>
+          <a:xfrm>
+            <a:off x="1400000" y="2800000"/>
+            <a:ext cx="10550000" cy="620000"/>
+          </a:xfrm>
+          <a:prstGeom prst="rect">
+            <a:avLst/>
+          </a:prstGeom>
+          <a:solidFill>
+            <a:srgbClr val="FFFFFF"/>
+          </a:solidFill>
+          <a:ln w="12700">
+            <a:solidFill>
+              <a:srgbClr val="999999"/>
+            </a:solidFill>
+          </a:ln>
+        </p:spPr>
+        <p:style>
+          <a:lnRef idx="1">
+            <a:schemeClr val="accent1"/>
+          </a:lnRef>
+          <a:fillRef idx="3">
+            <a:schemeClr val="accent1"/>
+          </a:fillRef>
+          <a:effectRef idx="2">
+            <a:schemeClr val="accent1"/>
+          </a:effectRef>
+          <a:fontRef idx="minor">
+            <a:schemeClr val="lt1"/>
+          </a:fontRef>
+        </p:style>
+        <p:txBody>
+          <a:bodyPr rtlCol="0" anchor="ctr"/>
+          <a:lstStyle/>
+          <a:p>
+            <a:pPr algn="ctr"/>
+          </a:p>
+        </p:txBody>
+      </p:sp>
+      <p:sp>
+        <p:nvSpPr>
+          <p:cNvPr id="19" name="TextBox 18"/>
+          <p:cNvSpPr txBox="1"/>
+          <p:nvPr/>
+        </p:nvSpPr>
+        <p:spPr>
+          <a:xfrm>
+            <a:off x="1600000" y="2800000"/>
+            <a:ext cx="10150000" cy="620000"/>
+          </a:xfrm>
+          <a:prstGeom prst="rect">
+            <a:avLst/>
+          </a:prstGeom>
+          <a:noFill/>
+        </p:spPr>
+        <p:txBody>
+          <a:bodyPr wrap="square" anchor="ctr">
+            <a:spAutoFit/>
+          </a:bodyPr>
+          <a:lstStyle/>
+          <a:p>
+            <a:pPr algn="l"/>
+            <a:r>
+              <a:rPr sz="1300" b="0">
+                <a:solidFill>
+                  <a:srgbClr val="333333"/>
+                </a:solidFill>
+                <a:latin typeface="Open Sans"/>
+                <a:ea typeface="Open Sans"/>
+                <a:cs typeface="Open Sans"/>
+              </a:rPr>
+              <a:t>Оцените нормальное дыхание и при его отсутствии начните реанимацию.</a:t>
+            </a:r>
+          </a:p>
+        </p:txBody>
+      </p:sp>
+      <p:sp>
+        <p:nvSpPr>
+          <p:cNvPr id="20" name="Oval 19"/>
+          <p:cNvSpPr/>
+          <p:nvPr/>
+        </p:nvSpPr>
+        <p:spPr>
+          <a:xfrm>
+            <a:off x="700000" y="3500000"/>
+            <a:ext cx="500000" cy="500000"/>
+          </a:xfrm>
+          <a:prstGeom prst="ellipse">
+            <a:avLst/>
+          </a:prstGeom>
+          <a:solidFill>
+            <a:srgbClr val="555555"/>
+          </a:solidFill>
+          <a:ln>
+            <a:noFill/>
+          </a:ln>
+        </p:spPr>
+        <p:style>
+          <a:lnRef idx="1">
+            <a:schemeClr val="accent1"/>
+          </a:lnRef>
+          <a:fillRef idx="3">
+            <a:schemeClr val="accent1"/>
+          </a:fillRef>
+          <a:effectRef idx="2">
+            <a:schemeClr val="accent1"/>
+          </a:effectRef>
+          <a:fontRef idx="minor">
+            <a:schemeClr val="lt1"/>
+          </a:fontRef>
+        </p:style>
+        <p:txBody>
+          <a:bodyPr rtlCol="0" anchor="ctr"/>
+          <a:lstStyle/>
+          <a:p>
+            <a:pPr algn="ctr"/>
+          </a:p>
+        </p:txBody>
+      </p:sp>
+      <p:sp>
+        <p:nvSpPr>
+          <p:cNvPr id="21" name="TextBox 20"/>
+          <p:cNvSpPr txBox="1"/>
+          <p:nvPr/>
+        </p:nvSpPr>
+        <p:spPr>
+          <a:xfrm>
+            <a:off x="700000" y="3500000"/>
+            <a:ext cx="500000" cy="500000"/>
+          </a:xfrm>
+          <a:prstGeom prst="rect">
+            <a:avLst/>
+          </a:prstGeom>
+          <a:noFill/>
+        </p:spPr>
+        <p:txBody>
+          <a:bodyPr wrap="square" anchor="ctr">
+            <a:spAutoFit/>
+          </a:bodyPr>
+          <a:lstStyle/>
+          <a:p>
+            <a:pPr algn="ctr"/>
+            <a:r>
+              <a:rPr sz="1300" b="1">
+                <a:solidFill>
+                  <a:srgbClr val="FFFFFF"/>
+                </a:solidFill>
+                <a:latin typeface="Open Sans"/>
+                <a:ea typeface="Open Sans"/>
+                <a:cs typeface="Open Sans"/>
+              </a:rPr>
+              <a:t>4</a:t>
+            </a:r>
+          </a:p>
+        </p:txBody>
+      </p:sp>
+      <p:sp>
+        <p:nvSpPr>
+          <p:cNvPr id="22" name="Rectangle 21"/>
+          <p:cNvSpPr/>
+          <p:nvPr/>
+        </p:nvSpPr>
+        <p:spPr>
+          <a:xfrm>
+            <a:off x="1400000" y="3500000"/>
+            <a:ext cx="10550000" cy="620000"/>
+          </a:xfrm>
+          <a:prstGeom prst="rect">
+            <a:avLst/>
+          </a:prstGeom>
+          <a:solidFill>
+            <a:srgbClr val="FFFFFF"/>
+          </a:solidFill>
+          <a:ln w="12700">
+            <a:solidFill>
+              <a:srgbClr val="999999"/>
+            </a:solidFill>
+          </a:ln>
+        </p:spPr>
+        <p:style>
+          <a:lnRef idx="1">
+            <a:schemeClr val="accent1"/>
+          </a:lnRef>
+          <a:fillRef idx="3">
+            <a:schemeClr val="accent1"/>
+          </a:fillRef>
+          <a:effectRef idx="2">
+            <a:schemeClr val="accent1"/>
+          </a:effectRef>
+          <a:fontRef idx="minor">
+            <a:schemeClr val="lt1"/>
+          </a:fontRef>
+        </p:style>
+        <p:txBody>
+          <a:bodyPr rtlCol="0" anchor="ctr"/>
+          <a:lstStyle/>
+          <a:p>
+            <a:pPr algn="ctr"/>
+          </a:p>
+        </p:txBody>
+      </p:sp>
+      <p:sp>
+        <p:nvSpPr>
+          <p:cNvPr id="23" name="TextBox 22"/>
+          <p:cNvSpPr txBox="1"/>
+          <p:nvPr/>
+        </p:nvSpPr>
+        <p:spPr>
+          <a:xfrm>
+            <a:off x="1600000" y="3500000"/>
+            <a:ext cx="10150000" cy="620000"/>
+          </a:xfrm>
+          <a:prstGeom prst="rect">
+            <a:avLst/>
+          </a:prstGeom>
+          <a:noFill/>
+        </p:spPr>
+        <p:txBody>
+          <a:bodyPr wrap="square" anchor="ctr">
+            <a:spAutoFit/>
+          </a:bodyPr>
+          <a:lstStyle/>
+          <a:p>
+            <a:pPr algn="l"/>
+            <a:r>
+              <a:rPr sz="1300" b="0">
+                <a:solidFill>
+                  <a:srgbClr val="333333"/>
+                </a:solidFill>
+                <a:latin typeface="Open Sans"/>
+                <a:ea typeface="Open Sans"/>
+                <a:cs typeface="Open Sans"/>
+              </a:rPr>
+              <a:t>Найдите и остановите массивное наружное кровотечение.</a:t>
+            </a:r>
+          </a:p>
+        </p:txBody>
+      </p:sp>
+      <p:sp>
+        <p:nvSpPr>
+          <p:cNvPr id="24" name="Oval 23"/>
+          <p:cNvSpPr/>
+          <p:nvPr/>
+        </p:nvSpPr>
+        <p:spPr>
+          <a:xfrm>
+            <a:off x="700000" y="4200000"/>
+            <a:ext cx="500000" cy="500000"/>
+          </a:xfrm>
+          <a:prstGeom prst="ellipse">
+            <a:avLst/>
+          </a:prstGeom>
+          <a:solidFill>
+            <a:srgbClr val="555555"/>
+          </a:solidFill>
+          <a:ln>
+            <a:noFill/>
+          </a:ln>
+        </p:spPr>
+        <p:style>
+          <a:lnRef idx="1">
+            <a:schemeClr val="accent1"/>
+          </a:lnRef>
+          <a:fillRef idx="3">
+            <a:schemeClr val="accent1"/>
+          </a:fillRef>
+          <a:effectRef idx="2">
+            <a:schemeClr val="accent1"/>
+          </a:effectRef>
+          <a:fontRef idx="minor">
+            <a:schemeClr val="lt1"/>
+          </a:fontRef>
+        </p:style>
+        <p:txBody>
+          <a:bodyPr rtlCol="0" anchor="ctr"/>
+          <a:lstStyle/>
+          <a:p>
+            <a:pPr algn="ctr"/>
+          </a:p>
+        </p:txBody>
+      </p:sp>
+      <p:sp>
+        <p:nvSpPr>
+          <p:cNvPr id="25" name="TextBox 24"/>
+          <p:cNvSpPr txBox="1"/>
+          <p:nvPr/>
+        </p:nvSpPr>
+        <p:spPr>
+          <a:xfrm>
+            <a:off x="700000" y="4200000"/>
+            <a:ext cx="500000" cy="500000"/>
+          </a:xfrm>
+          <a:prstGeom prst="rect">
+            <a:avLst/>
+          </a:prstGeom>
+          <a:noFill/>
+        </p:spPr>
+        <p:txBody>
+          <a:bodyPr wrap="square" anchor="ctr">
+            <a:spAutoFit/>
+          </a:bodyPr>
+          <a:lstStyle/>
+          <a:p>
+            <a:pPr algn="ctr"/>
+            <a:r>
+              <a:rPr sz="1300" b="1">
+                <a:solidFill>
+                  <a:srgbClr val="FFFFFF"/>
+                </a:solidFill>
+                <a:latin typeface="Open Sans"/>
+                <a:ea typeface="Open Sans"/>
+                <a:cs typeface="Open Sans"/>
+              </a:rPr>
+              <a:t>5</a:t>
+            </a:r>
+          </a:p>
+        </p:txBody>
+      </p:sp>
+      <p:sp>
+        <p:nvSpPr>
+          <p:cNvPr id="26" name="Rectangle 25"/>
+          <p:cNvSpPr/>
+          <p:nvPr/>
+        </p:nvSpPr>
+        <p:spPr>
+          <a:xfrm>
+            <a:off x="1400000" y="4200000"/>
+            <a:ext cx="10550000" cy="620000"/>
+          </a:xfrm>
+          <a:prstGeom prst="rect">
+            <a:avLst/>
+          </a:prstGeom>
+          <a:solidFill>
+            <a:srgbClr val="FFFFFF"/>
+          </a:solidFill>
+          <a:ln w="12700">
+            <a:solidFill>
+              <a:srgbClr val="999999"/>
+            </a:solidFill>
+          </a:ln>
+        </p:spPr>
+        <p:style>
+          <a:lnRef idx="1">
+            <a:schemeClr val="accent1"/>
+          </a:lnRef>
+          <a:fillRef idx="3">
+            <a:schemeClr val="accent1"/>
+          </a:fillRef>
+          <a:effectRef idx="2">
+            <a:schemeClr val="accent1"/>
+          </a:effectRef>
+          <a:fontRef idx="minor">
+            <a:schemeClr val="lt1"/>
+          </a:fontRef>
+        </p:style>
+        <p:txBody>
+          <a:bodyPr rtlCol="0" anchor="ctr"/>
+          <a:lstStyle/>
+          <a:p>
+            <a:pPr algn="ctr"/>
+          </a:p>
+        </p:txBody>
+      </p:sp>
+      <p:sp>
+        <p:nvSpPr>
+          <p:cNvPr id="27" name="TextBox 26"/>
+          <p:cNvSpPr txBox="1"/>
+          <p:nvPr/>
+        </p:nvSpPr>
+        <p:spPr>
+          <a:xfrm>
+            <a:off x="1600000" y="4200000"/>
+            <a:ext cx="10150000" cy="620000"/>
+          </a:xfrm>
+          <a:prstGeom prst="rect">
+            <a:avLst/>
+          </a:prstGeom>
+          <a:noFill/>
+        </p:spPr>
+        <p:txBody>
+          <a:bodyPr wrap="square" anchor="ctr">
+            <a:spAutoFit/>
+          </a:bodyPr>
+          <a:lstStyle/>
+          <a:p>
+            <a:pPr algn="l"/>
+            <a:r>
+              <a:rPr sz="1300" b="0">
+                <a:solidFill>
+                  <a:srgbClr val="333333"/>
+                </a:solidFill>
+                <a:latin typeface="Open Sans"/>
+                <a:ea typeface="Open Sans"/>
+                <a:cs typeface="Open Sans"/>
+              </a:rPr>
+              <a:t>Вызовите скорую медицинскую помощь самостоятельно или через помощника.</a:t>
+            </a:r>
+          </a:p>
+        </p:txBody>
+      </p:sp>
+      <p:sp>
+        <p:nvSpPr>
+          <p:cNvPr id="28" name="Oval 27"/>
+          <p:cNvSpPr/>
+          <p:nvPr/>
+        </p:nvSpPr>
+        <p:spPr>
+          <a:xfrm>
+            <a:off x="700000" y="4900000"/>
+            <a:ext cx="500000" cy="500000"/>
+          </a:xfrm>
+          <a:prstGeom prst="ellipse">
+            <a:avLst/>
+          </a:prstGeom>
+          <a:solidFill>
+            <a:srgbClr val="555555"/>
+          </a:solidFill>
+          <a:ln>
+            <a:noFill/>
+          </a:ln>
+        </p:spPr>
+        <p:style>
+          <a:lnRef idx="1">
+            <a:schemeClr val="accent1"/>
+          </a:lnRef>
+          <a:fillRef idx="3">
+            <a:schemeClr val="accent1"/>
+          </a:fillRef>
+          <a:effectRef idx="2">
+            <a:schemeClr val="accent1"/>
+          </a:effectRef>
+          <a:fontRef idx="minor">
+            <a:schemeClr val="lt1"/>
+          </a:fontRef>
+        </p:style>
+        <p:txBody>
+          <a:bodyPr rtlCol="0" anchor="ctr"/>
+          <a:lstStyle/>
+          <a:p>
+            <a:pPr algn="ctr"/>
+          </a:p>
+        </p:txBody>
+      </p:sp>
+      <p:sp>
+        <p:nvSpPr>
+          <p:cNvPr id="29" name="TextBox 28"/>
+          <p:cNvSpPr txBox="1"/>
+          <p:nvPr/>
+        </p:nvSpPr>
+        <p:spPr>
+          <a:xfrm>
+            <a:off x="700000" y="4900000"/>
+            <a:ext cx="500000" cy="500000"/>
+          </a:xfrm>
+          <a:prstGeom prst="rect">
+            <a:avLst/>
+          </a:prstGeom>
+          <a:noFill/>
+        </p:spPr>
+        <p:txBody>
+          <a:bodyPr wrap="square" anchor="ctr">
+            <a:spAutoFit/>
+          </a:bodyPr>
+          <a:lstStyle/>
+          <a:p>
+            <a:pPr algn="ctr"/>
+            <a:r>
+              <a:rPr sz="1300" b="1">
+                <a:solidFill>
+                  <a:srgbClr val="FFFFFF"/>
+                </a:solidFill>
+                <a:latin typeface="Open Sans"/>
+                <a:ea typeface="Open Sans"/>
+                <a:cs typeface="Open Sans"/>
+              </a:rPr>
+              <a:t>6</a:t>
+            </a:r>
+          </a:p>
+        </p:txBody>
+      </p:sp>
+      <p:sp>
+        <p:nvSpPr>
+          <p:cNvPr id="30" name="Rectangle 29"/>
+          <p:cNvSpPr/>
+          <p:nvPr/>
+        </p:nvSpPr>
+        <p:spPr>
+          <a:xfrm>
+            <a:off x="1400000" y="4900000"/>
+            <a:ext cx="10550000" cy="620000"/>
+          </a:xfrm>
+          <a:prstGeom prst="rect">
+            <a:avLst/>
+          </a:prstGeom>
+          <a:solidFill>
+            <a:srgbClr val="FFFFFF"/>
+          </a:solidFill>
+          <a:ln w="12700">
+            <a:solidFill>
+              <a:srgbClr val="999999"/>
+            </a:solidFill>
+          </a:ln>
+        </p:spPr>
+        <p:style>
+          <a:lnRef idx="1">
+            <a:schemeClr val="accent1"/>
+          </a:lnRef>
+          <a:fillRef idx="3">
+            <a:schemeClr val="accent1"/>
+          </a:fillRef>
+          <a:effectRef idx="2">
+            <a:schemeClr val="accent1"/>
+          </a:effectRef>
+          <a:fontRef idx="minor">
+            <a:schemeClr val="lt1"/>
+          </a:fontRef>
+        </p:style>
+        <p:txBody>
+          <a:bodyPr rtlCol="0" anchor="ctr"/>
+          <a:lstStyle/>
+          <a:p>
+            <a:pPr algn="ctr"/>
+          </a:p>
+        </p:txBody>
+      </p:sp>
+      <p:sp>
+        <p:nvSpPr>
+          <p:cNvPr id="31" name="TextBox 30"/>
+          <p:cNvSpPr txBox="1"/>
+          <p:nvPr/>
+        </p:nvSpPr>
+        <p:spPr>
+          <a:xfrm>
+            <a:off x="1600000" y="4900000"/>
+            <a:ext cx="10150000" cy="620000"/>
+          </a:xfrm>
+          <a:prstGeom prst="rect">
+            <a:avLst/>
+          </a:prstGeom>
+          <a:noFill/>
+        </p:spPr>
+        <p:txBody>
+          <a:bodyPr wrap="square" anchor="ctr">
+            <a:spAutoFit/>
+          </a:bodyPr>
+          <a:lstStyle/>
+          <a:p>
+            <a:pPr algn="l"/>
+            <a:r>
+              <a:rPr sz="1300" b="0">
+                <a:solidFill>
+                  <a:srgbClr val="333333"/>
+                </a:solidFill>
+                <a:latin typeface="Open Sans"/>
+                <a:ea typeface="Open Sans"/>
+                <a:cs typeface="Open Sans"/>
+              </a:rPr>
+              <a:t>Проведите подробный осмотр, окажите помощь и контролируйте состояние.</a:t>
+            </a:r>
+          </a:p>
+        </p:txBody>
+      </p:sp>
+      <p:sp>
+        <p:nvSpPr>
+          <p:cNvPr id="32" name="Rounded Rectangle 31"/>
+          <p:cNvSpPr/>
+          <p:nvPr/>
+        </p:nvSpPr>
+        <p:spPr>
+          <a:xfrm>
+            <a:off x="700000" y="5800000"/>
+            <a:ext cx="11000000" cy="900000"/>
+          </a:xfrm>
+          <a:prstGeom prst="roundRect">
+            <a:avLst/>
+          </a:prstGeom>
+          <a:solidFill>
+            <a:srgbClr val="F5F0E1"/>
+          </a:solidFill>
+          <a:ln>
+            <a:noFill/>
+          </a:ln>
+        </p:spPr>
+        <p:style>
+          <a:lnRef idx="1">
+            <a:schemeClr val="accent1"/>
+          </a:lnRef>
+          <a:fillRef idx="3">
+            <a:schemeClr val="accent1"/>
+          </a:fillRef>
+          <a:effectRef idx="2">
+            <a:schemeClr val="accent1"/>
+          </a:effectRef>
+          <a:fontRef idx="minor">
+            <a:schemeClr val="lt1"/>
+          </a:fontRef>
+        </p:style>
+        <p:txBody>
+          <a:bodyPr rtlCol="0" anchor="ctr"/>
+          <a:lstStyle/>
+          <a:p>
+            <a:pPr algn="ctr"/>
+          </a:p>
+        </p:txBody>
+      </p:sp>
+      <p:sp>
+        <p:nvSpPr>
+          <p:cNvPr id="33" name="TextBox 32"/>
+          <p:cNvSpPr txBox="1"/>
+          <p:nvPr/>
+        </p:nvSpPr>
+        <p:spPr>
+          <a:xfrm>
+            <a:off x="950000" y="6000000"/>
+            <a:ext cx="10500000" cy="500000"/>
+          </a:xfrm>
+          <a:prstGeom prst="rect">
+            <a:avLst/>
+          </a:prstGeom>
+          <a:noFill/>
+        </p:spPr>
+        <p:txBody>
+          <a:bodyPr wrap="square" anchor="ctr">
+            <a:spAutoFit/>
+          </a:bodyPr>
+          <a:lstStyle/>
+          <a:p>
+            <a:pPr algn="l"/>
+            <a:r>
+              <a:rPr sz="1200" b="0">
+                <a:solidFill>
+                  <a:srgbClr val="333333"/>
+                </a:solidFill>
+                <a:latin typeface="Open Sans"/>
+                <a:ea typeface="Open Sans"/>
+                <a:cs typeface="Open Sans"/>
+              </a:rPr>
+              <a:t>Новая угроза жизни всегда важнее продолжения подробного осмотра.</a:t>
             </a:r>
           </a:p>
         </p:txBody>
@@ -4984,7 +8939,7 @@
                 <a:ea typeface="Open Sans"/>
                 <a:cs typeface="Open Sans"/>
               </a:rPr>
-              <a:t>ТРАВМЫ И ТЕМПЕРАТУРНЫЕ ПОРАЖЕНИЯ</a:t>
+              <a:t>КАКИЕ СОСТОЯНИЯ МОЖНО ОБНАРУЖИТЬ</a:t>
             </a:r>
           </a:p>
         </p:txBody>
@@ -5157,8 +9112,8 @@
         </p:nvSpPr>
         <p:spPr>
           <a:xfrm>
-            <a:off x="700000" y="1450000"/>
-            <a:ext cx="5375000" cy="2300000"/>
+            <a:off x="700000" y="1400000"/>
+            <a:ext cx="5400000" cy="2420000"/>
           </a:xfrm>
           <a:prstGeom prst="rect">
             <a:avLst/>
@@ -5202,8 +9157,8 @@
         </p:nvSpPr>
         <p:spPr>
           <a:xfrm>
-            <a:off x="850000" y="1650000"/>
-            <a:ext cx="500000" cy="500000"/>
+            <a:off x="820000" y="1550000"/>
+            <a:ext cx="450000" cy="450000"/>
           </a:xfrm>
           <a:prstGeom prst="ellipse">
             <a:avLst/>
@@ -5245,8 +9200,8 @@
         </p:nvSpPr>
         <p:spPr>
           <a:xfrm>
-            <a:off x="850000" y="1650000"/>
-            <a:ext cx="500000" cy="500000"/>
+            <a:off x="820000" y="1550000"/>
+            <a:ext cx="450000" cy="450000"/>
           </a:xfrm>
           <a:prstGeom prst="rect">
             <a:avLst/>
@@ -5261,7 +9216,7 @@
           <a:p>
             <a:pPr algn="ctr"/>
             <a:r>
-              <a:rPr sz="1400" b="1">
+              <a:rPr sz="1300" b="1">
                 <a:solidFill>
                   <a:srgbClr val="FFFFFF"/>
                 </a:solidFill>
@@ -5282,8 +9237,8 @@
         </p:nvSpPr>
         <p:spPr>
           <a:xfrm>
-            <a:off x="1450000" y="1700000"/>
-            <a:ext cx="4475000" cy="450000"/>
+            <a:off x="1350000" y="1580000"/>
+            <a:ext cx="4600000" cy="400000"/>
           </a:xfrm>
           <a:prstGeom prst="rect">
             <a:avLst/>
@@ -5298,7 +9253,7 @@
           <a:p>
             <a:pPr algn="l"/>
             <a:r>
-              <a:rPr sz="1300" b="1">
+              <a:rPr sz="1200" b="1">
                 <a:solidFill>
                   <a:srgbClr val="333333"/>
                 </a:solidFill>
@@ -5306,7 +9261,7 @@
                 <a:ea typeface="Open Sans"/>
                 <a:cs typeface="Open Sans"/>
               </a:rPr>
-              <a:t>Травмы областей тела</a:t>
+              <a:t>Травмы</a:t>
             </a:r>
           </a:p>
         </p:txBody>
@@ -5319,8 +9274,8 @@
         </p:nvSpPr>
         <p:spPr>
           <a:xfrm>
-            <a:off x="850000" y="2300000"/>
-            <a:ext cx="5075000" cy="1300000"/>
+            <a:off x="820000" y="2100000"/>
+            <a:ext cx="5160000" cy="1570000"/>
           </a:xfrm>
           <a:prstGeom prst="rect">
             <a:avLst/>
@@ -5343,7 +9298,7 @@
                 <a:ea typeface="Open Sans"/>
                 <a:cs typeface="Open Sans"/>
               </a:rPr>
-              <a:t>Остановить кровотечение, закрыть рану, обеспечить покой и неподвижность.</a:t>
+              <a:t>Повреждения головы, шеи, груди, живота, таза, позвоночника и конечностей.</a:t>
             </a:r>
           </a:p>
         </p:txBody>
@@ -5356,8 +9311,8 @@
         </p:nvSpPr>
         <p:spPr>
           <a:xfrm>
-            <a:off x="6325000" y="1450000"/>
-            <a:ext cx="5375000" cy="2300000"/>
+            <a:off x="6300000" y="1400000"/>
+            <a:ext cx="5400000" cy="2420000"/>
           </a:xfrm>
           <a:prstGeom prst="rect">
             <a:avLst/>
@@ -5401,8 +9356,8 @@
         </p:nvSpPr>
         <p:spPr>
           <a:xfrm>
-            <a:off x="6475000" y="1650000"/>
-            <a:ext cx="500000" cy="500000"/>
+            <a:off x="6420000" y="1550000"/>
+            <a:ext cx="450000" cy="450000"/>
           </a:xfrm>
           <a:prstGeom prst="ellipse">
             <a:avLst/>
@@ -5444,8 +9399,8 @@
         </p:nvSpPr>
         <p:spPr>
           <a:xfrm>
-            <a:off x="6475000" y="1650000"/>
-            <a:ext cx="500000" cy="500000"/>
+            <a:off x="6420000" y="1550000"/>
+            <a:ext cx="450000" cy="450000"/>
           </a:xfrm>
           <a:prstGeom prst="rect">
             <a:avLst/>
@@ -5460,7 +9415,7 @@
           <a:p>
             <a:pPr algn="ctr"/>
             <a:r>
-              <a:rPr sz="1400" b="1">
+              <a:rPr sz="1300" b="1">
                 <a:solidFill>
                   <a:srgbClr val="FFFFFF"/>
                 </a:solidFill>
@@ -5481,8 +9436,8 @@
         </p:nvSpPr>
         <p:spPr>
           <a:xfrm>
-            <a:off x="7075000" y="1700000"/>
-            <a:ext cx="4475000" cy="450000"/>
+            <a:off x="6950000" y="1580000"/>
+            <a:ext cx="4600000" cy="400000"/>
           </a:xfrm>
           <a:prstGeom prst="rect">
             <a:avLst/>
@@ -5497,7 +9452,7 @@
           <a:p>
             <a:pPr algn="l"/>
             <a:r>
-              <a:rPr sz="1300" b="1">
+              <a:rPr sz="1200" b="1">
                 <a:solidFill>
                   <a:srgbClr val="333333"/>
                 </a:solidFill>
@@ -5505,7 +9460,7 @@
                 <a:ea typeface="Open Sans"/>
                 <a:cs typeface="Open Sans"/>
               </a:rPr>
-              <a:t>Ожоги и перегревание</a:t>
+              <a:t>Поражения</a:t>
             </a:r>
           </a:p>
         </p:txBody>
@@ -5518,8 +9473,8 @@
         </p:nvSpPr>
         <p:spPr>
           <a:xfrm>
-            <a:off x="6475000" y="2300000"/>
-            <a:ext cx="5075000" cy="1300000"/>
+            <a:off x="6420000" y="2100000"/>
+            <a:ext cx="5160000" cy="1570000"/>
           </a:xfrm>
           <a:prstGeom prst="rect">
             <a:avLst/>
@@ -5542,7 +9497,7 @@
                 <a:ea typeface="Open Sans"/>
                 <a:cs typeface="Open Sans"/>
               </a:rPr>
-              <a:t>Прекратить действие тепла, охлаждать ожог, переместить пострадавшего в прохладу.</a:t>
+              <a:t>Ожоги, перегревание, отморожение, переохлаждение, действие химических веществ и тока.</a:t>
             </a:r>
           </a:p>
         </p:txBody>
@@ -5555,8 +9510,8 @@
         </p:nvSpPr>
         <p:spPr>
           <a:xfrm>
-            <a:off x="700000" y="3950000"/>
-            <a:ext cx="5375000" cy="2300000"/>
+            <a:off x="700000" y="3980000"/>
+            <a:ext cx="5400000" cy="2420000"/>
           </a:xfrm>
           <a:prstGeom prst="rect">
             <a:avLst/>
@@ -5600,8 +9555,8 @@
         </p:nvSpPr>
         <p:spPr>
           <a:xfrm>
-            <a:off x="850000" y="4150000"/>
-            <a:ext cx="500000" cy="500000"/>
+            <a:off x="820000" y="4130000"/>
+            <a:ext cx="450000" cy="450000"/>
           </a:xfrm>
           <a:prstGeom prst="ellipse">
             <a:avLst/>
@@ -5643,8 +9598,8 @@
         </p:nvSpPr>
         <p:spPr>
           <a:xfrm>
-            <a:off x="850000" y="4150000"/>
-            <a:ext cx="500000" cy="500000"/>
+            <a:off x="820000" y="4130000"/>
+            <a:ext cx="450000" cy="450000"/>
           </a:xfrm>
           <a:prstGeom prst="rect">
             <a:avLst/>
@@ -5659,7 +9614,7 @@
           <a:p>
             <a:pPr algn="ctr"/>
             <a:r>
-              <a:rPr sz="1400" b="1">
+              <a:rPr sz="1300" b="1">
                 <a:solidFill>
                   <a:srgbClr val="FFFFFF"/>
                 </a:solidFill>
@@ -5680,8 +9635,8 @@
         </p:nvSpPr>
         <p:spPr>
           <a:xfrm>
-            <a:off x="1450000" y="4200000"/>
-            <a:ext cx="4475000" cy="450000"/>
+            <a:off x="1350000" y="4160000"/>
+            <a:ext cx="4600000" cy="400000"/>
           </a:xfrm>
           <a:prstGeom prst="rect">
             <a:avLst/>
@@ -5696,7 +9651,7 @@
           <a:p>
             <a:pPr algn="l"/>
             <a:r>
-              <a:rPr sz="1300" b="1">
+              <a:rPr sz="1200" b="1">
                 <a:solidFill>
                   <a:srgbClr val="333333"/>
                 </a:solidFill>
@@ -5704,7 +9659,7 @@
                 <a:ea typeface="Open Sans"/>
                 <a:cs typeface="Open Sans"/>
               </a:rPr>
-              <a:t>Отморожение</a:t>
+              <a:t>Отравления</a:t>
             </a:r>
           </a:p>
         </p:txBody>
@@ -5717,8 +9672,8 @@
         </p:nvSpPr>
         <p:spPr>
           <a:xfrm>
-            <a:off x="850000" y="4800000"/>
-            <a:ext cx="5075000" cy="1300000"/>
+            <a:off x="820000" y="4680000"/>
+            <a:ext cx="5160000" cy="1570000"/>
           </a:xfrm>
           <a:prstGeom prst="rect">
             <a:avLst/>
@@ -5741,7 +9696,7 @@
                 <a:ea typeface="Open Sans"/>
                 <a:cs typeface="Open Sans"/>
               </a:rPr>
-              <a:t>Укрыть поврежденный участок теплоизолирующей повязкой, не растирать.</a:t>
+              <a:t>Поступление яда через рот, дыхательные пути, кожу, при укусе или введении.</a:t>
             </a:r>
           </a:p>
         </p:txBody>
@@ -5754,8 +9709,8 @@
         </p:nvSpPr>
         <p:spPr>
           <a:xfrm>
-            <a:off x="6325000" y="3950000"/>
-            <a:ext cx="5375000" cy="2300000"/>
+            <a:off x="6300000" y="3980000"/>
+            <a:ext cx="5400000" cy="2420000"/>
           </a:xfrm>
           <a:prstGeom prst="rect">
             <a:avLst/>
@@ -5799,8 +9754,8 @@
         </p:nvSpPr>
         <p:spPr>
           <a:xfrm>
-            <a:off x="6475000" y="4150000"/>
-            <a:ext cx="500000" cy="500000"/>
+            <a:off x="6420000" y="4130000"/>
+            <a:ext cx="450000" cy="450000"/>
           </a:xfrm>
           <a:prstGeom prst="ellipse">
             <a:avLst/>
@@ -5842,8 +9797,8 @@
         </p:nvSpPr>
         <p:spPr>
           <a:xfrm>
-            <a:off x="6475000" y="4150000"/>
-            <a:ext cx="500000" cy="500000"/>
+            <a:off x="6420000" y="4130000"/>
+            <a:ext cx="450000" cy="450000"/>
           </a:xfrm>
           <a:prstGeom prst="rect">
             <a:avLst/>
@@ -5858,7 +9813,7 @@
           <a:p>
             <a:pPr algn="ctr"/>
             <a:r>
-              <a:rPr sz="1400" b="1">
+              <a:rPr sz="1300" b="1">
                 <a:solidFill>
                   <a:srgbClr val="FFFFFF"/>
                 </a:solidFill>
@@ -5879,8 +9834,8 @@
         </p:nvSpPr>
         <p:spPr>
           <a:xfrm>
-            <a:off x="7075000" y="4200000"/>
-            <a:ext cx="4475000" cy="450000"/>
+            <a:off x="6950000" y="4160000"/>
+            <a:ext cx="4600000" cy="400000"/>
           </a:xfrm>
           <a:prstGeom prst="rect">
             <a:avLst/>
@@ -5895,7 +9850,7 @@
           <a:p>
             <a:pPr algn="l"/>
             <a:r>
-              <a:rPr sz="1300" b="1">
+              <a:rPr sz="1200" b="1">
                 <a:solidFill>
                   <a:srgbClr val="333333"/>
                 </a:solidFill>
@@ -5903,7 +9858,7 @@
                 <a:ea typeface="Open Sans"/>
                 <a:cs typeface="Open Sans"/>
               </a:rPr>
-              <a:t>Переохлаждение</a:t>
+              <a:t>Прочие состояния</a:t>
             </a:r>
           </a:p>
         </p:txBody>
@@ -5916,8 +9871,8 @@
         </p:nvSpPr>
         <p:spPr>
           <a:xfrm>
-            <a:off x="6475000" y="4800000"/>
-            <a:ext cx="5075000" cy="1300000"/>
+            <a:off x="6420000" y="4680000"/>
+            <a:ext cx="5160000" cy="1570000"/>
           </a:xfrm>
           <a:prstGeom prst="rect">
             <a:avLst/>
@@ -5940,7 +9895,7 @@
                 <a:ea typeface="Open Sans"/>
                 <a:cs typeface="Open Sans"/>
               </a:rPr>
-              <a:t>Защитить от холода, постепенно согревать, дать теплое питье при сохраненном сознании.</a:t>
+              <a:t>Судорожный приступ, острая реакция на стресс и необходимость помочь с лекарством.</a:t>
             </a:r>
           </a:p>
         </p:txBody>
@@ -6038,7 +9993,7 @@
                 <a:ea typeface="Open Sans"/>
                 <a:cs typeface="Open Sans"/>
               </a:rPr>
-              <a:t>ВЕЩЕСТВА, ЖИВОТНЫЕ И НАСЕКОМЫЕ</a:t>
+              <a:t>ТРАВМЫ ГОЛОВЫ, ШЕИ И ПОЗВОНОЧНИКА</a:t>
             </a:r>
           </a:p>
         </p:txBody>
@@ -6205,139 +10160,14 @@
       </p:sp>
       <p:sp>
         <p:nvSpPr>
-          <p:cNvPr id="8" name="Rectangle 7"/>
-          <p:cNvSpPr/>
-          <p:nvPr/>
-        </p:nvSpPr>
-        <p:spPr>
-          <a:xfrm>
-            <a:off x="700000" y="1450000"/>
-            <a:ext cx="5375000" cy="4800000"/>
-          </a:xfrm>
-          <a:prstGeom prst="rect">
-            <a:avLst/>
-          </a:prstGeom>
-          <a:solidFill>
-            <a:srgbClr val="FFFFFF"/>
-          </a:solidFill>
-          <a:ln w="12700">
-            <a:solidFill>
-              <a:srgbClr val="999999"/>
-            </a:solidFill>
-          </a:ln>
-        </p:spPr>
-        <p:style>
-          <a:lnRef idx="1">
-            <a:schemeClr val="accent1"/>
-          </a:lnRef>
-          <a:fillRef idx="3">
-            <a:schemeClr val="accent1"/>
-          </a:fillRef>
-          <a:effectRef idx="2">
-            <a:schemeClr val="accent1"/>
-          </a:effectRef>
-          <a:fontRef idx="minor">
-            <a:schemeClr val="lt1"/>
-          </a:fontRef>
-        </p:style>
-        <p:txBody>
-          <a:bodyPr rtlCol="0" anchor="ctr"/>
-          <a:lstStyle/>
-          <a:p>
-            <a:pPr algn="ctr"/>
-          </a:p>
-        </p:txBody>
-      </p:sp>
-      <p:sp>
-        <p:nvSpPr>
-          <p:cNvPr id="9" name="Oval 8"/>
-          <p:cNvSpPr/>
-          <p:nvPr/>
-        </p:nvSpPr>
-        <p:spPr>
-          <a:xfrm>
-            <a:off x="850000" y="1650000"/>
-            <a:ext cx="500000" cy="500000"/>
-          </a:xfrm>
-          <a:prstGeom prst="ellipse">
-            <a:avLst/>
-          </a:prstGeom>
-          <a:solidFill>
-            <a:srgbClr val="555555"/>
-          </a:solidFill>
-          <a:ln>
-            <a:noFill/>
-          </a:ln>
-        </p:spPr>
-        <p:style>
-          <a:lnRef idx="1">
-            <a:schemeClr val="accent1"/>
-          </a:lnRef>
-          <a:fillRef idx="3">
-            <a:schemeClr val="accent1"/>
-          </a:fillRef>
-          <a:effectRef idx="2">
-            <a:schemeClr val="accent1"/>
-          </a:effectRef>
-          <a:fontRef idx="minor">
-            <a:schemeClr val="lt1"/>
-          </a:fontRef>
-        </p:style>
-        <p:txBody>
-          <a:bodyPr rtlCol="0" anchor="ctr"/>
-          <a:lstStyle/>
-          <a:p>
-            <a:pPr algn="ctr"/>
-          </a:p>
-        </p:txBody>
-      </p:sp>
-      <p:sp>
-        <p:nvSpPr>
-          <p:cNvPr id="10" name="TextBox 9"/>
+          <p:cNvPr id="8" name="TextBox 7"/>
           <p:cNvSpPr txBox="1"/>
           <p:nvPr/>
         </p:nvSpPr>
         <p:spPr>
           <a:xfrm>
-            <a:off x="850000" y="1650000"/>
-            <a:ext cx="500000" cy="500000"/>
-          </a:xfrm>
-          <a:prstGeom prst="rect">
-            <a:avLst/>
-          </a:prstGeom>
-          <a:noFill/>
-        </p:spPr>
-        <p:txBody>
-          <a:bodyPr wrap="square" anchor="ctr">
-            <a:spAutoFit/>
-          </a:bodyPr>
-          <a:lstStyle/>
-          <a:p>
-            <a:pPr algn="ctr"/>
-            <a:r>
-              <a:rPr sz="1400" b="1">
-                <a:solidFill>
-                  <a:srgbClr val="FFFFFF"/>
-                </a:solidFill>
-                <a:latin typeface="Open Sans"/>
-                <a:ea typeface="Open Sans"/>
-                <a:cs typeface="Open Sans"/>
-              </a:rPr>
-              <a:t>1</a:t>
-            </a:r>
-          </a:p>
-        </p:txBody>
-      </p:sp>
-      <p:sp>
-        <p:nvSpPr>
-          <p:cNvPr id="11" name="TextBox 10"/>
-          <p:cNvSpPr txBox="1"/>
-          <p:nvPr/>
-        </p:nvSpPr>
-        <p:spPr>
-          <a:xfrm>
-            <a:off x="1450000" y="1700000"/>
-            <a:ext cx="4475000" cy="450000"/>
+            <a:off x="700000" y="1400000"/>
+            <a:ext cx="5400000" cy="400000"/>
           </a:xfrm>
           <a:prstGeom prst="rect">
             <a:avLst/>
@@ -6352,7 +10182,7 @@
           <a:p>
             <a:pPr algn="l"/>
             <a:r>
-              <a:rPr sz="1300" b="1">
+              <a:rPr sz="1400" b="1">
                 <a:solidFill>
                   <a:srgbClr val="333333"/>
                 </a:solidFill>
@@ -6360,21 +10190,21 @@
                 <a:ea typeface="Open Sans"/>
                 <a:cs typeface="Open Sans"/>
               </a:rPr>
-              <a:t>Отравления</a:t>
-            </a:r>
-          </a:p>
-        </p:txBody>
-      </p:sp>
-      <p:sp>
-        <p:nvSpPr>
-          <p:cNvPr id="12" name="TextBox 11"/>
+              <a:t>Что делает помощник</a:t>
+            </a:r>
+          </a:p>
+        </p:txBody>
+      </p:sp>
+      <p:sp>
+        <p:nvSpPr>
+          <p:cNvPr id="9" name="TextBox 8"/>
           <p:cNvSpPr txBox="1"/>
           <p:nvPr/>
         </p:nvSpPr>
         <p:spPr>
           <a:xfrm>
-            <a:off x="850000" y="2300000"/>
-            <a:ext cx="5075000" cy="3800000"/>
+            <a:off x="6600000" y="1400000"/>
+            <a:ext cx="5400000" cy="400000"/>
           </a:xfrm>
           <a:prstGeom prst="rect">
             <a:avLst/>
@@ -6389,117 +10219,29 @@
           <a:p>
             <a:pPr algn="l"/>
             <a:r>
-              <a:rPr sz="1200" b="0">
-                <a:solidFill>
-                  <a:srgbClr val="666666"/>
-                </a:solidFill>
-                <a:latin typeface="Open Sans"/>
-                <a:ea typeface="Open Sans"/>
-                <a:cs typeface="Open Sans"/>
-              </a:rPr>
-              <a:t>Прекратить поступление яда, выяснить вещество, путь, количество и время воздействия.</a:t>
-            </a:r>
-          </a:p>
-        </p:txBody>
-      </p:sp>
-      <p:sp>
-        <p:nvSpPr>
-          <p:cNvPr id="13" name="Rectangle 12"/>
-          <p:cNvSpPr/>
-          <p:nvPr/>
-        </p:nvSpPr>
-        <p:spPr>
-          <a:xfrm>
-            <a:off x="6325000" y="1450000"/>
-            <a:ext cx="5375000" cy="4800000"/>
-          </a:xfrm>
-          <a:prstGeom prst="rect">
-            <a:avLst/>
-          </a:prstGeom>
-          <a:solidFill>
-            <a:srgbClr val="FFFFFF"/>
-          </a:solidFill>
-          <a:ln w="12700">
-            <a:solidFill>
-              <a:srgbClr val="999999"/>
-            </a:solidFill>
-          </a:ln>
-        </p:spPr>
-        <p:style>
-          <a:lnRef idx="1">
-            <a:schemeClr val="accent1"/>
-          </a:lnRef>
-          <a:fillRef idx="3">
-            <a:schemeClr val="accent1"/>
-          </a:fillRef>
-          <a:effectRef idx="2">
-            <a:schemeClr val="accent1"/>
-          </a:effectRef>
-          <a:fontRef idx="minor">
-            <a:schemeClr val="lt1"/>
-          </a:fontRef>
-        </p:style>
-        <p:txBody>
-          <a:bodyPr rtlCol="0" anchor="ctr"/>
-          <a:lstStyle/>
-          <a:p>
-            <a:pPr algn="ctr"/>
-          </a:p>
-        </p:txBody>
-      </p:sp>
-      <p:sp>
-        <p:nvSpPr>
-          <p:cNvPr id="14" name="Oval 13"/>
-          <p:cNvSpPr/>
-          <p:nvPr/>
-        </p:nvSpPr>
-        <p:spPr>
-          <a:xfrm>
-            <a:off x="6475000" y="1650000"/>
-            <a:ext cx="500000" cy="500000"/>
-          </a:xfrm>
-          <a:prstGeom prst="ellipse">
-            <a:avLst/>
-          </a:prstGeom>
-          <a:solidFill>
-            <a:srgbClr val="555555"/>
-          </a:solidFill>
-          <a:ln>
-            <a:noFill/>
-          </a:ln>
-        </p:spPr>
-        <p:style>
-          <a:lnRef idx="1">
-            <a:schemeClr val="accent1"/>
-          </a:lnRef>
-          <a:fillRef idx="3">
-            <a:schemeClr val="accent1"/>
-          </a:fillRef>
-          <a:effectRef idx="2">
-            <a:schemeClr val="accent1"/>
-          </a:effectRef>
-          <a:fontRef idx="minor">
-            <a:schemeClr val="lt1"/>
-          </a:fontRef>
-        </p:style>
-        <p:txBody>
-          <a:bodyPr rtlCol="0" anchor="ctr"/>
-          <a:lstStyle/>
-          <a:p>
-            <a:pPr algn="ctr"/>
-          </a:p>
-        </p:txBody>
-      </p:sp>
-      <p:sp>
-        <p:nvSpPr>
-          <p:cNvPr id="15" name="TextBox 14"/>
+              <a:rPr sz="1400" b="1">
+                <a:solidFill>
+                  <a:srgbClr val="333333"/>
+                </a:solidFill>
+                <a:latin typeface="Open Sans"/>
+                <a:ea typeface="Open Sans"/>
+                <a:cs typeface="Open Sans"/>
+              </a:rPr>
+              <a:t>Чего избегает</a:t>
+            </a:r>
+          </a:p>
+        </p:txBody>
+      </p:sp>
+      <p:sp>
+        <p:nvSpPr>
+          <p:cNvPr id="10" name="TextBox 9"/>
           <p:cNvSpPr txBox="1"/>
           <p:nvPr/>
         </p:nvSpPr>
         <p:spPr>
           <a:xfrm>
-            <a:off x="6475000" y="1650000"/>
-            <a:ext cx="500000" cy="500000"/>
+            <a:off x="700000" y="1850000"/>
+            <a:ext cx="5400000" cy="4000000"/>
           </a:xfrm>
           <a:prstGeom prst="rect">
             <a:avLst/>
@@ -6507,36 +10249,94 @@
           <a:noFill/>
         </p:spPr>
         <p:txBody>
-          <a:bodyPr wrap="square" anchor="ctr">
+          <a:bodyPr wrap="square">
             <a:spAutoFit/>
           </a:bodyPr>
           <a:lstStyle/>
           <a:p>
-            <a:pPr algn="ctr"/>
-            <a:r>
-              <a:rPr sz="1400" b="1">
-                <a:solidFill>
-                  <a:srgbClr val="FFFFFF"/>
-                </a:solidFill>
-                <a:latin typeface="Open Sans"/>
-                <a:ea typeface="Open Sans"/>
-                <a:cs typeface="Open Sans"/>
-              </a:rPr>
-              <a:t>2</a:t>
-            </a:r>
-          </a:p>
-        </p:txBody>
-      </p:sp>
-      <p:sp>
-        <p:nvSpPr>
-          <p:cNvPr id="16" name="TextBox 15"/>
+            <a:pPr algn="l">
+              <a:spcAft>
+                <a:spcPts val="800"/>
+              </a:spcAft>
+            </a:pPr>
+            <a:r>
+              <a:rPr sz="1300" b="0">
+                <a:solidFill>
+                  <a:srgbClr val="333333"/>
+                </a:solidFill>
+                <a:latin typeface="Open Sans"/>
+                <a:ea typeface="Open Sans"/>
+                <a:cs typeface="Open Sans"/>
+              </a:rPr>
+              <a:t>•  останавливает наружное кровотечение и закрывает раны</a:t>
+            </a:r>
+          </a:p>
+          <a:p>
+            <a:pPr algn="l">
+              <a:spcAft>
+                <a:spcPts val="800"/>
+              </a:spcAft>
+            </a:pPr>
+            <a:r>
+              <a:rPr sz="1300" b="0">
+                <a:solidFill>
+                  <a:srgbClr val="333333"/>
+                </a:solidFill>
+                <a:latin typeface="Open Sans"/>
+                <a:ea typeface="Open Sans"/>
+                <a:cs typeface="Open Sans"/>
+              </a:rPr>
+              <a:t>•  контролирует сознание и дыхание при признаках травмы головы</a:t>
+            </a:r>
+          </a:p>
+          <a:p>
+            <a:pPr algn="l">
+              <a:spcAft>
+                <a:spcPts val="800"/>
+              </a:spcAft>
+            </a:pPr>
+            <a:r>
+              <a:rPr sz="1300" b="0">
+                <a:solidFill>
+                  <a:srgbClr val="333333"/>
+                </a:solidFill>
+                <a:latin typeface="Open Sans"/>
+                <a:ea typeface="Open Sans"/>
+                <a:cs typeface="Open Sans"/>
+              </a:rPr>
+              <a:t>•  не давит на поврежденный глаз и закрывает повязкой оба глаза</a:t>
+            </a:r>
+          </a:p>
+          <a:p>
+            <a:pPr algn="l">
+              <a:spcAft>
+                <a:spcPts val="800"/>
+              </a:spcAft>
+            </a:pPr>
+            <a:r>
+              <a:rPr sz="1300" b="0">
+                <a:solidFill>
+                  <a:srgbClr val="333333"/>
+                </a:solidFill>
+                <a:latin typeface="Open Sans"/>
+                <a:ea typeface="Open Sans"/>
+                <a:cs typeface="Open Sans"/>
+              </a:rPr>
+              <a:t>•  удерживает голову при подозрении на травму шеи</a:t>
+            </a:r>
+          </a:p>
+        </p:txBody>
+      </p:sp>
+      <p:sp>
+        <p:nvSpPr>
+          <p:cNvPr id="11" name="TextBox 10"/>
           <p:cNvSpPr txBox="1"/>
           <p:nvPr/>
         </p:nvSpPr>
         <p:spPr>
           <a:xfrm>
-            <a:off x="7075000" y="1700000"/>
-            <a:ext cx="4475000" cy="450000"/>
+            <a:off x="6600000" y="1850000"/>
+            <a:ext cx="5400000" cy="4000000"/>
           </a:xfrm>
           <a:prstGeom prst="rect">
             <a:avLst/>
@@ -6544,14 +10344,18 @@
           <a:noFill/>
         </p:spPr>
         <p:txBody>
-          <a:bodyPr wrap="square" anchor="t">
+          <a:bodyPr wrap="square">
             <a:spAutoFit/>
           </a:bodyPr>
           <a:lstStyle/>
           <a:p>
-            <a:pPr algn="l"/>
-            <a:r>
-              <a:rPr sz="1300" b="1">
+            <a:pPr algn="l">
+              <a:spcAft>
+                <a:spcPts val="800"/>
+              </a:spcAft>
+            </a:pPr>
+            <a:r>
+              <a:rPr sz="1300" b="0">
                 <a:solidFill>
                   <a:srgbClr val="333333"/>
                 </a:solidFill>
@@ -6559,44 +10363,61 @@
                 <a:ea typeface="Open Sans"/>
                 <a:cs typeface="Open Sans"/>
               </a:rPr>
-              <a:t>Укусы и ужаливания</a:t>
-            </a:r>
-          </a:p>
-        </p:txBody>
-      </p:sp>
-      <p:sp>
-        <p:nvSpPr>
-          <p:cNvPr id="17" name="TextBox 16"/>
-          <p:cNvSpPr txBox="1"/>
-          <p:nvPr/>
-        </p:nvSpPr>
-        <p:spPr>
-          <a:xfrm>
-            <a:off x="6475000" y="2300000"/>
-            <a:ext cx="5075000" cy="3800000"/>
-          </a:xfrm>
-          <a:prstGeom prst="rect">
-            <a:avLst/>
-          </a:prstGeom>
-          <a:noFill/>
-        </p:spPr>
-        <p:txBody>
-          <a:bodyPr wrap="square" anchor="t">
-            <a:spAutoFit/>
-          </a:bodyPr>
-          <a:lstStyle/>
-          <a:p>
-            <a:pPr algn="l"/>
-            <a:r>
-              <a:rPr sz="1200" b="0">
-                <a:solidFill>
-                  <a:srgbClr val="666666"/>
-                </a:solidFill>
-                <a:latin typeface="Open Sans"/>
-                <a:ea typeface="Open Sans"/>
-                <a:cs typeface="Open Sans"/>
-              </a:rPr>
-              <a:t>Обеспечить безопасность, приложить холод, ограничить движение укушенной части.</a:t>
+              <a:t>•  не извлекает инородные тела и костные отломки</a:t>
+            </a:r>
+          </a:p>
+          <a:p>
+            <a:pPr algn="l">
+              <a:spcAft>
+                <a:spcPts val="800"/>
+              </a:spcAft>
+            </a:pPr>
+            <a:r>
+              <a:rPr sz="1300" b="0">
+                <a:solidFill>
+                  <a:srgbClr val="333333"/>
+                </a:solidFill>
+                <a:latin typeface="Open Sans"/>
+                <a:ea typeface="Open Sans"/>
+                <a:cs typeface="Open Sans"/>
+              </a:rPr>
+              <a:t>•  не поворачивает и не запрокидывает голову без необходимости</a:t>
+            </a:r>
+          </a:p>
+          <a:p>
+            <a:pPr algn="l">
+              <a:spcAft>
+                <a:spcPts val="800"/>
+              </a:spcAft>
+            </a:pPr>
+            <a:r>
+              <a:rPr sz="1300" b="0">
+                <a:solidFill>
+                  <a:srgbClr val="333333"/>
+                </a:solidFill>
+                <a:latin typeface="Open Sans"/>
+                <a:ea typeface="Open Sans"/>
+                <a:cs typeface="Open Sans"/>
+              </a:rPr>
+              <a:t>•  не сгибает и не скручивает позвоночник</a:t>
+            </a:r>
+          </a:p>
+          <a:p>
+            <a:pPr algn="l">
+              <a:spcAft>
+                <a:spcPts val="800"/>
+              </a:spcAft>
+            </a:pPr>
+            <a:r>
+              <a:rPr sz="1300" b="0">
+                <a:solidFill>
+                  <a:srgbClr val="333333"/>
+                </a:solidFill>
+                <a:latin typeface="Open Sans"/>
+                <a:ea typeface="Open Sans"/>
+                <a:cs typeface="Open Sans"/>
+              </a:rPr>
+              <a:t>•  не перемещает пострадавшего, если место безопасно</a:t>
             </a:r>
           </a:p>
         </p:txBody>
@@ -6694,7 +10515,7 @@
                 <a:ea typeface="Open Sans"/>
                 <a:cs typeface="Open Sans"/>
               </a:rPr>
-              <a:t>СУДОРОГИ И ОСТРЫЕ РЕАКЦИИ НА СТРЕСС</a:t>
+              <a:t>ТРАВМЫ ГРУДИ, ЖИВОТА И ТАЗА</a:t>
             </a:r>
           </a:p>
         </p:txBody>
@@ -6867,7 +10688,7 @@
         </p:nvSpPr>
         <p:spPr>
           <a:xfrm>
-            <a:off x="700000" y="1450000"/>
+            <a:off x="700000" y="1400000"/>
             <a:ext cx="5400000" cy="400000"/>
           </a:xfrm>
           <a:prstGeom prst="rect">
@@ -6891,7 +10712,7 @@
                 <a:ea typeface="Open Sans"/>
                 <a:cs typeface="Open Sans"/>
               </a:rPr>
-              <a:t>Судорожный приступ</a:t>
+              <a:t>Грудь</a:t>
             </a:r>
           </a:p>
         </p:txBody>
@@ -6904,7 +10725,7 @@
         </p:nvSpPr>
         <p:spPr>
           <a:xfrm>
-            <a:off x="6600000" y="1450000"/>
+            <a:off x="6600000" y="1400000"/>
             <a:ext cx="5400000" cy="400000"/>
           </a:xfrm>
           <a:prstGeom prst="rect">
@@ -6928,7 +10749,7 @@
                 <a:ea typeface="Open Sans"/>
                 <a:cs typeface="Open Sans"/>
               </a:rPr>
-              <a:t>Реакция на стресс</a:t>
+              <a:t>Живот и таз</a:t>
             </a:r>
           </a:p>
         </p:txBody>
@@ -6941,7 +10762,7 @@
         </p:nvSpPr>
         <p:spPr>
           <a:xfrm>
-            <a:off x="700000" y="1950000"/>
+            <a:off x="700000" y="1850000"/>
             <a:ext cx="5400000" cy="4000000"/>
           </a:xfrm>
           <a:prstGeom prst="rect">
@@ -6969,7 +10790,7 @@
                 <a:ea typeface="Open Sans"/>
                 <a:cs typeface="Open Sans"/>
               </a:rPr>
-              <a:t>•  уберите опасные предметы</a:t>
+              <a:t>•  открытую рану закрывает герметизирующей повязкой с фиксацией по трем сторонам</a:t>
             </a:r>
           </a:p>
           <a:p>
@@ -6987,7 +10808,7 @@
                 <a:ea typeface="Open Sans"/>
                 <a:cs typeface="Open Sans"/>
               </a:rPr>
-              <a:t>•  не удерживайте силой</a:t>
+              <a:t>•  при травме ребер помогает занять полусидячее положение</a:t>
             </a:r>
           </a:p>
           <a:p>
@@ -7005,9 +10826,32 @@
                 <a:ea typeface="Open Sans"/>
                 <a:cs typeface="Open Sans"/>
               </a:rPr>
-              <a:t>•  после приступа проверьте дыхание и травмы</a:t>
-            </a:r>
-          </a:p>
+              <a:t>•  следит за нарастанием одышки и изменением цвета кожи</a:t>
+            </a:r>
+          </a:p>
+        </p:txBody>
+      </p:sp>
+      <p:sp>
+        <p:nvSpPr>
+          <p:cNvPr id="11" name="TextBox 10"/>
+          <p:cNvSpPr txBox="1"/>
+          <p:nvPr/>
+        </p:nvSpPr>
+        <p:spPr>
+          <a:xfrm>
+            <a:off x="6600000" y="1850000"/>
+            <a:ext cx="5400000" cy="4000000"/>
+          </a:xfrm>
+          <a:prstGeom prst="rect">
+            <a:avLst/>
+          </a:prstGeom>
+          <a:noFill/>
+        </p:spPr>
+        <p:txBody>
+          <a:bodyPr wrap="square">
+            <a:spAutoFit/>
+          </a:bodyPr>
+          <a:lstStyle/>
           <a:p>
             <a:pPr algn="l">
               <a:spcAft>
@@ -7023,32 +10867,9 @@
                 <a:ea typeface="Open Sans"/>
                 <a:cs typeface="Open Sans"/>
               </a:rPr>
-              <a:t>•  при дыхании уложите на бок</a:t>
-            </a:r>
-          </a:p>
-        </p:txBody>
-      </p:sp>
-      <p:sp>
-        <p:nvSpPr>
-          <p:cNvPr id="11" name="TextBox 10"/>
-          <p:cNvSpPr txBox="1"/>
-          <p:nvPr/>
-        </p:nvSpPr>
-        <p:spPr>
-          <a:xfrm>
-            <a:off x="6600000" y="1950000"/>
-            <a:ext cx="5400000" cy="4000000"/>
-          </a:xfrm>
-          <a:prstGeom prst="rect">
-            <a:avLst/>
-          </a:prstGeom>
-          <a:noFill/>
-        </p:spPr>
-        <p:txBody>
-          <a:bodyPr wrap="square">
-            <a:spAutoFit/>
-          </a:bodyPr>
-          <a:lstStyle/>
+              <a:t>•  обеспечивает покой и не дает пищу или питье</a:t>
+            </a:r>
+          </a:p>
           <a:p>
             <a:pPr algn="l">
               <a:spcAft>
@@ -7064,7 +10885,7 @@
                 <a:ea typeface="Open Sans"/>
                 <a:cs typeface="Open Sans"/>
               </a:rPr>
-              <a:t>•  говорите спокойно и кратко</a:t>
+              <a:t>•  не вправляет выпавшие органы и не давит на них повязкой</a:t>
             </a:r>
           </a:p>
           <a:p>
@@ -7082,43 +10903,7 @@
                 <a:ea typeface="Open Sans"/>
                 <a:cs typeface="Open Sans"/>
               </a:rPr>
-              <a:t>•  выслушайте без давления</a:t>
-            </a:r>
-          </a:p>
-          <a:p>
-            <a:pPr algn="l">
-              <a:spcAft>
-                <a:spcPts val="800"/>
-              </a:spcAft>
-            </a:pPr>
-            <a:r>
-              <a:rPr sz="1300" b="0">
-                <a:solidFill>
-                  <a:srgbClr val="333333"/>
-                </a:solidFill>
-                <a:latin typeface="Open Sans"/>
-                <a:ea typeface="Open Sans"/>
-                <a:cs typeface="Open Sans"/>
-              </a:rPr>
-              <a:t>•  объясняйте происходящее</a:t>
-            </a:r>
-          </a:p>
-          <a:p>
-            <a:pPr algn="l">
-              <a:spcAft>
-                <a:spcPts val="800"/>
-              </a:spcAft>
-            </a:pPr>
-            <a:r>
-              <a:rPr sz="1300" b="0">
-                <a:solidFill>
-                  <a:srgbClr val="333333"/>
-                </a:solidFill>
-                <a:latin typeface="Open Sans"/>
-                <a:ea typeface="Open Sans"/>
-                <a:cs typeface="Open Sans"/>
-              </a:rPr>
-              <a:t>•  не оставляйте человека одного</a:t>
+              <a:t>•  при травме таза укладывает на спину с согнутыми и разведенными ногами</a:t>
             </a:r>
           </a:p>
         </p:txBody>
@@ -7216,7 +11001,7 @@
                 <a:ea typeface="Open Sans"/>
                 <a:cs typeface="Open Sans"/>
               </a:rPr>
-              <a:t>ОБЩИЙ ПОРЯДОК ДЕЙСТВИЙ</a:t>
+              <a:t>ТРАВМЫ КОНЕЧНОСТЕЙ</a:t>
             </a:r>
           </a:p>
         </p:txBody>
@@ -7383,57 +11168,14 @@
       </p:sp>
       <p:sp>
         <p:nvSpPr>
-          <p:cNvPr id="8" name="Oval 7"/>
-          <p:cNvSpPr/>
+          <p:cNvPr id="8" name="TextBox 7"/>
+          <p:cNvSpPr txBox="1"/>
           <p:nvPr/>
         </p:nvSpPr>
         <p:spPr>
           <a:xfrm>
             <a:off x="700000" y="1450000"/>
-            <a:ext cx="550000" cy="550000"/>
-          </a:xfrm>
-          <a:prstGeom prst="ellipse">
-            <a:avLst/>
-          </a:prstGeom>
-          <a:solidFill>
-            <a:srgbClr val="CC0000"/>
-          </a:solidFill>
-          <a:ln>
-            <a:noFill/>
-          </a:ln>
-        </p:spPr>
-        <p:style>
-          <a:lnRef idx="1">
-            <a:schemeClr val="accent1"/>
-          </a:lnRef>
-          <a:fillRef idx="3">
-            <a:schemeClr val="accent1"/>
-          </a:fillRef>
-          <a:effectRef idx="2">
-            <a:schemeClr val="accent1"/>
-          </a:effectRef>
-          <a:fontRef idx="minor">
-            <a:schemeClr val="lt1"/>
-          </a:fontRef>
-        </p:style>
-        <p:txBody>
-          <a:bodyPr rtlCol="0" anchor="ctr"/>
-          <a:lstStyle/>
-          <a:p>
-            <a:pPr algn="ctr"/>
-          </a:p>
-        </p:txBody>
-      </p:sp>
-      <p:sp>
-        <p:nvSpPr>
-          <p:cNvPr id="9" name="TextBox 8"/>
-          <p:cNvSpPr txBox="1"/>
-          <p:nvPr/>
-        </p:nvSpPr>
-        <p:spPr>
-          <a:xfrm>
-            <a:off x="700000" y="1450000"/>
-            <a:ext cx="550000" cy="550000"/>
+            <a:ext cx="11000000" cy="4000000"/>
           </a:xfrm>
           <a:prstGeom prst="rect">
             <a:avLst/>
@@ -7441,96 +11183,18 @@
           <a:noFill/>
         </p:spPr>
         <p:txBody>
-          <a:bodyPr wrap="square" anchor="ctr">
+          <a:bodyPr wrap="square">
             <a:spAutoFit/>
           </a:bodyPr>
           <a:lstStyle/>
           <a:p>
-            <a:pPr algn="ctr"/>
-            <a:r>
-              <a:rPr sz="1400" b="1">
-                <a:solidFill>
-                  <a:srgbClr val="FFFFFF"/>
-                </a:solidFill>
-                <a:latin typeface="Open Sans"/>
-                <a:ea typeface="Open Sans"/>
-                <a:cs typeface="Open Sans"/>
-              </a:rPr>
-              <a:t>1</a:t>
-            </a:r>
-          </a:p>
-        </p:txBody>
-      </p:sp>
-      <p:sp>
-        <p:nvSpPr>
-          <p:cNvPr id="10" name="Rectangle 9"/>
-          <p:cNvSpPr/>
-          <p:nvPr/>
-        </p:nvSpPr>
-        <p:spPr>
-          <a:xfrm>
-            <a:off x="1450000" y="1450000"/>
-            <a:ext cx="10500000" cy="550000"/>
-          </a:xfrm>
-          <a:prstGeom prst="rect">
-            <a:avLst/>
-          </a:prstGeom>
-          <a:solidFill>
-            <a:srgbClr val="FFFFFF"/>
-          </a:solidFill>
-          <a:ln w="12700">
-            <a:solidFill>
-              <a:srgbClr val="999999"/>
-            </a:solidFill>
-          </a:ln>
-        </p:spPr>
-        <p:style>
-          <a:lnRef idx="1">
-            <a:schemeClr val="accent1"/>
-          </a:lnRef>
-          <a:fillRef idx="3">
-            <a:schemeClr val="accent1"/>
-          </a:fillRef>
-          <a:effectRef idx="2">
-            <a:schemeClr val="accent1"/>
-          </a:effectRef>
-          <a:fontRef idx="minor">
-            <a:schemeClr val="lt1"/>
-          </a:fontRef>
-        </p:style>
-        <p:txBody>
-          <a:bodyPr rtlCol="0" anchor="ctr"/>
-          <a:lstStyle/>
-          <a:p>
-            <a:pPr algn="ctr"/>
-          </a:p>
-        </p:txBody>
-      </p:sp>
-      <p:sp>
-        <p:nvSpPr>
-          <p:cNvPr id="11" name="TextBox 10"/>
-          <p:cNvSpPr txBox="1"/>
-          <p:nvPr/>
-        </p:nvSpPr>
-        <p:spPr>
-          <a:xfrm>
-            <a:off x="1650000" y="1450000"/>
-            <a:ext cx="10100000" cy="550000"/>
-          </a:xfrm>
-          <a:prstGeom prst="rect">
-            <a:avLst/>
-          </a:prstGeom>
-          <a:noFill/>
-        </p:spPr>
-        <p:txBody>
-          <a:bodyPr wrap="square" anchor="ctr">
-            <a:spAutoFit/>
-          </a:bodyPr>
-          <a:lstStyle/>
-          <a:p>
-            <a:pPr algn="l"/>
-            <a:r>
-              <a:rPr sz="1300" b="0">
+            <a:pPr algn="l">
+              <a:spcAft>
+                <a:spcPts val="800"/>
+              </a:spcAft>
+            </a:pPr>
+            <a:r>
+              <a:rPr sz="1400" b="0">
                 <a:solidFill>
                   <a:srgbClr val="333333"/>
                 </a:solidFill>
@@ -7538,161 +11202,17 @@
                 <a:ea typeface="Open Sans"/>
                 <a:cs typeface="Open Sans"/>
               </a:rPr>
-              <a:t>Убедитесь в безопасности места.</a:t>
-            </a:r>
-          </a:p>
-        </p:txBody>
-      </p:sp>
-      <p:sp>
-        <p:nvSpPr>
-          <p:cNvPr id="12" name="Oval 11"/>
-          <p:cNvSpPr/>
-          <p:nvPr/>
-        </p:nvSpPr>
-        <p:spPr>
-          <a:xfrm>
-            <a:off x="700000" y="2320000"/>
-            <a:ext cx="550000" cy="550000"/>
-          </a:xfrm>
-          <a:prstGeom prst="ellipse">
-            <a:avLst/>
-          </a:prstGeom>
-          <a:solidFill>
-            <a:srgbClr val="555555"/>
-          </a:solidFill>
-          <a:ln>
-            <a:noFill/>
-          </a:ln>
-        </p:spPr>
-        <p:style>
-          <a:lnRef idx="1">
-            <a:schemeClr val="accent1"/>
-          </a:lnRef>
-          <a:fillRef idx="3">
-            <a:schemeClr val="accent1"/>
-          </a:fillRef>
-          <a:effectRef idx="2">
-            <a:schemeClr val="accent1"/>
-          </a:effectRef>
-          <a:fontRef idx="minor">
-            <a:schemeClr val="lt1"/>
-          </a:fontRef>
-        </p:style>
-        <p:txBody>
-          <a:bodyPr rtlCol="0" anchor="ctr"/>
-          <a:lstStyle/>
-          <a:p>
-            <a:pPr algn="ctr"/>
-          </a:p>
-        </p:txBody>
-      </p:sp>
-      <p:sp>
-        <p:nvSpPr>
-          <p:cNvPr id="13" name="TextBox 12"/>
-          <p:cNvSpPr txBox="1"/>
-          <p:nvPr/>
-        </p:nvSpPr>
-        <p:spPr>
-          <a:xfrm>
-            <a:off x="700000" y="2320000"/>
-            <a:ext cx="550000" cy="550000"/>
-          </a:xfrm>
-          <a:prstGeom prst="rect">
-            <a:avLst/>
-          </a:prstGeom>
-          <a:noFill/>
-        </p:spPr>
-        <p:txBody>
-          <a:bodyPr wrap="square" anchor="ctr">
-            <a:spAutoFit/>
-          </a:bodyPr>
-          <a:lstStyle/>
-          <a:p>
-            <a:pPr algn="ctr"/>
-            <a:r>
-              <a:rPr sz="1400" b="1">
-                <a:solidFill>
-                  <a:srgbClr val="FFFFFF"/>
-                </a:solidFill>
-                <a:latin typeface="Open Sans"/>
-                <a:ea typeface="Open Sans"/>
-                <a:cs typeface="Open Sans"/>
-              </a:rPr>
-              <a:t>2</a:t>
-            </a:r>
-          </a:p>
-        </p:txBody>
-      </p:sp>
-      <p:sp>
-        <p:nvSpPr>
-          <p:cNvPr id="14" name="Rectangle 13"/>
-          <p:cNvSpPr/>
-          <p:nvPr/>
-        </p:nvSpPr>
-        <p:spPr>
-          <a:xfrm>
-            <a:off x="1450000" y="2320000"/>
-            <a:ext cx="10500000" cy="550000"/>
-          </a:xfrm>
-          <a:prstGeom prst="rect">
-            <a:avLst/>
-          </a:prstGeom>
-          <a:solidFill>
-            <a:srgbClr val="FFFFFF"/>
-          </a:solidFill>
-          <a:ln w="12700">
-            <a:solidFill>
-              <a:srgbClr val="999999"/>
-            </a:solidFill>
-          </a:ln>
-        </p:spPr>
-        <p:style>
-          <a:lnRef idx="1">
-            <a:schemeClr val="accent1"/>
-          </a:lnRef>
-          <a:fillRef idx="3">
-            <a:schemeClr val="accent1"/>
-          </a:fillRef>
-          <a:effectRef idx="2">
-            <a:schemeClr val="accent1"/>
-          </a:effectRef>
-          <a:fontRef idx="minor">
-            <a:schemeClr val="lt1"/>
-          </a:fontRef>
-        </p:style>
-        <p:txBody>
-          <a:bodyPr rtlCol="0" anchor="ctr"/>
-          <a:lstStyle/>
-          <a:p>
-            <a:pPr algn="ctr"/>
-          </a:p>
-        </p:txBody>
-      </p:sp>
-      <p:sp>
-        <p:nvSpPr>
-          <p:cNvPr id="15" name="TextBox 14"/>
-          <p:cNvSpPr txBox="1"/>
-          <p:nvPr/>
-        </p:nvSpPr>
-        <p:spPr>
-          <a:xfrm>
-            <a:off x="1650000" y="2320000"/>
-            <a:ext cx="10100000" cy="550000"/>
-          </a:xfrm>
-          <a:prstGeom prst="rect">
-            <a:avLst/>
-          </a:prstGeom>
-          <a:noFill/>
-        </p:spPr>
-        <p:txBody>
-          <a:bodyPr wrap="square" anchor="ctr">
-            <a:spAutoFit/>
-          </a:bodyPr>
-          <a:lstStyle/>
-          <a:p>
-            <a:pPr algn="l"/>
-            <a:r>
-              <a:rPr sz="1300" b="0">
+              <a:t>•  Сначала остановите сильное кровотечение и наложите повязку на рану.</a:t>
+            </a:r>
+          </a:p>
+          <a:p>
+            <a:pPr algn="l">
+              <a:spcAft>
+                <a:spcPts val="800"/>
+              </a:spcAft>
+            </a:pPr>
+            <a:r>
+              <a:rPr sz="1400" b="0">
                 <a:solidFill>
                   <a:srgbClr val="333333"/>
                 </a:solidFill>
@@ -7700,161 +11220,17 @@
                 <a:ea typeface="Open Sans"/>
                 <a:cs typeface="Open Sans"/>
               </a:rPr>
-              <a:t>Проведите обзорный осмотр.</a:t>
-            </a:r>
-          </a:p>
-        </p:txBody>
-      </p:sp>
-      <p:sp>
-        <p:nvSpPr>
-          <p:cNvPr id="16" name="Oval 15"/>
-          <p:cNvSpPr/>
-          <p:nvPr/>
-        </p:nvSpPr>
-        <p:spPr>
-          <a:xfrm>
-            <a:off x="700000" y="3190000"/>
-            <a:ext cx="550000" cy="550000"/>
-          </a:xfrm>
-          <a:prstGeom prst="ellipse">
-            <a:avLst/>
-          </a:prstGeom>
-          <a:solidFill>
-            <a:srgbClr val="555555"/>
-          </a:solidFill>
-          <a:ln>
-            <a:noFill/>
-          </a:ln>
-        </p:spPr>
-        <p:style>
-          <a:lnRef idx="1">
-            <a:schemeClr val="accent1"/>
-          </a:lnRef>
-          <a:fillRef idx="3">
-            <a:schemeClr val="accent1"/>
-          </a:fillRef>
-          <a:effectRef idx="2">
-            <a:schemeClr val="accent1"/>
-          </a:effectRef>
-          <a:fontRef idx="minor">
-            <a:schemeClr val="lt1"/>
-          </a:fontRef>
-        </p:style>
-        <p:txBody>
-          <a:bodyPr rtlCol="0" anchor="ctr"/>
-          <a:lstStyle/>
-          <a:p>
-            <a:pPr algn="ctr"/>
-          </a:p>
-        </p:txBody>
-      </p:sp>
-      <p:sp>
-        <p:nvSpPr>
-          <p:cNvPr id="17" name="TextBox 16"/>
-          <p:cNvSpPr txBox="1"/>
-          <p:nvPr/>
-        </p:nvSpPr>
-        <p:spPr>
-          <a:xfrm>
-            <a:off x="700000" y="3190000"/>
-            <a:ext cx="550000" cy="550000"/>
-          </a:xfrm>
-          <a:prstGeom prst="rect">
-            <a:avLst/>
-          </a:prstGeom>
-          <a:noFill/>
-        </p:spPr>
-        <p:txBody>
-          <a:bodyPr wrap="square" anchor="ctr">
-            <a:spAutoFit/>
-          </a:bodyPr>
-          <a:lstStyle/>
-          <a:p>
-            <a:pPr algn="ctr"/>
-            <a:r>
-              <a:rPr sz="1400" b="1">
-                <a:solidFill>
-                  <a:srgbClr val="FFFFFF"/>
-                </a:solidFill>
-                <a:latin typeface="Open Sans"/>
-                <a:ea typeface="Open Sans"/>
-                <a:cs typeface="Open Sans"/>
-              </a:rPr>
-              <a:t>3</a:t>
-            </a:r>
-          </a:p>
-        </p:txBody>
-      </p:sp>
-      <p:sp>
-        <p:nvSpPr>
-          <p:cNvPr id="18" name="Rectangle 17"/>
-          <p:cNvSpPr/>
-          <p:nvPr/>
-        </p:nvSpPr>
-        <p:spPr>
-          <a:xfrm>
-            <a:off x="1450000" y="3190000"/>
-            <a:ext cx="10500000" cy="550000"/>
-          </a:xfrm>
-          <a:prstGeom prst="rect">
-            <a:avLst/>
-          </a:prstGeom>
-          <a:solidFill>
-            <a:srgbClr val="FFFFFF"/>
-          </a:solidFill>
-          <a:ln w="12700">
-            <a:solidFill>
-              <a:srgbClr val="999999"/>
-            </a:solidFill>
-          </a:ln>
-        </p:spPr>
-        <p:style>
-          <a:lnRef idx="1">
-            <a:schemeClr val="accent1"/>
-          </a:lnRef>
-          <a:fillRef idx="3">
-            <a:schemeClr val="accent1"/>
-          </a:fillRef>
-          <a:effectRef idx="2">
-            <a:schemeClr val="accent1"/>
-          </a:effectRef>
-          <a:fontRef idx="minor">
-            <a:schemeClr val="lt1"/>
-          </a:fontRef>
-        </p:style>
-        <p:txBody>
-          <a:bodyPr rtlCol="0" anchor="ctr"/>
-          <a:lstStyle/>
-          <a:p>
-            <a:pPr algn="ctr"/>
-          </a:p>
-        </p:txBody>
-      </p:sp>
-      <p:sp>
-        <p:nvSpPr>
-          <p:cNvPr id="19" name="TextBox 18"/>
-          <p:cNvSpPr txBox="1"/>
-          <p:nvPr/>
-        </p:nvSpPr>
-        <p:spPr>
-          <a:xfrm>
-            <a:off x="1650000" y="3190000"/>
-            <a:ext cx="10100000" cy="550000"/>
-          </a:xfrm>
-          <a:prstGeom prst="rect">
-            <a:avLst/>
-          </a:prstGeom>
-          <a:noFill/>
-        </p:spPr>
-        <p:txBody>
-          <a:bodyPr wrap="square" anchor="ctr">
-            <a:spAutoFit/>
-          </a:bodyPr>
-          <a:lstStyle/>
-          <a:p>
-            <a:pPr algn="l"/>
-            <a:r>
-              <a:rPr sz="1300" b="0">
+              <a:t>•  Снимите украшения с поврежденной конечности до развития отека.</a:t>
+            </a:r>
+          </a:p>
+          <a:p>
+            <a:pPr algn="l">
+              <a:spcAft>
+                <a:spcPts val="800"/>
+              </a:spcAft>
+            </a:pPr>
+            <a:r>
+              <a:rPr sz="1400" b="0">
                 <a:solidFill>
                   <a:srgbClr val="333333"/>
                 </a:solidFill>
@@ -7862,161 +11238,17 @@
                 <a:ea typeface="Open Sans"/>
                 <a:cs typeface="Open Sans"/>
               </a:rPr>
-              <a:t>Вызовите скорую медицинскую помощь.</a:t>
-            </a:r>
-          </a:p>
-        </p:txBody>
-      </p:sp>
-      <p:sp>
-        <p:nvSpPr>
-          <p:cNvPr id="20" name="Oval 19"/>
-          <p:cNvSpPr/>
-          <p:nvPr/>
-        </p:nvSpPr>
-        <p:spPr>
-          <a:xfrm>
-            <a:off x="700000" y="4060000"/>
-            <a:ext cx="550000" cy="550000"/>
-          </a:xfrm>
-          <a:prstGeom prst="ellipse">
-            <a:avLst/>
-          </a:prstGeom>
-          <a:solidFill>
-            <a:srgbClr val="555555"/>
-          </a:solidFill>
-          <a:ln>
-            <a:noFill/>
-          </a:ln>
-        </p:spPr>
-        <p:style>
-          <a:lnRef idx="1">
-            <a:schemeClr val="accent1"/>
-          </a:lnRef>
-          <a:fillRef idx="3">
-            <a:schemeClr val="accent1"/>
-          </a:fillRef>
-          <a:effectRef idx="2">
-            <a:schemeClr val="accent1"/>
-          </a:effectRef>
-          <a:fontRef idx="minor">
-            <a:schemeClr val="lt1"/>
-          </a:fontRef>
-        </p:style>
-        <p:txBody>
-          <a:bodyPr rtlCol="0" anchor="ctr"/>
-          <a:lstStyle/>
-          <a:p>
-            <a:pPr algn="ctr"/>
-          </a:p>
-        </p:txBody>
-      </p:sp>
-      <p:sp>
-        <p:nvSpPr>
-          <p:cNvPr id="21" name="TextBox 20"/>
-          <p:cNvSpPr txBox="1"/>
-          <p:nvPr/>
-        </p:nvSpPr>
-        <p:spPr>
-          <a:xfrm>
-            <a:off x="700000" y="4060000"/>
-            <a:ext cx="550000" cy="550000"/>
-          </a:xfrm>
-          <a:prstGeom prst="rect">
-            <a:avLst/>
-          </a:prstGeom>
-          <a:noFill/>
-        </p:spPr>
-        <p:txBody>
-          <a:bodyPr wrap="square" anchor="ctr">
-            <a:spAutoFit/>
-          </a:bodyPr>
-          <a:lstStyle/>
-          <a:p>
-            <a:pPr algn="ctr"/>
-            <a:r>
-              <a:rPr sz="1400" b="1">
-                <a:solidFill>
-                  <a:srgbClr val="FFFFFF"/>
-                </a:solidFill>
-                <a:latin typeface="Open Sans"/>
-                <a:ea typeface="Open Sans"/>
-                <a:cs typeface="Open Sans"/>
-              </a:rPr>
-              <a:t>4</a:t>
-            </a:r>
-          </a:p>
-        </p:txBody>
-      </p:sp>
-      <p:sp>
-        <p:nvSpPr>
-          <p:cNvPr id="22" name="Rectangle 21"/>
-          <p:cNvSpPr/>
-          <p:nvPr/>
-        </p:nvSpPr>
-        <p:spPr>
-          <a:xfrm>
-            <a:off x="1450000" y="4060000"/>
-            <a:ext cx="10500000" cy="550000"/>
-          </a:xfrm>
-          <a:prstGeom prst="rect">
-            <a:avLst/>
-          </a:prstGeom>
-          <a:solidFill>
-            <a:srgbClr val="FFFFFF"/>
-          </a:solidFill>
-          <a:ln w="12700">
-            <a:solidFill>
-              <a:srgbClr val="999999"/>
-            </a:solidFill>
-          </a:ln>
-        </p:spPr>
-        <p:style>
-          <a:lnRef idx="1">
-            <a:schemeClr val="accent1"/>
-          </a:lnRef>
-          <a:fillRef idx="3">
-            <a:schemeClr val="accent1"/>
-          </a:fillRef>
-          <a:effectRef idx="2">
-            <a:schemeClr val="accent1"/>
-          </a:effectRef>
-          <a:fontRef idx="minor">
-            <a:schemeClr val="lt1"/>
-          </a:fontRef>
-        </p:style>
-        <p:txBody>
-          <a:bodyPr rtlCol="0" anchor="ctr"/>
-          <a:lstStyle/>
-          <a:p>
-            <a:pPr algn="ctr"/>
-          </a:p>
-        </p:txBody>
-      </p:sp>
-      <p:sp>
-        <p:nvSpPr>
-          <p:cNvPr id="23" name="TextBox 22"/>
-          <p:cNvSpPr txBox="1"/>
-          <p:nvPr/>
-        </p:nvSpPr>
-        <p:spPr>
-          <a:xfrm>
-            <a:off x="1650000" y="4060000"/>
-            <a:ext cx="10100000" cy="550000"/>
-          </a:xfrm>
-          <a:prstGeom prst="rect">
-            <a:avLst/>
-          </a:prstGeom>
-          <a:noFill/>
-        </p:spPr>
-        <p:txBody>
-          <a:bodyPr wrap="square" anchor="ctr">
-            <a:spAutoFit/>
-          </a:bodyPr>
-          <a:lstStyle/>
-          <a:p>
-            <a:pPr algn="l"/>
-            <a:r>
-              <a:rPr sz="1300" b="0">
+              <a:t>•  Не исправляйте деформацию и не сопоставляйте костные отломки.</a:t>
+            </a:r>
+          </a:p>
+          <a:p>
+            <a:pPr algn="l">
+              <a:spcAft>
+                <a:spcPts val="800"/>
+              </a:spcAft>
+            </a:pPr>
+            <a:r>
+              <a:rPr sz="1400" b="0">
                 <a:solidFill>
                   <a:srgbClr val="333333"/>
                 </a:solidFill>
@@ -8024,161 +11256,17 @@
                 <a:ea typeface="Open Sans"/>
                 <a:cs typeface="Open Sans"/>
               </a:rPr>
-              <a:t>Проведите подробный осмотр и опрос.</a:t>
-            </a:r>
-          </a:p>
-        </p:txBody>
-      </p:sp>
-      <p:sp>
-        <p:nvSpPr>
-          <p:cNvPr id="24" name="Oval 23"/>
-          <p:cNvSpPr/>
-          <p:nvPr/>
-        </p:nvSpPr>
-        <p:spPr>
-          <a:xfrm>
-            <a:off x="700000" y="4930000"/>
-            <a:ext cx="550000" cy="550000"/>
-          </a:xfrm>
-          <a:prstGeom prst="ellipse">
-            <a:avLst/>
-          </a:prstGeom>
-          <a:solidFill>
-            <a:srgbClr val="555555"/>
-          </a:solidFill>
-          <a:ln>
-            <a:noFill/>
-          </a:ln>
-        </p:spPr>
-        <p:style>
-          <a:lnRef idx="1">
-            <a:schemeClr val="accent1"/>
-          </a:lnRef>
-          <a:fillRef idx="3">
-            <a:schemeClr val="accent1"/>
-          </a:fillRef>
-          <a:effectRef idx="2">
-            <a:schemeClr val="accent1"/>
-          </a:effectRef>
-          <a:fontRef idx="minor">
-            <a:schemeClr val="lt1"/>
-          </a:fontRef>
-        </p:style>
-        <p:txBody>
-          <a:bodyPr rtlCol="0" anchor="ctr"/>
-          <a:lstStyle/>
-          <a:p>
-            <a:pPr algn="ctr"/>
-          </a:p>
-        </p:txBody>
-      </p:sp>
-      <p:sp>
-        <p:nvSpPr>
-          <p:cNvPr id="25" name="TextBox 24"/>
-          <p:cNvSpPr txBox="1"/>
-          <p:nvPr/>
-        </p:nvSpPr>
-        <p:spPr>
-          <a:xfrm>
-            <a:off x="700000" y="4930000"/>
-            <a:ext cx="550000" cy="550000"/>
-          </a:xfrm>
-          <a:prstGeom prst="rect">
-            <a:avLst/>
-          </a:prstGeom>
-          <a:noFill/>
-        </p:spPr>
-        <p:txBody>
-          <a:bodyPr wrap="square" anchor="ctr">
-            <a:spAutoFit/>
-          </a:bodyPr>
-          <a:lstStyle/>
-          <a:p>
-            <a:pPr algn="ctr"/>
-            <a:r>
-              <a:rPr sz="1400" b="1">
-                <a:solidFill>
-                  <a:srgbClr val="FFFFFF"/>
-                </a:solidFill>
-                <a:latin typeface="Open Sans"/>
-                <a:ea typeface="Open Sans"/>
-                <a:cs typeface="Open Sans"/>
-              </a:rPr>
-              <a:t>5</a:t>
-            </a:r>
-          </a:p>
-        </p:txBody>
-      </p:sp>
-      <p:sp>
-        <p:nvSpPr>
-          <p:cNvPr id="26" name="Rectangle 25"/>
-          <p:cNvSpPr/>
-          <p:nvPr/>
-        </p:nvSpPr>
-        <p:spPr>
-          <a:xfrm>
-            <a:off x="1450000" y="4930000"/>
-            <a:ext cx="10500000" cy="550000"/>
-          </a:xfrm>
-          <a:prstGeom prst="rect">
-            <a:avLst/>
-          </a:prstGeom>
-          <a:solidFill>
-            <a:srgbClr val="FFFFFF"/>
-          </a:solidFill>
-          <a:ln w="12700">
-            <a:solidFill>
-              <a:srgbClr val="999999"/>
-            </a:solidFill>
-          </a:ln>
-        </p:spPr>
-        <p:style>
-          <a:lnRef idx="1">
-            <a:schemeClr val="accent1"/>
-          </a:lnRef>
-          <a:fillRef idx="3">
-            <a:schemeClr val="accent1"/>
-          </a:fillRef>
-          <a:effectRef idx="2">
-            <a:schemeClr val="accent1"/>
-          </a:effectRef>
-          <a:fontRef idx="minor">
-            <a:schemeClr val="lt1"/>
-          </a:fontRef>
-        </p:style>
-        <p:txBody>
-          <a:bodyPr rtlCol="0" anchor="ctr"/>
-          <a:lstStyle/>
-          <a:p>
-            <a:pPr algn="ctr"/>
-          </a:p>
-        </p:txBody>
-      </p:sp>
-      <p:sp>
-        <p:nvSpPr>
-          <p:cNvPr id="27" name="TextBox 26"/>
-          <p:cNvSpPr txBox="1"/>
-          <p:nvPr/>
-        </p:nvSpPr>
-        <p:spPr>
-          <a:xfrm>
-            <a:off x="1650000" y="4930000"/>
-            <a:ext cx="10100000" cy="550000"/>
-          </a:xfrm>
-          <a:prstGeom prst="rect">
-            <a:avLst/>
-          </a:prstGeom>
-          <a:noFill/>
-        </p:spPr>
-        <p:txBody>
-          <a:bodyPr wrap="square" anchor="ctr">
-            <a:spAutoFit/>
-          </a:bodyPr>
-          <a:lstStyle/>
-          <a:p>
-            <a:pPr algn="l"/>
-            <a:r>
-              <a:rPr sz="1300" b="0">
+              <a:t>•  Обездвижьте поврежденную часть в найденном положении.</a:t>
+            </a:r>
+          </a:p>
+          <a:p>
+            <a:pPr algn="l">
+              <a:spcAft>
+                <a:spcPts val="800"/>
+              </a:spcAft>
+            </a:pPr>
+            <a:r>
+              <a:rPr sz="1400" b="0">
                 <a:solidFill>
                   <a:srgbClr val="333333"/>
                 </a:solidFill>
@@ -8186,161 +11274,17 @@
                 <a:ea typeface="Open Sans"/>
                 <a:cs typeface="Open Sans"/>
               </a:rPr>
-              <a:t>Окажите помощь по выявленным состояниям.</a:t>
-            </a:r>
-          </a:p>
-        </p:txBody>
-      </p:sp>
-      <p:sp>
-        <p:nvSpPr>
-          <p:cNvPr id="28" name="Oval 27"/>
-          <p:cNvSpPr/>
-          <p:nvPr/>
-        </p:nvSpPr>
-        <p:spPr>
-          <a:xfrm>
-            <a:off x="700000" y="5800000"/>
-            <a:ext cx="550000" cy="550000"/>
-          </a:xfrm>
-          <a:prstGeom prst="ellipse">
-            <a:avLst/>
-          </a:prstGeom>
-          <a:solidFill>
-            <a:srgbClr val="555555"/>
-          </a:solidFill>
-          <a:ln>
-            <a:noFill/>
-          </a:ln>
-        </p:spPr>
-        <p:style>
-          <a:lnRef idx="1">
-            <a:schemeClr val="accent1"/>
-          </a:lnRef>
-          <a:fillRef idx="3">
-            <a:schemeClr val="accent1"/>
-          </a:fillRef>
-          <a:effectRef idx="2">
-            <a:schemeClr val="accent1"/>
-          </a:effectRef>
-          <a:fontRef idx="minor">
-            <a:schemeClr val="lt1"/>
-          </a:fontRef>
-        </p:style>
-        <p:txBody>
-          <a:bodyPr rtlCol="0" anchor="ctr"/>
-          <a:lstStyle/>
-          <a:p>
-            <a:pPr algn="ctr"/>
-          </a:p>
-        </p:txBody>
-      </p:sp>
-      <p:sp>
-        <p:nvSpPr>
-          <p:cNvPr id="29" name="TextBox 28"/>
-          <p:cNvSpPr txBox="1"/>
-          <p:nvPr/>
-        </p:nvSpPr>
-        <p:spPr>
-          <a:xfrm>
-            <a:off x="700000" y="5800000"/>
-            <a:ext cx="550000" cy="550000"/>
-          </a:xfrm>
-          <a:prstGeom prst="rect">
-            <a:avLst/>
-          </a:prstGeom>
-          <a:noFill/>
-        </p:spPr>
-        <p:txBody>
-          <a:bodyPr wrap="square" anchor="ctr">
-            <a:spAutoFit/>
-          </a:bodyPr>
-          <a:lstStyle/>
-          <a:p>
-            <a:pPr algn="ctr"/>
-            <a:r>
-              <a:rPr sz="1400" b="1">
-                <a:solidFill>
-                  <a:srgbClr val="FFFFFF"/>
-                </a:solidFill>
-                <a:latin typeface="Open Sans"/>
-                <a:ea typeface="Open Sans"/>
-                <a:cs typeface="Open Sans"/>
-              </a:rPr>
-              <a:t>6</a:t>
-            </a:r>
-          </a:p>
-        </p:txBody>
-      </p:sp>
-      <p:sp>
-        <p:nvSpPr>
-          <p:cNvPr id="30" name="Rectangle 29"/>
-          <p:cNvSpPr/>
-          <p:nvPr/>
-        </p:nvSpPr>
-        <p:spPr>
-          <a:xfrm>
-            <a:off x="1450000" y="5800000"/>
-            <a:ext cx="10500000" cy="550000"/>
-          </a:xfrm>
-          <a:prstGeom prst="rect">
-            <a:avLst/>
-          </a:prstGeom>
-          <a:solidFill>
-            <a:srgbClr val="FFFFFF"/>
-          </a:solidFill>
-          <a:ln w="12700">
-            <a:solidFill>
-              <a:srgbClr val="999999"/>
-            </a:solidFill>
-          </a:ln>
-        </p:spPr>
-        <p:style>
-          <a:lnRef idx="1">
-            <a:schemeClr val="accent1"/>
-          </a:lnRef>
-          <a:fillRef idx="3">
-            <a:schemeClr val="accent1"/>
-          </a:fillRef>
-          <a:effectRef idx="2">
-            <a:schemeClr val="accent1"/>
-          </a:effectRef>
-          <a:fontRef idx="minor">
-            <a:schemeClr val="lt1"/>
-          </a:fontRef>
-        </p:style>
-        <p:txBody>
-          <a:bodyPr rtlCol="0" anchor="ctr"/>
-          <a:lstStyle/>
-          <a:p>
-            <a:pPr algn="ctr"/>
-          </a:p>
-        </p:txBody>
-      </p:sp>
-      <p:sp>
-        <p:nvSpPr>
-          <p:cNvPr id="31" name="TextBox 30"/>
-          <p:cNvSpPr txBox="1"/>
-          <p:nvPr/>
-        </p:nvSpPr>
-        <p:spPr>
-          <a:xfrm>
-            <a:off x="1650000" y="5800000"/>
-            <a:ext cx="10100000" cy="550000"/>
-          </a:xfrm>
-          <a:prstGeom prst="rect">
-            <a:avLst/>
-          </a:prstGeom>
-          <a:noFill/>
-        </p:spPr>
-        <p:txBody>
-          <a:bodyPr wrap="square" anchor="ctr">
-            <a:spAutoFit/>
-          </a:bodyPr>
-          <a:lstStyle/>
-          <a:p>
-            <a:pPr algn="l"/>
-            <a:r>
-              <a:rPr sz="1300" b="0">
+              <a:t>•  При отсутствии шины фиксируйте руку к туловищу, ногу — к здоровой ноге.</a:t>
+            </a:r>
+          </a:p>
+          <a:p>
+            <a:pPr algn="l">
+              <a:spcAft>
+                <a:spcPts val="800"/>
+              </a:spcAft>
+            </a:pPr>
+            <a:r>
+              <a:rPr sz="1400" b="0">
                 <a:solidFill>
                   <a:srgbClr val="333333"/>
                 </a:solidFill>
@@ -8348,7 +11292,7 @@
                 <a:ea typeface="Open Sans"/>
                 <a:cs typeface="Open Sans"/>
               </a:rPr>
-              <a:t>Контролируйте состояние до передачи специалистам.</a:t>
+              <a:t>•  После фиксации проверяйте цвет, тепло и чувствительность пальцев.</a:t>
             </a:r>
           </a:p>
         </p:txBody>
@@ -8446,7 +11390,7 @@
                 <a:ea typeface="Open Sans"/>
                 <a:cs typeface="Open Sans"/>
               </a:rPr>
-              <a:t>ГЛАВНОЕ ЗАПОМНИТЬ</a:t>
+              <a:t>ТЕРМИЧЕСКИЕ ПОРАЖЕНИЯ</a:t>
             </a:r>
           </a:p>
         </p:txBody>
@@ -8613,89 +11557,75 @@
       </p:sp>
       <p:sp>
         <p:nvSpPr>
-          <p:cNvPr id="8" name="Rectangle 7"/>
-          <p:cNvSpPr/>
-          <p:nvPr/>
-        </p:nvSpPr>
-        <p:spPr>
-          <a:xfrm>
-            <a:off x="700000" y="1450000"/>
-            <a:ext cx="11000000" cy="850000"/>
-          </a:xfrm>
-          <a:prstGeom prst="rect">
-            <a:avLst/>
-          </a:prstGeom>
-          <a:solidFill>
-            <a:srgbClr val="FFFFFF"/>
-          </a:solidFill>
-          <a:ln w="12700">
-            <a:solidFill>
-              <a:srgbClr val="999999"/>
-            </a:solidFill>
-          </a:ln>
-        </p:spPr>
-        <p:style>
-          <a:lnRef idx="1">
-            <a:schemeClr val="accent1"/>
-          </a:lnRef>
-          <a:fillRef idx="3">
-            <a:schemeClr val="accent1"/>
-          </a:fillRef>
-          <a:effectRef idx="2">
-            <a:schemeClr val="accent1"/>
-          </a:effectRef>
-          <a:fontRef idx="minor">
-            <a:schemeClr val="lt1"/>
-          </a:fontRef>
-        </p:style>
-        <p:txBody>
-          <a:bodyPr rtlCol="0" anchor="ctr"/>
-          <a:lstStyle/>
-          <a:p>
-            <a:pPr algn="ctr"/>
-          </a:p>
-        </p:txBody>
-      </p:sp>
-      <p:sp>
-        <p:nvSpPr>
-          <p:cNvPr id="9" name="Rectangle 8"/>
-          <p:cNvSpPr/>
-          <p:nvPr/>
-        </p:nvSpPr>
-        <p:spPr>
-          <a:xfrm>
-            <a:off x="700000" y="1450000"/>
-            <a:ext cx="90000" cy="850000"/>
-          </a:xfrm>
-          <a:prstGeom prst="rect">
-            <a:avLst/>
-          </a:prstGeom>
-          <a:solidFill>
-            <a:srgbClr val="CC0000"/>
-          </a:solidFill>
-          <a:ln>
-            <a:noFill/>
-          </a:ln>
-        </p:spPr>
-        <p:style>
-          <a:lnRef idx="1">
-            <a:schemeClr val="accent1"/>
-          </a:lnRef>
-          <a:fillRef idx="3">
-            <a:schemeClr val="accent1"/>
-          </a:fillRef>
-          <a:effectRef idx="2">
-            <a:schemeClr val="accent1"/>
-          </a:effectRef>
-          <a:fontRef idx="minor">
-            <a:schemeClr val="lt1"/>
-          </a:fontRef>
-        </p:style>
-        <p:txBody>
-          <a:bodyPr rtlCol="0" anchor="ctr"/>
-          <a:lstStyle/>
-          <a:p>
-            <a:pPr algn="ctr"/>
+          <p:cNvPr id="8" name="TextBox 7"/>
+          <p:cNvSpPr txBox="1"/>
+          <p:nvPr/>
+        </p:nvSpPr>
+        <p:spPr>
+          <a:xfrm>
+            <a:off x="700000" y="1400000"/>
+            <a:ext cx="5400000" cy="400000"/>
+          </a:xfrm>
+          <a:prstGeom prst="rect">
+            <a:avLst/>
+          </a:prstGeom>
+          <a:noFill/>
+        </p:spPr>
+        <p:txBody>
+          <a:bodyPr wrap="square" anchor="t">
+            <a:spAutoFit/>
+          </a:bodyPr>
+          <a:lstStyle/>
+          <a:p>
+            <a:pPr algn="l"/>
+            <a:r>
+              <a:rPr sz="1400" b="1">
+                <a:solidFill>
+                  <a:srgbClr val="333333"/>
+                </a:solidFill>
+                <a:latin typeface="Open Sans"/>
+                <a:ea typeface="Open Sans"/>
+                <a:cs typeface="Open Sans"/>
+              </a:rPr>
+              <a:t>Тепло</a:t>
+            </a:r>
+          </a:p>
+        </p:txBody>
+      </p:sp>
+      <p:sp>
+        <p:nvSpPr>
+          <p:cNvPr id="9" name="TextBox 8"/>
+          <p:cNvSpPr txBox="1"/>
+          <p:nvPr/>
+        </p:nvSpPr>
+        <p:spPr>
+          <a:xfrm>
+            <a:off x="6600000" y="1400000"/>
+            <a:ext cx="5400000" cy="400000"/>
+          </a:xfrm>
+          <a:prstGeom prst="rect">
+            <a:avLst/>
+          </a:prstGeom>
+          <a:noFill/>
+        </p:spPr>
+        <p:txBody>
+          <a:bodyPr wrap="square" anchor="t">
+            <a:spAutoFit/>
+          </a:bodyPr>
+          <a:lstStyle/>
+          <a:p>
+            <a:pPr algn="l"/>
+            <a:r>
+              <a:rPr sz="1400" b="1">
+                <a:solidFill>
+                  <a:srgbClr val="333333"/>
+                </a:solidFill>
+                <a:latin typeface="Open Sans"/>
+                <a:ea typeface="Open Sans"/>
+                <a:cs typeface="Open Sans"/>
+              </a:rPr>
+              <a:t>Холод</a:t>
+            </a:r>
           </a:p>
         </p:txBody>
       </p:sp>
@@ -8707,8 +11637,8 @@
         </p:nvSpPr>
         <p:spPr>
           <a:xfrm>
-            <a:off x="1000000" y="1550000"/>
-            <a:ext cx="10400000" cy="650000"/>
+            <a:off x="700000" y="1850000"/>
+            <a:ext cx="5400000" cy="4000000"/>
           </a:xfrm>
           <a:prstGeom prst="rect">
             <a:avLst/>
@@ -8716,12 +11646,16 @@
           <a:noFill/>
         </p:spPr>
         <p:txBody>
-          <a:bodyPr wrap="square" anchor="ctr">
+          <a:bodyPr wrap="square">
             <a:spAutoFit/>
           </a:bodyPr>
           <a:lstStyle/>
           <a:p>
-            <a:pPr algn="l"/>
+            <a:pPr algn="l">
+              <a:spcAft>
+                <a:spcPts val="800"/>
+              </a:spcAft>
+            </a:pPr>
             <a:r>
               <a:rPr sz="1300" b="0">
                 <a:solidFill>
@@ -8731,109 +11665,57 @@
                 <a:ea typeface="Open Sans"/>
                 <a:cs typeface="Open Sans"/>
               </a:rPr>
-              <a:t>Сначала устраните опасность</a:t>
-            </a:r>
-          </a:p>
-        </p:txBody>
-      </p:sp>
-      <p:sp>
-        <p:nvSpPr>
-          <p:cNvPr id="11" name="Rectangle 10"/>
-          <p:cNvSpPr/>
-          <p:nvPr/>
-        </p:nvSpPr>
-        <p:spPr>
-          <a:xfrm>
-            <a:off x="700000" y="2400000"/>
-            <a:ext cx="11000000" cy="850000"/>
-          </a:xfrm>
-          <a:prstGeom prst="rect">
-            <a:avLst/>
-          </a:prstGeom>
-          <a:solidFill>
-            <a:srgbClr val="FFFFFF"/>
-          </a:solidFill>
-          <a:ln w="12700">
-            <a:solidFill>
-              <a:srgbClr val="999999"/>
-            </a:solidFill>
-          </a:ln>
-        </p:spPr>
-        <p:style>
-          <a:lnRef idx="1">
-            <a:schemeClr val="accent1"/>
-          </a:lnRef>
-          <a:fillRef idx="3">
-            <a:schemeClr val="accent1"/>
-          </a:fillRef>
-          <a:effectRef idx="2">
-            <a:schemeClr val="accent1"/>
-          </a:effectRef>
-          <a:fontRef idx="minor">
-            <a:schemeClr val="lt1"/>
-          </a:fontRef>
-        </p:style>
-        <p:txBody>
-          <a:bodyPr rtlCol="0" anchor="ctr"/>
-          <a:lstStyle/>
-          <a:p>
-            <a:pPr algn="ctr"/>
-          </a:p>
-        </p:txBody>
-      </p:sp>
-      <p:sp>
-        <p:nvSpPr>
-          <p:cNvPr id="12" name="Rectangle 11"/>
-          <p:cNvSpPr/>
-          <p:nvPr/>
-        </p:nvSpPr>
-        <p:spPr>
-          <a:xfrm>
-            <a:off x="700000" y="2400000"/>
-            <a:ext cx="90000" cy="850000"/>
-          </a:xfrm>
-          <a:prstGeom prst="rect">
-            <a:avLst/>
-          </a:prstGeom>
-          <a:solidFill>
-            <a:srgbClr val="CC0000"/>
-          </a:solidFill>
-          <a:ln>
-            <a:noFill/>
-          </a:ln>
-        </p:spPr>
-        <p:style>
-          <a:lnRef idx="1">
-            <a:schemeClr val="accent1"/>
-          </a:lnRef>
-          <a:fillRef idx="3">
-            <a:schemeClr val="accent1"/>
-          </a:fillRef>
-          <a:effectRef idx="2">
-            <a:schemeClr val="accent1"/>
-          </a:effectRef>
-          <a:fontRef idx="minor">
-            <a:schemeClr val="lt1"/>
-          </a:fontRef>
-        </p:style>
-        <p:txBody>
-          <a:bodyPr rtlCol="0" anchor="ctr"/>
-          <a:lstStyle/>
-          <a:p>
-            <a:pPr algn="ctr"/>
-          </a:p>
-        </p:txBody>
-      </p:sp>
-      <p:sp>
-        <p:nvSpPr>
-          <p:cNvPr id="13" name="TextBox 12"/>
+              <a:t>•  при ожоге прекратите действие тепла и охлаждайте участок водой не менее 20 минут</a:t>
+            </a:r>
+          </a:p>
+          <a:p>
+            <a:pPr algn="l">
+              <a:spcAft>
+                <a:spcPts val="800"/>
+              </a:spcAft>
+            </a:pPr>
+            <a:r>
+              <a:rPr sz="1300" b="0">
+                <a:solidFill>
+                  <a:srgbClr val="333333"/>
+                </a:solidFill>
+                <a:latin typeface="Open Sans"/>
+                <a:ea typeface="Open Sans"/>
+                <a:cs typeface="Open Sans"/>
+              </a:rPr>
+              <a:t>•  при перегревании перенесите человека в прохладу, снимите лишнюю одежду и охлаждайте</a:t>
+            </a:r>
+          </a:p>
+          <a:p>
+            <a:pPr algn="l">
+              <a:spcAft>
+                <a:spcPts val="800"/>
+              </a:spcAft>
+            </a:pPr>
+            <a:r>
+              <a:rPr sz="1300" b="0">
+                <a:solidFill>
+                  <a:srgbClr val="333333"/>
+                </a:solidFill>
+                <a:latin typeface="Open Sans"/>
+                <a:ea typeface="Open Sans"/>
+                <a:cs typeface="Open Sans"/>
+              </a:rPr>
+              <a:t>•  при ясном сознании предлагайте пить небольшими порциями</a:t>
+            </a:r>
+          </a:p>
+        </p:txBody>
+      </p:sp>
+      <p:sp>
+        <p:nvSpPr>
+          <p:cNvPr id="11" name="TextBox 10"/>
           <p:cNvSpPr txBox="1"/>
           <p:nvPr/>
         </p:nvSpPr>
         <p:spPr>
           <a:xfrm>
-            <a:off x="1000000" y="2500000"/>
-            <a:ext cx="10400000" cy="650000"/>
+            <a:off x="6600000" y="1850000"/>
+            <a:ext cx="5400000" cy="4000000"/>
           </a:xfrm>
           <a:prstGeom prst="rect">
             <a:avLst/>
@@ -8841,12 +11723,16 @@
           <a:noFill/>
         </p:spPr>
         <p:txBody>
-          <a:bodyPr wrap="square" anchor="ctr">
+          <a:bodyPr wrap="square">
             <a:spAutoFit/>
           </a:bodyPr>
           <a:lstStyle/>
           <a:p>
-            <a:pPr algn="l"/>
+            <a:pPr algn="l">
+              <a:spcAft>
+                <a:spcPts val="800"/>
+              </a:spcAft>
+            </a:pPr>
             <a:r>
               <a:rPr sz="1300" b="0">
                 <a:solidFill>
@@ -8856,122 +11742,15 @@
                 <a:ea typeface="Open Sans"/>
                 <a:cs typeface="Open Sans"/>
               </a:rPr>
-              <a:t>Оцените сознание и дыхание</a:t>
-            </a:r>
-          </a:p>
-        </p:txBody>
-      </p:sp>
-      <p:sp>
-        <p:nvSpPr>
-          <p:cNvPr id="14" name="Rectangle 13"/>
-          <p:cNvSpPr/>
-          <p:nvPr/>
-        </p:nvSpPr>
-        <p:spPr>
-          <a:xfrm>
-            <a:off x="700000" y="3350000"/>
-            <a:ext cx="11000000" cy="850000"/>
-          </a:xfrm>
-          <a:prstGeom prst="rect">
-            <a:avLst/>
-          </a:prstGeom>
-          <a:solidFill>
-            <a:srgbClr val="FFFFFF"/>
-          </a:solidFill>
-          <a:ln w="12700">
-            <a:solidFill>
-              <a:srgbClr val="999999"/>
-            </a:solidFill>
-          </a:ln>
-        </p:spPr>
-        <p:style>
-          <a:lnRef idx="1">
-            <a:schemeClr val="accent1"/>
-          </a:lnRef>
-          <a:fillRef idx="3">
-            <a:schemeClr val="accent1"/>
-          </a:fillRef>
-          <a:effectRef idx="2">
-            <a:schemeClr val="accent1"/>
-          </a:effectRef>
-          <a:fontRef idx="minor">
-            <a:schemeClr val="lt1"/>
-          </a:fontRef>
-        </p:style>
-        <p:txBody>
-          <a:bodyPr rtlCol="0" anchor="ctr"/>
-          <a:lstStyle/>
-          <a:p>
-            <a:pPr algn="ctr"/>
-          </a:p>
-        </p:txBody>
-      </p:sp>
-      <p:sp>
-        <p:nvSpPr>
-          <p:cNvPr id="15" name="Rectangle 14"/>
-          <p:cNvSpPr/>
-          <p:nvPr/>
-        </p:nvSpPr>
-        <p:spPr>
-          <a:xfrm>
-            <a:off x="700000" y="3350000"/>
-            <a:ext cx="90000" cy="850000"/>
-          </a:xfrm>
-          <a:prstGeom prst="rect">
-            <a:avLst/>
-          </a:prstGeom>
-          <a:solidFill>
-            <a:srgbClr val="CC0000"/>
-          </a:solidFill>
-          <a:ln>
-            <a:noFill/>
-          </a:ln>
-        </p:spPr>
-        <p:style>
-          <a:lnRef idx="1">
-            <a:schemeClr val="accent1"/>
-          </a:lnRef>
-          <a:fillRef idx="3">
-            <a:schemeClr val="accent1"/>
-          </a:fillRef>
-          <a:effectRef idx="2">
-            <a:schemeClr val="accent1"/>
-          </a:effectRef>
-          <a:fontRef idx="minor">
-            <a:schemeClr val="lt1"/>
-          </a:fontRef>
-        </p:style>
-        <p:txBody>
-          <a:bodyPr rtlCol="0" anchor="ctr"/>
-          <a:lstStyle/>
-          <a:p>
-            <a:pPr algn="ctr"/>
-          </a:p>
-        </p:txBody>
-      </p:sp>
-      <p:sp>
-        <p:nvSpPr>
-          <p:cNvPr id="16" name="TextBox 15"/>
-          <p:cNvSpPr txBox="1"/>
-          <p:nvPr/>
-        </p:nvSpPr>
-        <p:spPr>
-          <a:xfrm>
-            <a:off x="1000000" y="3450000"/>
-            <a:ext cx="10400000" cy="650000"/>
-          </a:xfrm>
-          <a:prstGeom prst="rect">
-            <a:avLst/>
-          </a:prstGeom>
-          <a:noFill/>
-        </p:spPr>
-        <p:txBody>
-          <a:bodyPr wrap="square" anchor="ctr">
-            <a:spAutoFit/>
-          </a:bodyPr>
-          <a:lstStyle/>
-          <a:p>
-            <a:pPr algn="l"/>
+              <a:t>•  при отморожении наложите сухую теплоизолирующую повязку и обездвижьте участок</a:t>
+            </a:r>
+          </a:p>
+          <a:p>
+            <a:pPr algn="l">
+              <a:spcAft>
+                <a:spcPts val="800"/>
+              </a:spcAft>
+            </a:pPr>
             <a:r>
               <a:rPr sz="1300" b="0">
                 <a:solidFill>
@@ -8981,122 +11760,15 @@
                 <a:ea typeface="Open Sans"/>
                 <a:cs typeface="Open Sans"/>
               </a:rPr>
-              <a:t>Остановите сильное кровотечение</a:t>
-            </a:r>
-          </a:p>
-        </p:txBody>
-      </p:sp>
-      <p:sp>
-        <p:nvSpPr>
-          <p:cNvPr id="17" name="Rectangle 16"/>
-          <p:cNvSpPr/>
-          <p:nvPr/>
-        </p:nvSpPr>
-        <p:spPr>
-          <a:xfrm>
-            <a:off x="700000" y="4300000"/>
-            <a:ext cx="11000000" cy="850000"/>
-          </a:xfrm>
-          <a:prstGeom prst="rect">
-            <a:avLst/>
-          </a:prstGeom>
-          <a:solidFill>
-            <a:srgbClr val="FFFFFF"/>
-          </a:solidFill>
-          <a:ln w="12700">
-            <a:solidFill>
-              <a:srgbClr val="999999"/>
-            </a:solidFill>
-          </a:ln>
-        </p:spPr>
-        <p:style>
-          <a:lnRef idx="1">
-            <a:schemeClr val="accent1"/>
-          </a:lnRef>
-          <a:fillRef idx="3">
-            <a:schemeClr val="accent1"/>
-          </a:fillRef>
-          <a:effectRef idx="2">
-            <a:schemeClr val="accent1"/>
-          </a:effectRef>
-          <a:fontRef idx="minor">
-            <a:schemeClr val="lt1"/>
-          </a:fontRef>
-        </p:style>
-        <p:txBody>
-          <a:bodyPr rtlCol="0" anchor="ctr"/>
-          <a:lstStyle/>
-          <a:p>
-            <a:pPr algn="ctr"/>
-          </a:p>
-        </p:txBody>
-      </p:sp>
-      <p:sp>
-        <p:nvSpPr>
-          <p:cNvPr id="18" name="Rectangle 17"/>
-          <p:cNvSpPr/>
-          <p:nvPr/>
-        </p:nvSpPr>
-        <p:spPr>
-          <a:xfrm>
-            <a:off x="700000" y="4300000"/>
-            <a:ext cx="90000" cy="850000"/>
-          </a:xfrm>
-          <a:prstGeom prst="rect">
-            <a:avLst/>
-          </a:prstGeom>
-          <a:solidFill>
-            <a:srgbClr val="CC0000"/>
-          </a:solidFill>
-          <a:ln>
-            <a:noFill/>
-          </a:ln>
-        </p:spPr>
-        <p:style>
-          <a:lnRef idx="1">
-            <a:schemeClr val="accent1"/>
-          </a:lnRef>
-          <a:fillRef idx="3">
-            <a:schemeClr val="accent1"/>
-          </a:fillRef>
-          <a:effectRef idx="2">
-            <a:schemeClr val="accent1"/>
-          </a:effectRef>
-          <a:fontRef idx="minor">
-            <a:schemeClr val="lt1"/>
-          </a:fontRef>
-        </p:style>
-        <p:txBody>
-          <a:bodyPr rtlCol="0" anchor="ctr"/>
-          <a:lstStyle/>
-          <a:p>
-            <a:pPr algn="ctr"/>
-          </a:p>
-        </p:txBody>
-      </p:sp>
-      <p:sp>
-        <p:nvSpPr>
-          <p:cNvPr id="19" name="TextBox 18"/>
-          <p:cNvSpPr txBox="1"/>
-          <p:nvPr/>
-        </p:nvSpPr>
-        <p:spPr>
-          <a:xfrm>
-            <a:off x="1000000" y="4400000"/>
-            <a:ext cx="10400000" cy="650000"/>
-          </a:xfrm>
-          <a:prstGeom prst="rect">
-            <a:avLst/>
-          </a:prstGeom>
-          <a:noFill/>
-        </p:spPr>
-        <p:txBody>
-          <a:bodyPr wrap="square" anchor="ctr">
-            <a:spAutoFit/>
-          </a:bodyPr>
-          <a:lstStyle/>
-          <a:p>
-            <a:pPr algn="l"/>
+              <a:t>•  при переохлаждении замените мокрую одежду, укройте и согревайте постепенно</a:t>
+            </a:r>
+          </a:p>
+          <a:p>
+            <a:pPr algn="l">
+              <a:spcAft>
+                <a:spcPts val="800"/>
+              </a:spcAft>
+            </a:pPr>
             <a:r>
               <a:rPr sz="1300" b="0">
                 <a:solidFill>
@@ -9106,132 +11778,7 @@
                 <a:ea typeface="Open Sans"/>
                 <a:cs typeface="Open Sans"/>
               </a:rPr>
-              <a:t>Вызовите скорую помощь</a:t>
-            </a:r>
-          </a:p>
-        </p:txBody>
-      </p:sp>
-      <p:sp>
-        <p:nvSpPr>
-          <p:cNvPr id="20" name="Rectangle 19"/>
-          <p:cNvSpPr/>
-          <p:nvPr/>
-        </p:nvSpPr>
-        <p:spPr>
-          <a:xfrm>
-            <a:off x="700000" y="5250000"/>
-            <a:ext cx="11000000" cy="850000"/>
-          </a:xfrm>
-          <a:prstGeom prst="rect">
-            <a:avLst/>
-          </a:prstGeom>
-          <a:solidFill>
-            <a:srgbClr val="FFFFFF"/>
-          </a:solidFill>
-          <a:ln w="12700">
-            <a:solidFill>
-              <a:srgbClr val="999999"/>
-            </a:solidFill>
-          </a:ln>
-        </p:spPr>
-        <p:style>
-          <a:lnRef idx="1">
-            <a:schemeClr val="accent1"/>
-          </a:lnRef>
-          <a:fillRef idx="3">
-            <a:schemeClr val="accent1"/>
-          </a:fillRef>
-          <a:effectRef idx="2">
-            <a:schemeClr val="accent1"/>
-          </a:effectRef>
-          <a:fontRef idx="minor">
-            <a:schemeClr val="lt1"/>
-          </a:fontRef>
-        </p:style>
-        <p:txBody>
-          <a:bodyPr rtlCol="0" anchor="ctr"/>
-          <a:lstStyle/>
-          <a:p>
-            <a:pPr algn="ctr"/>
-          </a:p>
-        </p:txBody>
-      </p:sp>
-      <p:sp>
-        <p:nvSpPr>
-          <p:cNvPr id="21" name="Rectangle 20"/>
-          <p:cNvSpPr/>
-          <p:nvPr/>
-        </p:nvSpPr>
-        <p:spPr>
-          <a:xfrm>
-            <a:off x="700000" y="5250000"/>
-            <a:ext cx="90000" cy="850000"/>
-          </a:xfrm>
-          <a:prstGeom prst="rect">
-            <a:avLst/>
-          </a:prstGeom>
-          <a:solidFill>
-            <a:srgbClr val="CC0000"/>
-          </a:solidFill>
-          <a:ln>
-            <a:noFill/>
-          </a:ln>
-        </p:spPr>
-        <p:style>
-          <a:lnRef idx="1">
-            <a:schemeClr val="accent1"/>
-          </a:lnRef>
-          <a:fillRef idx="3">
-            <a:schemeClr val="accent1"/>
-          </a:fillRef>
-          <a:effectRef idx="2">
-            <a:schemeClr val="accent1"/>
-          </a:effectRef>
-          <a:fontRef idx="minor">
-            <a:schemeClr val="lt1"/>
-          </a:fontRef>
-        </p:style>
-        <p:txBody>
-          <a:bodyPr rtlCol="0" anchor="ctr"/>
-          <a:lstStyle/>
-          <a:p>
-            <a:pPr algn="ctr"/>
-          </a:p>
-        </p:txBody>
-      </p:sp>
-      <p:sp>
-        <p:nvSpPr>
-          <p:cNvPr id="22" name="TextBox 21"/>
-          <p:cNvSpPr txBox="1"/>
-          <p:nvPr/>
-        </p:nvSpPr>
-        <p:spPr>
-          <a:xfrm>
-            <a:off x="1000000" y="5350000"/>
-            <a:ext cx="10400000" cy="650000"/>
-          </a:xfrm>
-          <a:prstGeom prst="rect">
-            <a:avLst/>
-          </a:prstGeom>
-          <a:noFill/>
-        </p:spPr>
-        <p:txBody>
-          <a:bodyPr wrap="square" anchor="ctr">
-            <a:spAutoFit/>
-          </a:bodyPr>
-          <a:lstStyle/>
-          <a:p>
-            <a:pPr algn="l"/>
-            <a:r>
-              <a:rPr sz="1300" b="0">
-                <a:solidFill>
-                  <a:srgbClr val="333333"/>
-                </a:solidFill>
-                <a:latin typeface="Open Sans"/>
-                <a:ea typeface="Open Sans"/>
-                <a:cs typeface="Open Sans"/>
-              </a:rPr>
-              <a:t>Наблюдайте и поддерживайте</a:t>
+              <a:t>•  не растирайте отмороженную кожу и не согревайте ее у огня</a:t>
             </a:r>
           </a:p>
         </p:txBody>
@@ -9329,7 +11876,7 @@
                 <a:ea typeface="Open Sans"/>
                 <a:cs typeface="Open Sans"/>
               </a:rPr>
-              <a:t>ПАМЯТКА</a:t>
+              <a:t>ХИМИЧЕСКОЕ ПОРАЖЕНИЕ И ЭЛЕКТРОТРАВМА</a:t>
             </a:r>
           </a:p>
         </p:txBody>
@@ -9494,30 +12041,270 @@
           </a:p>
         </p:txBody>
       </p:sp>
-      <p:pic>
-        <p:nvPicPr>
-          <p:cNvPr id="8" name="Picture 7" descr="pamyatka-tema4-osnovnye-sostoyaniya-16x9.png"/>
-          <p:cNvPicPr>
-            <a:picLocks noChangeAspect="1"/>
-          </p:cNvPicPr>
-          <p:nvPr/>
-        </p:nvPicPr>
-        <p:blipFill>
-          <a:blip r:embed="rId2"/>
-          <a:stretch>
-            <a:fillRect/>
-          </a:stretch>
-        </p:blipFill>
-        <p:spPr>
-          <a:xfrm>
-            <a:off x="2300000" y="1400000"/>
-            <a:ext cx="7800000" cy="5200000"/>
-          </a:xfrm>
-          <a:prstGeom prst="rect">
-            <a:avLst/>
-          </a:prstGeom>
-        </p:spPr>
-      </p:pic>
+      <p:sp>
+        <p:nvSpPr>
+          <p:cNvPr id="8" name="TextBox 7"/>
+          <p:cNvSpPr txBox="1"/>
+          <p:nvPr/>
+        </p:nvSpPr>
+        <p:spPr>
+          <a:xfrm>
+            <a:off x="700000" y="1400000"/>
+            <a:ext cx="5400000" cy="400000"/>
+          </a:xfrm>
+          <a:prstGeom prst="rect">
+            <a:avLst/>
+          </a:prstGeom>
+          <a:noFill/>
+        </p:spPr>
+        <p:txBody>
+          <a:bodyPr wrap="square" anchor="t">
+            <a:spAutoFit/>
+          </a:bodyPr>
+          <a:lstStyle/>
+          <a:p>
+            <a:pPr algn="l"/>
+            <a:r>
+              <a:rPr sz="1400" b="1">
+                <a:solidFill>
+                  <a:srgbClr val="333333"/>
+                </a:solidFill>
+                <a:latin typeface="Open Sans"/>
+                <a:ea typeface="Open Sans"/>
+                <a:cs typeface="Open Sans"/>
+              </a:rPr>
+              <a:t>Химическое вещество</a:t>
+            </a:r>
+          </a:p>
+        </p:txBody>
+      </p:sp>
+      <p:sp>
+        <p:nvSpPr>
+          <p:cNvPr id="9" name="TextBox 8"/>
+          <p:cNvSpPr txBox="1"/>
+          <p:nvPr/>
+        </p:nvSpPr>
+        <p:spPr>
+          <a:xfrm>
+            <a:off x="6600000" y="1400000"/>
+            <a:ext cx="5400000" cy="400000"/>
+          </a:xfrm>
+          <a:prstGeom prst="rect">
+            <a:avLst/>
+          </a:prstGeom>
+          <a:noFill/>
+        </p:spPr>
+        <p:txBody>
+          <a:bodyPr wrap="square" anchor="t">
+            <a:spAutoFit/>
+          </a:bodyPr>
+          <a:lstStyle/>
+          <a:p>
+            <a:pPr algn="l"/>
+            <a:r>
+              <a:rPr sz="1400" b="1">
+                <a:solidFill>
+                  <a:srgbClr val="333333"/>
+                </a:solidFill>
+                <a:latin typeface="Open Sans"/>
+                <a:ea typeface="Open Sans"/>
+                <a:cs typeface="Open Sans"/>
+              </a:rPr>
+              <a:t>Электрический ток</a:t>
+            </a:r>
+          </a:p>
+        </p:txBody>
+      </p:sp>
+      <p:sp>
+        <p:nvSpPr>
+          <p:cNvPr id="10" name="TextBox 9"/>
+          <p:cNvSpPr txBox="1"/>
+          <p:nvPr/>
+        </p:nvSpPr>
+        <p:spPr>
+          <a:xfrm>
+            <a:off x="700000" y="1850000"/>
+            <a:ext cx="5400000" cy="4000000"/>
+          </a:xfrm>
+          <a:prstGeom prst="rect">
+            <a:avLst/>
+          </a:prstGeom>
+          <a:noFill/>
+        </p:spPr>
+        <p:txBody>
+          <a:bodyPr wrap="square">
+            <a:spAutoFit/>
+          </a:bodyPr>
+          <a:lstStyle/>
+          <a:p>
+            <a:pPr algn="l">
+              <a:spcAft>
+                <a:spcPts val="800"/>
+              </a:spcAft>
+            </a:pPr>
+            <a:r>
+              <a:rPr sz="1300" b="0">
+                <a:solidFill>
+                  <a:srgbClr val="333333"/>
+                </a:solidFill>
+                <a:latin typeface="Open Sans"/>
+                <a:ea typeface="Open Sans"/>
+                <a:cs typeface="Open Sans"/>
+              </a:rPr>
+              <a:t>•  защитите себя и удалите загрязненную одежду</a:t>
+            </a:r>
+          </a:p>
+          <a:p>
+            <a:pPr algn="l">
+              <a:spcAft>
+                <a:spcPts val="800"/>
+              </a:spcAft>
+            </a:pPr>
+            <a:r>
+              <a:rPr sz="1300" b="0">
+                <a:solidFill>
+                  <a:srgbClr val="333333"/>
+                </a:solidFill>
+                <a:latin typeface="Open Sans"/>
+                <a:ea typeface="Open Sans"/>
+                <a:cs typeface="Open Sans"/>
+              </a:rPr>
+              <a:t>•  промывайте пораженную кожу водой не менее 20 минут</a:t>
+            </a:r>
+          </a:p>
+          <a:p>
+            <a:pPr algn="l">
+              <a:spcAft>
+                <a:spcPts val="800"/>
+              </a:spcAft>
+            </a:pPr>
+            <a:r>
+              <a:rPr sz="1300" b="0">
+                <a:solidFill>
+                  <a:srgbClr val="333333"/>
+                </a:solidFill>
+                <a:latin typeface="Open Sans"/>
+                <a:ea typeface="Open Sans"/>
+                <a:cs typeface="Open Sans"/>
+              </a:rPr>
+              <a:t>•  при проглатывании едкого вещества не вызывайте рвоту</a:t>
+            </a:r>
+          </a:p>
+          <a:p>
+            <a:pPr algn="l">
+              <a:spcAft>
+                <a:spcPts val="800"/>
+              </a:spcAft>
+            </a:pPr>
+            <a:r>
+              <a:rPr sz="1300" b="0">
+                <a:solidFill>
+                  <a:srgbClr val="333333"/>
+                </a:solidFill>
+                <a:latin typeface="Open Sans"/>
+                <a:ea typeface="Open Sans"/>
+                <a:cs typeface="Open Sans"/>
+              </a:rPr>
+              <a:t>•  сохраните упаковку или название вещества</a:t>
+            </a:r>
+          </a:p>
+        </p:txBody>
+      </p:sp>
+      <p:sp>
+        <p:nvSpPr>
+          <p:cNvPr id="11" name="TextBox 10"/>
+          <p:cNvSpPr txBox="1"/>
+          <p:nvPr/>
+        </p:nvSpPr>
+        <p:spPr>
+          <a:xfrm>
+            <a:off x="6600000" y="1850000"/>
+            <a:ext cx="5400000" cy="4000000"/>
+          </a:xfrm>
+          <a:prstGeom prst="rect">
+            <a:avLst/>
+          </a:prstGeom>
+          <a:noFill/>
+        </p:spPr>
+        <p:txBody>
+          <a:bodyPr wrap="square">
+            <a:spAutoFit/>
+          </a:bodyPr>
+          <a:lstStyle/>
+          <a:p>
+            <a:pPr algn="l">
+              <a:spcAft>
+                <a:spcPts val="800"/>
+              </a:spcAft>
+            </a:pPr>
+            <a:r>
+              <a:rPr sz="1300" b="0">
+                <a:solidFill>
+                  <a:srgbClr val="333333"/>
+                </a:solidFill>
+                <a:latin typeface="Open Sans"/>
+                <a:ea typeface="Open Sans"/>
+                <a:cs typeface="Open Sans"/>
+              </a:rPr>
+              <a:t>•  не касайтесь пострадавшего до надежного отключения источника</a:t>
+            </a:r>
+          </a:p>
+          <a:p>
+            <a:pPr algn="l">
+              <a:spcAft>
+                <a:spcPts val="800"/>
+              </a:spcAft>
+            </a:pPr>
+            <a:r>
+              <a:rPr sz="1300" b="0">
+                <a:solidFill>
+                  <a:srgbClr val="333333"/>
+                </a:solidFill>
+                <a:latin typeface="Open Sans"/>
+                <a:ea typeface="Open Sans"/>
+                <a:cs typeface="Open Sans"/>
+              </a:rPr>
+              <a:t>•  к высоковольтным проводам не приближайтесь</a:t>
+            </a:r>
+          </a:p>
+          <a:p>
+            <a:pPr algn="l">
+              <a:spcAft>
+                <a:spcPts val="800"/>
+              </a:spcAft>
+            </a:pPr>
+            <a:r>
+              <a:rPr sz="1300" b="0">
+                <a:solidFill>
+                  <a:srgbClr val="333333"/>
+                </a:solidFill>
+                <a:latin typeface="Open Sans"/>
+                <a:ea typeface="Open Sans"/>
+                <a:cs typeface="Open Sans"/>
+              </a:rPr>
+              <a:t>•  после отключения сразу оцените сознание и дыхание</a:t>
+            </a:r>
+          </a:p>
+          <a:p>
+            <a:pPr algn="l">
+              <a:spcAft>
+                <a:spcPts val="800"/>
+              </a:spcAft>
+            </a:pPr>
+            <a:r>
+              <a:rPr sz="1300" b="0">
+                <a:solidFill>
+                  <a:srgbClr val="333333"/>
+                </a:solidFill>
+                <a:latin typeface="Open Sans"/>
+                <a:ea typeface="Open Sans"/>
+                <a:cs typeface="Open Sans"/>
+              </a:rPr>
+              <a:t>•  будьте готовы начать сердечно-легочную реанимацию</a:t>
+            </a:r>
+          </a:p>
+        </p:txBody>
+      </p:sp>
     </p:spTree>
   </p:cSld>
   <p:clrMapOvr>
